--- a/pptx/Module10_Contraintes_et_intégrité.pptx
+++ b/pptx/Module10_Contraintes_et_intégrité.pptx
@@ -13,9 +13,11 @@
     <p:sldId id="261" r:id="rId7"/>
     <p:sldId id="262" r:id="rId8"/>
     <p:sldId id="263" r:id="rId9"/>
+    <p:sldId id="264" r:id="rId10"/>
+    <p:sldId id="265" r:id="rId11"/>
   </p:sldIdLst>
   <p:notesMasterIdLst>
-    <p:notesMasterId r:id="rId10"/>
+    <p:notesMasterId r:id="rId12"/>
   </p:notesMasterIdLst>
   <p:sldSz cx="9144000" cy="5143500"/>
   <p:notesSz cx="5143500" cy="9144000"/>
@@ -551,6 +553,94 @@
 </p:notes>
 </file>
 
+<file path=ppt/notesSlides/notesSlide10.xml><?xml version="1.0" encoding="utf-8"?>
+<p:notes xmlns:a="http://schemas.openxmlformats.org/drawingml/2006/main" xmlns:r="http://schemas.openxmlformats.org/officeDocument/2006/relationships" xmlns:p="http://schemas.openxmlformats.org/presentationml/2006/main">
+  <p:cSld>
+    <p:spTree>
+      <p:nvGrpSpPr>
+        <p:cNvPr id="1" name=""/>
+        <p:cNvGrpSpPr/>
+        <p:nvPr/>
+      </p:nvGrpSpPr>
+      <p:grpSpPr>
+        <a:xfrm>
+          <a:off x="0" y="0"/>
+          <a:ext cx="0" cy="0"/>
+          <a:chOff x="0" y="0"/>
+          <a:chExt cx="0" cy="0"/>
+        </a:xfrm>
+      </p:grpSpPr>
+      <p:sp>
+        <p:nvSpPr>
+          <p:cNvPr id="2" name="Slide Image Placeholder 1"/>
+          <p:cNvSpPr>
+            <a:spLocks noGrp="1" noRot="1" noChangeAspect="1"/>
+          </p:cNvSpPr>
+          <p:nvPr>
+            <p:ph type="sldImg"/>
+          </p:nvPr>
+        </p:nvSpPr>
+        <p:spPr/>
+      </p:sp>
+      <p:sp>
+        <p:nvSpPr>
+          <p:cNvPr id="3" name="Notes Placeholder 2"/>
+          <p:cNvSpPr>
+            <a:spLocks noGrp="1"/>
+          </p:cNvSpPr>
+          <p:nvPr>
+            <p:ph type="body" idx="1"/>
+          </p:nvPr>
+        </p:nvSpPr>
+        <p:spPr/>
+        <p:txBody>
+          <a:bodyPr/>
+          <a:lstStyle/>
+          <a:p>
+            <a:r>
+              <a:rPr lang="en-US" dirty="0"/>
+              <a:t/>
+            </a:r>
+            <a:endParaRPr lang="en-US" dirty="0"/>
+          </a:p>
+        </p:txBody>
+      </p:sp>
+      <p:sp>
+        <p:nvSpPr>
+          <p:cNvPr id="4" name="Slide Number Placeholder 3"/>
+          <p:cNvSpPr>
+            <a:spLocks noGrp="1"/>
+          </p:cNvSpPr>
+          <p:nvPr>
+            <p:ph type="sldNum" sz="quarter" idx="10"/>
+          </p:nvPr>
+        </p:nvSpPr>
+        <p:spPr/>
+        <p:txBody>
+          <a:bodyPr/>
+          <a:lstStyle/>
+          <a:p>
+            <a:fld id="{F7021451-1387-4CA6-816F-3879F97B5CBC}" type="slidenum">
+              <a:rPr lang="en-US"/>
+              <a:t>10</a:t>
+            </a:fld>
+            <a:endParaRPr lang="en-US"/>
+          </a:p>
+        </p:txBody>
+      </p:sp>
+    </p:spTree>
+    <p:extLst>
+      <p:ext uri="{BB962C8B-B14F-4D97-AF65-F5344CB8AC3E}">
+        <p14:creationId xmlns:p14="http://schemas.microsoft.com/office/powerpoint/2010/main" val="1024086991"/>
+      </p:ext>
+    </p:extLst>
+  </p:cSld>
+  <p:clrMapOvr>
+    <a:masterClrMapping/>
+  </p:clrMapOvr>
+</p:notes>
+</file>
+
 <file path=ppt/notesSlides/notesSlide2.xml><?xml version="1.0" encoding="utf-8"?>
 <p:notes xmlns:a="http://schemas.openxmlformats.org/drawingml/2006/main" xmlns:r="http://schemas.openxmlformats.org/officeDocument/2006/relationships" xmlns:p="http://schemas.openxmlformats.org/presentationml/2006/main">
   <p:cSld>
@@ -597,7 +687,7 @@
           <a:p>
             <a:r>
               <a:rPr lang="en-US" dirty="0"/>
-              <a:t>Avant MySQL 8.0.16, CHECK était accepté mais IGNORÉ ! Vérifier la version.</a:t>
+              <a:t>Ecrire chaque contrainte au tableau. Pour chaque, demander : 'Quel message d'erreur si on viole ?' Les étudiants doivent mémoriser les codes d'erreur.</a:t>
             </a:r>
             <a:endParaRPr lang="en-US" dirty="0"/>
           </a:p>
@@ -685,7 +775,7 @@
           <a:p>
             <a:r>
               <a:rPr lang="en-US" dirty="0"/>
-              <a:t>Le choix du comportement dépend du MÉTIER. Poser la question : 'Si on supprime un artiste, que deviennent ses albums ?'</a:t>
+              <a:t>Question clé : 'Si on supprime un artiste, que deviennent ses albums ?' RESTRICT = on bloque. 'Et ses associations genre_artiste ?' CASCADE = on supprime les associations.</a:t>
             </a:r>
             <a:endParaRPr lang="en-US" dirty="0"/>
           </a:p>
@@ -773,7 +863,7 @@
           <a:p>
             <a:r>
               <a:rPr lang="en-US" dirty="0"/>
-              <a:t>ALTER TABLE est essentiel pour corriger le schéma sans tout recréer.</a:t>
+              <a:t>ALTER TABLE est essentiel pour corriger le schema sans tout recreer. Faire faire en live dans HeidiSQL.</a:t>
             </a:r>
             <a:endParaRPr lang="en-US" dirty="0"/>
           </a:p>
@@ -861,7 +951,7 @@
           <a:p>
             <a:r>
               <a:rPr lang="en-US" dirty="0"/>
-              <a:t>Exercice : essayer volontairement de violer chaque contrainte et noter l'erreur. C'est le meilleur apprentissage.</a:t>
+              <a:t>Exercice CRUCIAL : essayer de violer CHAQUE contrainte et noter l'erreur. C'est le meilleur apprentissage. Ça prépare directement la LO3 (tests).</a:t>
             </a:r>
             <a:endParaRPr lang="en-US" dirty="0"/>
           </a:p>
@@ -949,7 +1039,7 @@
           <a:p>
             <a:r>
               <a:rPr lang="en-US" dirty="0"/>
-              <a:t>Ce module prépare directement le Module 17 (plan de tests).</a:t>
+              <a:t>Tableau recapitulatif a afficher. Les etudiants doivent pouvoir justifier CHAQUE contrainte par une regle de gestion du Module 3.</a:t>
             </a:r>
             <a:endParaRPr lang="en-US" dirty="0"/>
           </a:p>
@@ -1037,7 +1127,7 @@
           <a:p>
             <a:r>
               <a:rPr lang="en-US" dirty="0"/>
-              <a:t/>
+              <a:t>Faire le lien avec GESCOM : les exercices du sandbox utilisent la meme BDD que le cours SQL.</a:t>
             </a:r>
             <a:endParaRPr lang="en-US" dirty="0"/>
           </a:p>
@@ -1125,7 +1215,7 @@
           <a:p>
             <a:r>
               <a:rPr lang="en-US" dirty="0"/>
-              <a:t/>
+              <a:t>Exercice autonome. Les etudiants documentent chaque test : contrainte, valeur, erreur obtenue.</a:t>
             </a:r>
             <a:endParaRPr lang="en-US" dirty="0"/>
           </a:p>
@@ -1149,6 +1239,94 @@
             <a:fld id="{F7021451-1387-4CA6-816F-3879F97B5CBC}" type="slidenum">
               <a:rPr lang="en-US"/>
               <a:t>8</a:t>
+            </a:fld>
+            <a:endParaRPr lang="en-US"/>
+          </a:p>
+        </p:txBody>
+      </p:sp>
+    </p:spTree>
+    <p:extLst>
+      <p:ext uri="{BB962C8B-B14F-4D97-AF65-F5344CB8AC3E}">
+        <p14:creationId xmlns:p14="http://schemas.microsoft.com/office/powerpoint/2010/main" val="1024086991"/>
+      </p:ext>
+    </p:extLst>
+  </p:cSld>
+  <p:clrMapOvr>
+    <a:masterClrMapping/>
+  </p:clrMapOvr>
+</p:notes>
+</file>
+
+<file path=ppt/notesSlides/notesSlide9.xml><?xml version="1.0" encoding="utf-8"?>
+<p:notes xmlns:a="http://schemas.openxmlformats.org/drawingml/2006/main" xmlns:r="http://schemas.openxmlformats.org/officeDocument/2006/relationships" xmlns:p="http://schemas.openxmlformats.org/presentationml/2006/main">
+  <p:cSld>
+    <p:spTree>
+      <p:nvGrpSpPr>
+        <p:cNvPr id="1" name=""/>
+        <p:cNvGrpSpPr/>
+        <p:nvPr/>
+      </p:nvGrpSpPr>
+      <p:grpSpPr>
+        <a:xfrm>
+          <a:off x="0" y="0"/>
+          <a:ext cx="0" cy="0"/>
+          <a:chOff x="0" y="0"/>
+          <a:chExt cx="0" cy="0"/>
+        </a:xfrm>
+      </p:grpSpPr>
+      <p:sp>
+        <p:nvSpPr>
+          <p:cNvPr id="2" name="Slide Image Placeholder 1"/>
+          <p:cNvSpPr>
+            <a:spLocks noGrp="1" noRot="1" noChangeAspect="1"/>
+          </p:cNvSpPr>
+          <p:nvPr>
+            <p:ph type="sldImg"/>
+          </p:nvPr>
+        </p:nvSpPr>
+        <p:spPr/>
+      </p:sp>
+      <p:sp>
+        <p:nvSpPr>
+          <p:cNvPr id="3" name="Notes Placeholder 2"/>
+          <p:cNvSpPr>
+            <a:spLocks noGrp="1"/>
+          </p:cNvSpPr>
+          <p:nvPr>
+            <p:ph type="body" idx="1"/>
+          </p:nvPr>
+        </p:nvSpPr>
+        <p:spPr/>
+        <p:txBody>
+          <a:bodyPr/>
+          <a:lstStyle/>
+          <a:p>
+            <a:r>
+              <a:rPr lang="en-US" dirty="0"/>
+              <a:t/>
+            </a:r>
+            <a:endParaRPr lang="en-US" dirty="0"/>
+          </a:p>
+        </p:txBody>
+      </p:sp>
+      <p:sp>
+        <p:nvSpPr>
+          <p:cNvPr id="4" name="Slide Number Placeholder 3"/>
+          <p:cNvSpPr>
+            <a:spLocks noGrp="1"/>
+          </p:cNvSpPr>
+          <p:nvPr>
+            <p:ph type="sldNum" sz="quarter" idx="10"/>
+          </p:nvPr>
+        </p:nvSpPr>
+        <p:spPr/>
+        <p:txBody>
+          <a:bodyPr/>
+          <a:lstStyle/>
+          <a:p>
+            <a:fld id="{F7021451-1387-4CA6-816F-3879F97B5CBC}" type="slidenum">
+              <a:rPr lang="en-US"/>
+              <a:t>9</a:t>
             </a:fld>
             <a:endParaRPr lang="en-US"/>
           </a:p>
@@ -1606,7 +1784,7 @@
               <a:buNone/>
             </a:pPr>
             <a:r>
-              <a:rPr lang="en-US" sz="3200" b="1" dirty="0">
+              <a:rPr lang="en-US" sz="3000" b="1" dirty="0">
                 <a:solidFill>
                   <a:srgbClr val="FFFFFF"/>
                 </a:solidFill>
@@ -1614,9 +1792,9 @@
                 <a:ea typeface="Trebuchet MS" pitchFamily="34" charset="-122"/>
                 <a:cs typeface="Trebuchet MS" pitchFamily="34" charset="-120"/>
               </a:rPr>
-              <a:t>Contraintes et intégrité</a:t>
-            </a:r>
-            <a:endParaRPr lang="en-US" sz="3200" dirty="0"/>
+              <a:t>Contraintes et integrite referentielle</a:t>
+            </a:r>
+            <a:endParaRPr lang="en-US" sz="3000" dirty="0"/>
           </a:p>
         </p:txBody>
       </p:sp>
@@ -1645,7 +1823,7 @@
               <a:buNone/>
             </a:pPr>
             <a:r>
-              <a:rPr lang="en-US" sz="1500" dirty="0">
+              <a:rPr lang="en-US" sz="1400" dirty="0">
                 <a:solidFill>
                   <a:srgbClr val="CCCCCC"/>
                 </a:solidFill>
@@ -1653,9 +1831,9 @@
                 <a:ea typeface="Calibri" pitchFamily="34" charset="-122"/>
                 <a:cs typeface="Calibri" pitchFamily="34" charset="-120"/>
               </a:rPr>
-              <a:t>NOT NULL · UNIQUE · CHECK · FK CASCADE/RESTRICT</a:t>
-            </a:r>
-            <a:endParaRPr lang="en-US" sz="1500" dirty="0"/>
+              <a:t>NOT NULL, UNIQUE, CHECK, FK CASCADE/RESTRICT, ALTER TABLE</a:t>
+            </a:r>
+            <a:endParaRPr lang="en-US" sz="1400" dirty="0"/>
           </a:p>
         </p:txBody>
       </p:sp>
@@ -1695,6 +1873,903 @@
               <a:t>SwissSound Studios | BTEC: P2 M2 | LO2</a:t>
             </a:r>
             <a:endParaRPr lang="en-US" sz="1100" dirty="0"/>
+          </a:p>
+        </p:txBody>
+      </p:sp>
+    </p:spTree>
+  </p:cSld>
+  <p:clrMapOvr>
+    <a:masterClrMapping/>
+  </p:clrMapOvr>
+</p:sld>
+</file>
+
+<file path=ppt/slides/slide10.xml><?xml version="1.0" encoding="utf-8"?>
+<p:sld xmlns:a="http://schemas.openxmlformats.org/drawingml/2006/main" xmlns:r="http://schemas.openxmlformats.org/officeDocument/2006/relationships" xmlns:p="http://schemas.openxmlformats.org/presentationml/2006/main">
+  <p:cSld name="Slide 10">
+    <p:bg>
+      <p:bgPr>
+        <a:solidFill>
+          <a:srgbClr val="F5F7FA"/>
+        </a:solidFill>
+      </p:bgPr>
+    </p:bg>
+    <p:spTree>
+      <p:nvGrpSpPr>
+        <p:cNvPr id="1" name=""/>
+        <p:cNvGrpSpPr/>
+        <p:nvPr/>
+      </p:nvGrpSpPr>
+      <p:grpSpPr>
+        <a:xfrm>
+          <a:off x="0" y="0"/>
+          <a:ext cx="0" cy="0"/>
+          <a:chOff x="0" y="0"/>
+          <a:chExt cx="0" cy="0"/>
+        </a:xfrm>
+      </p:grpSpPr>
+      <p:sp>
+        <p:nvSpPr>
+          <p:cNvPr id="2" name="Text 0"/>
+          <p:cNvSpPr/>
+          <p:nvPr/>
+        </p:nvSpPr>
+        <p:spPr>
+          <a:xfrm>
+            <a:off x="457200" y="137160"/>
+            <a:ext cx="5486400" cy="365760"/>
+          </a:xfrm>
+          <a:prstGeom prst="rect">
+            <a:avLst/>
+          </a:prstGeom>
+          <a:noFill/>
+          <a:ln/>
+        </p:spPr>
+        <p:txBody>
+          <a:bodyPr wrap="square" lIns="0" tIns="0" rIns="0" bIns="0" rtlCol="0" anchor="ctr"/>
+          <a:lstStyle/>
+          <a:p>
+            <a:pPr indent="0" marL="0">
+              <a:buNone/>
+            </a:pPr>
+            <a:r>
+              <a:rPr lang="en-US" sz="1600" b="1" dirty="0">
+                <a:solidFill>
+                  <a:srgbClr val="0D47A1"/>
+                </a:solidFill>
+                <a:latin typeface="Trebuchet MS" pitchFamily="34" charset="0"/>
+                <a:ea typeface="Trebuchet MS" pitchFamily="34" charset="-122"/>
+                <a:cs typeface="Trebuchet MS" pitchFamily="34" charset="-120"/>
+              </a:rPr>
+              <a:t>Memo Module 10</a:t>
+            </a:r>
+            <a:endParaRPr lang="en-US" sz="1600" dirty="0"/>
+          </a:p>
+        </p:txBody>
+      </p:sp>
+      <p:sp>
+        <p:nvSpPr>
+          <p:cNvPr id="3" name="Shape 1"/>
+          <p:cNvSpPr/>
+          <p:nvPr/>
+        </p:nvSpPr>
+        <p:spPr>
+          <a:xfrm>
+            <a:off x="457200" y="640080"/>
+            <a:ext cx="2286000" cy="429768"/>
+          </a:xfrm>
+          <a:prstGeom prst="rect">
+            <a:avLst/>
+          </a:prstGeom>
+          <a:solidFill>
+            <a:srgbClr val="E3F2FD"/>
+          </a:solidFill>
+          <a:ln/>
+        </p:spPr>
+      </p:sp>
+      <p:sp>
+        <p:nvSpPr>
+          <p:cNvPr id="4" name="Text 2"/>
+          <p:cNvSpPr/>
+          <p:nvPr/>
+        </p:nvSpPr>
+        <p:spPr>
+          <a:xfrm>
+            <a:off x="548640" y="640080"/>
+            <a:ext cx="2103120" cy="429768"/>
+          </a:xfrm>
+          <a:prstGeom prst="rect">
+            <a:avLst/>
+          </a:prstGeom>
+          <a:noFill/>
+          <a:ln/>
+        </p:spPr>
+        <p:txBody>
+          <a:bodyPr wrap="square" lIns="0" tIns="0" rIns="0" bIns="0" rtlCol="0" anchor="ctr"/>
+          <a:lstStyle/>
+          <a:p>
+            <a:pPr indent="0" marL="0">
+              <a:buNone/>
+            </a:pPr>
+            <a:r>
+              <a:rPr lang="en-US" sz="900" b="1" dirty="0">
+                <a:solidFill>
+                  <a:srgbClr val="0D47A1"/>
+                </a:solidFill>
+                <a:latin typeface="Trebuchet MS" pitchFamily="34" charset="0"/>
+                <a:ea typeface="Trebuchet MS" pitchFamily="34" charset="-122"/>
+                <a:cs typeface="Trebuchet MS" pitchFamily="34" charset="-120"/>
+              </a:rPr>
+              <a:t>NOT NULL</a:t>
+            </a:r>
+            <a:endParaRPr lang="en-US" sz="900" dirty="0"/>
+          </a:p>
+        </p:txBody>
+      </p:sp>
+      <p:sp>
+        <p:nvSpPr>
+          <p:cNvPr id="5" name="Shape 3"/>
+          <p:cNvSpPr/>
+          <p:nvPr/>
+        </p:nvSpPr>
+        <p:spPr>
+          <a:xfrm>
+            <a:off x="2743200" y="640080"/>
+            <a:ext cx="5943600" cy="429768"/>
+          </a:xfrm>
+          <a:prstGeom prst="rect">
+            <a:avLst/>
+          </a:prstGeom>
+          <a:solidFill>
+            <a:srgbClr val="E3F2FD"/>
+          </a:solidFill>
+          <a:ln/>
+        </p:spPr>
+      </p:sp>
+      <p:sp>
+        <p:nvSpPr>
+          <p:cNvPr id="6" name="Text 4"/>
+          <p:cNvSpPr/>
+          <p:nvPr/>
+        </p:nvSpPr>
+        <p:spPr>
+          <a:xfrm>
+            <a:off x="2834640" y="640080"/>
+            <a:ext cx="5760720" cy="429768"/>
+          </a:xfrm>
+          <a:prstGeom prst="rect">
+            <a:avLst/>
+          </a:prstGeom>
+          <a:noFill/>
+          <a:ln/>
+        </p:spPr>
+        <p:txBody>
+          <a:bodyPr wrap="square" lIns="0" tIns="0" rIns="0" bIns="0" rtlCol="0" anchor="ctr"/>
+          <a:lstStyle/>
+          <a:p>
+            <a:pPr indent="0" marL="0">
+              <a:buNone/>
+            </a:pPr>
+            <a:r>
+              <a:rPr lang="en-US" sz="900" dirty="0">
+                <a:solidFill>
+                  <a:srgbClr val="333333"/>
+                </a:solidFill>
+                <a:latin typeface="Calibri" pitchFamily="34" charset="0"/>
+                <a:ea typeface="Calibri" pitchFamily="34" charset="-122"/>
+                <a:cs typeface="Calibri" pitchFamily="34" charset="-120"/>
+              </a:rPr>
+              <a:t>Obligatoire — erreur 1048</a:t>
+            </a:r>
+            <a:endParaRPr lang="en-US" sz="900" dirty="0"/>
+          </a:p>
+        </p:txBody>
+      </p:sp>
+      <p:sp>
+        <p:nvSpPr>
+          <p:cNvPr id="7" name="Shape 5"/>
+          <p:cNvSpPr/>
+          <p:nvPr/>
+        </p:nvSpPr>
+        <p:spPr>
+          <a:xfrm>
+            <a:off x="457200" y="1097280"/>
+            <a:ext cx="2286000" cy="429768"/>
+          </a:xfrm>
+          <a:prstGeom prst="rect">
+            <a:avLst/>
+          </a:prstGeom>
+          <a:solidFill>
+            <a:srgbClr val="F0F0F0"/>
+          </a:solidFill>
+          <a:ln/>
+        </p:spPr>
+      </p:sp>
+      <p:sp>
+        <p:nvSpPr>
+          <p:cNvPr id="8" name="Text 6"/>
+          <p:cNvSpPr/>
+          <p:nvPr/>
+        </p:nvSpPr>
+        <p:spPr>
+          <a:xfrm>
+            <a:off x="548640" y="1097280"/>
+            <a:ext cx="2103120" cy="429768"/>
+          </a:xfrm>
+          <a:prstGeom prst="rect">
+            <a:avLst/>
+          </a:prstGeom>
+          <a:noFill/>
+          <a:ln/>
+        </p:spPr>
+        <p:txBody>
+          <a:bodyPr wrap="square" lIns="0" tIns="0" rIns="0" bIns="0" rtlCol="0" anchor="ctr"/>
+          <a:lstStyle/>
+          <a:p>
+            <a:pPr indent="0" marL="0">
+              <a:buNone/>
+            </a:pPr>
+            <a:r>
+              <a:rPr lang="en-US" sz="900" b="1" dirty="0">
+                <a:solidFill>
+                  <a:srgbClr val="0D47A1"/>
+                </a:solidFill>
+                <a:latin typeface="Trebuchet MS" pitchFamily="34" charset="0"/>
+                <a:ea typeface="Trebuchet MS" pitchFamily="34" charset="-122"/>
+                <a:cs typeface="Trebuchet MS" pitchFamily="34" charset="-120"/>
+              </a:rPr>
+              <a:t>UNIQUE</a:t>
+            </a:r>
+            <a:endParaRPr lang="en-US" sz="900" dirty="0"/>
+          </a:p>
+        </p:txBody>
+      </p:sp>
+      <p:sp>
+        <p:nvSpPr>
+          <p:cNvPr id="9" name="Shape 7"/>
+          <p:cNvSpPr/>
+          <p:nvPr/>
+        </p:nvSpPr>
+        <p:spPr>
+          <a:xfrm>
+            <a:off x="2743200" y="1097280"/>
+            <a:ext cx="5943600" cy="429768"/>
+          </a:xfrm>
+          <a:prstGeom prst="rect">
+            <a:avLst/>
+          </a:prstGeom>
+          <a:solidFill>
+            <a:srgbClr val="F0F0F0"/>
+          </a:solidFill>
+          <a:ln/>
+        </p:spPr>
+      </p:sp>
+      <p:sp>
+        <p:nvSpPr>
+          <p:cNvPr id="10" name="Text 8"/>
+          <p:cNvSpPr/>
+          <p:nvPr/>
+        </p:nvSpPr>
+        <p:spPr>
+          <a:xfrm>
+            <a:off x="2834640" y="1097280"/>
+            <a:ext cx="5760720" cy="429768"/>
+          </a:xfrm>
+          <a:prstGeom prst="rect">
+            <a:avLst/>
+          </a:prstGeom>
+          <a:noFill/>
+          <a:ln/>
+        </p:spPr>
+        <p:txBody>
+          <a:bodyPr wrap="square" lIns="0" tIns="0" rIns="0" bIns="0" rtlCol="0" anchor="ctr"/>
+          <a:lstStyle/>
+          <a:p>
+            <a:pPr indent="0" marL="0">
+              <a:buNone/>
+            </a:pPr>
+            <a:r>
+              <a:rPr lang="en-US" sz="900" dirty="0">
+                <a:solidFill>
+                  <a:srgbClr val="333333"/>
+                </a:solidFill>
+                <a:latin typeface="Calibri" pitchFamily="34" charset="0"/>
+                <a:ea typeface="Calibri" pitchFamily="34" charset="-122"/>
+                <a:cs typeface="Calibri" pitchFamily="34" charset="-120"/>
+              </a:rPr>
+              <a:t>Pas doublon — erreur 1062</a:t>
+            </a:r>
+            <a:endParaRPr lang="en-US" sz="900" dirty="0"/>
+          </a:p>
+        </p:txBody>
+      </p:sp>
+      <p:sp>
+        <p:nvSpPr>
+          <p:cNvPr id="11" name="Shape 9"/>
+          <p:cNvSpPr/>
+          <p:nvPr/>
+        </p:nvSpPr>
+        <p:spPr>
+          <a:xfrm>
+            <a:off x="457200" y="1554480"/>
+            <a:ext cx="2286000" cy="429768"/>
+          </a:xfrm>
+          <a:prstGeom prst="rect">
+            <a:avLst/>
+          </a:prstGeom>
+          <a:solidFill>
+            <a:srgbClr val="E3F2FD"/>
+          </a:solidFill>
+          <a:ln/>
+        </p:spPr>
+      </p:sp>
+      <p:sp>
+        <p:nvSpPr>
+          <p:cNvPr id="12" name="Text 10"/>
+          <p:cNvSpPr/>
+          <p:nvPr/>
+        </p:nvSpPr>
+        <p:spPr>
+          <a:xfrm>
+            <a:off x="548640" y="1554480"/>
+            <a:ext cx="2103120" cy="429768"/>
+          </a:xfrm>
+          <a:prstGeom prst="rect">
+            <a:avLst/>
+          </a:prstGeom>
+          <a:noFill/>
+          <a:ln/>
+        </p:spPr>
+        <p:txBody>
+          <a:bodyPr wrap="square" lIns="0" tIns="0" rIns="0" bIns="0" rtlCol="0" anchor="ctr"/>
+          <a:lstStyle/>
+          <a:p>
+            <a:pPr indent="0" marL="0">
+              <a:buNone/>
+            </a:pPr>
+            <a:r>
+              <a:rPr lang="en-US" sz="900" b="1" dirty="0">
+                <a:solidFill>
+                  <a:srgbClr val="0D47A1"/>
+                </a:solidFill>
+                <a:latin typeface="Trebuchet MS" pitchFamily="34" charset="0"/>
+                <a:ea typeface="Trebuchet MS" pitchFamily="34" charset="-122"/>
+                <a:cs typeface="Trebuchet MS" pitchFamily="34" charset="-120"/>
+              </a:rPr>
+              <a:t>CHECK</a:t>
+            </a:r>
+            <a:endParaRPr lang="en-US" sz="900" dirty="0"/>
+          </a:p>
+        </p:txBody>
+      </p:sp>
+      <p:sp>
+        <p:nvSpPr>
+          <p:cNvPr id="13" name="Shape 11"/>
+          <p:cNvSpPr/>
+          <p:nvPr/>
+        </p:nvSpPr>
+        <p:spPr>
+          <a:xfrm>
+            <a:off x="2743200" y="1554480"/>
+            <a:ext cx="5943600" cy="429768"/>
+          </a:xfrm>
+          <a:prstGeom prst="rect">
+            <a:avLst/>
+          </a:prstGeom>
+          <a:solidFill>
+            <a:srgbClr val="E3F2FD"/>
+          </a:solidFill>
+          <a:ln/>
+        </p:spPr>
+      </p:sp>
+      <p:sp>
+        <p:nvSpPr>
+          <p:cNvPr id="14" name="Text 12"/>
+          <p:cNvSpPr/>
+          <p:nvPr/>
+        </p:nvSpPr>
+        <p:spPr>
+          <a:xfrm>
+            <a:off x="2834640" y="1554480"/>
+            <a:ext cx="5760720" cy="429768"/>
+          </a:xfrm>
+          <a:prstGeom prst="rect">
+            <a:avLst/>
+          </a:prstGeom>
+          <a:noFill/>
+          <a:ln/>
+        </p:spPr>
+        <p:txBody>
+          <a:bodyPr wrap="square" lIns="0" tIns="0" rIns="0" bIns="0" rtlCol="0" anchor="ctr"/>
+          <a:lstStyle/>
+          <a:p>
+            <a:pPr indent="0" marL="0">
+              <a:buNone/>
+            </a:pPr>
+            <a:r>
+              <a:rPr lang="en-US" sz="900" dirty="0">
+                <a:solidFill>
+                  <a:srgbClr val="333333"/>
+                </a:solidFill>
+                <a:latin typeface="Calibri" pitchFamily="34" charset="0"/>
+                <a:ea typeface="Calibri" pitchFamily="34" charset="-122"/>
+                <a:cs typeface="Calibri" pitchFamily="34" charset="-120"/>
+              </a:rPr>
+              <a:t>Condition (prix&gt;=0) — erreur 3819</a:t>
+            </a:r>
+            <a:endParaRPr lang="en-US" sz="900" dirty="0"/>
+          </a:p>
+        </p:txBody>
+      </p:sp>
+      <p:sp>
+        <p:nvSpPr>
+          <p:cNvPr id="15" name="Shape 13"/>
+          <p:cNvSpPr/>
+          <p:nvPr/>
+        </p:nvSpPr>
+        <p:spPr>
+          <a:xfrm>
+            <a:off x="457200" y="2011680"/>
+            <a:ext cx="2286000" cy="429768"/>
+          </a:xfrm>
+          <a:prstGeom prst="rect">
+            <a:avLst/>
+          </a:prstGeom>
+          <a:solidFill>
+            <a:srgbClr val="F0F0F0"/>
+          </a:solidFill>
+          <a:ln/>
+        </p:spPr>
+      </p:sp>
+      <p:sp>
+        <p:nvSpPr>
+          <p:cNvPr id="16" name="Text 14"/>
+          <p:cNvSpPr/>
+          <p:nvPr/>
+        </p:nvSpPr>
+        <p:spPr>
+          <a:xfrm>
+            <a:off x="548640" y="2011680"/>
+            <a:ext cx="2103120" cy="429768"/>
+          </a:xfrm>
+          <a:prstGeom prst="rect">
+            <a:avLst/>
+          </a:prstGeom>
+          <a:noFill/>
+          <a:ln/>
+        </p:spPr>
+        <p:txBody>
+          <a:bodyPr wrap="square" lIns="0" tIns="0" rIns="0" bIns="0" rtlCol="0" anchor="ctr"/>
+          <a:lstStyle/>
+          <a:p>
+            <a:pPr indent="0" marL="0">
+              <a:buNone/>
+            </a:pPr>
+            <a:r>
+              <a:rPr lang="en-US" sz="900" b="1" dirty="0">
+                <a:solidFill>
+                  <a:srgbClr val="0D47A1"/>
+                </a:solidFill>
+                <a:latin typeface="Trebuchet MS" pitchFamily="34" charset="0"/>
+                <a:ea typeface="Trebuchet MS" pitchFamily="34" charset="-122"/>
+                <a:cs typeface="Trebuchet MS" pitchFamily="34" charset="-120"/>
+              </a:rPr>
+              <a:t>FK CASCADE</a:t>
+            </a:r>
+            <a:endParaRPr lang="en-US" sz="900" dirty="0"/>
+          </a:p>
+        </p:txBody>
+      </p:sp>
+      <p:sp>
+        <p:nvSpPr>
+          <p:cNvPr id="17" name="Shape 15"/>
+          <p:cNvSpPr/>
+          <p:nvPr/>
+        </p:nvSpPr>
+        <p:spPr>
+          <a:xfrm>
+            <a:off x="2743200" y="2011680"/>
+            <a:ext cx="5943600" cy="429768"/>
+          </a:xfrm>
+          <a:prstGeom prst="rect">
+            <a:avLst/>
+          </a:prstGeom>
+          <a:solidFill>
+            <a:srgbClr val="F0F0F0"/>
+          </a:solidFill>
+          <a:ln/>
+        </p:spPr>
+      </p:sp>
+      <p:sp>
+        <p:nvSpPr>
+          <p:cNvPr id="18" name="Text 16"/>
+          <p:cNvSpPr/>
+          <p:nvPr/>
+        </p:nvSpPr>
+        <p:spPr>
+          <a:xfrm>
+            <a:off x="2834640" y="2011680"/>
+            <a:ext cx="5760720" cy="429768"/>
+          </a:xfrm>
+          <a:prstGeom prst="rect">
+            <a:avLst/>
+          </a:prstGeom>
+          <a:noFill/>
+          <a:ln/>
+        </p:spPr>
+        <p:txBody>
+          <a:bodyPr wrap="square" lIns="0" tIns="0" rIns="0" bIns="0" rtlCol="0" anchor="ctr"/>
+          <a:lstStyle/>
+          <a:p>
+            <a:pPr indent="0" marL="0">
+              <a:buNone/>
+            </a:pPr>
+            <a:r>
+              <a:rPr lang="en-US" sz="900" dirty="0">
+                <a:solidFill>
+                  <a:srgbClr val="333333"/>
+                </a:solidFill>
+                <a:latin typeface="Calibri" pitchFamily="34" charset="0"/>
+                <a:ea typeface="Calibri" pitchFamily="34" charset="-122"/>
+                <a:cs typeface="Calibri" pitchFamily="34" charset="-120"/>
+              </a:rPr>
+              <a:t>Supprime enfants avec parent</a:t>
+            </a:r>
+            <a:endParaRPr lang="en-US" sz="900" dirty="0"/>
+          </a:p>
+        </p:txBody>
+      </p:sp>
+      <p:sp>
+        <p:nvSpPr>
+          <p:cNvPr id="19" name="Shape 17"/>
+          <p:cNvSpPr/>
+          <p:nvPr/>
+        </p:nvSpPr>
+        <p:spPr>
+          <a:xfrm>
+            <a:off x="457200" y="2468880"/>
+            <a:ext cx="2286000" cy="429768"/>
+          </a:xfrm>
+          <a:prstGeom prst="rect">
+            <a:avLst/>
+          </a:prstGeom>
+          <a:solidFill>
+            <a:srgbClr val="E3F2FD"/>
+          </a:solidFill>
+          <a:ln/>
+        </p:spPr>
+      </p:sp>
+      <p:sp>
+        <p:nvSpPr>
+          <p:cNvPr id="20" name="Text 18"/>
+          <p:cNvSpPr/>
+          <p:nvPr/>
+        </p:nvSpPr>
+        <p:spPr>
+          <a:xfrm>
+            <a:off x="548640" y="2468880"/>
+            <a:ext cx="2103120" cy="429768"/>
+          </a:xfrm>
+          <a:prstGeom prst="rect">
+            <a:avLst/>
+          </a:prstGeom>
+          <a:noFill/>
+          <a:ln/>
+        </p:spPr>
+        <p:txBody>
+          <a:bodyPr wrap="square" lIns="0" tIns="0" rIns="0" bIns="0" rtlCol="0" anchor="ctr"/>
+          <a:lstStyle/>
+          <a:p>
+            <a:pPr indent="0" marL="0">
+              <a:buNone/>
+            </a:pPr>
+            <a:r>
+              <a:rPr lang="en-US" sz="900" b="1" dirty="0">
+                <a:solidFill>
+                  <a:srgbClr val="0D47A1"/>
+                </a:solidFill>
+                <a:latin typeface="Trebuchet MS" pitchFamily="34" charset="0"/>
+                <a:ea typeface="Trebuchet MS" pitchFamily="34" charset="-122"/>
+                <a:cs typeface="Trebuchet MS" pitchFamily="34" charset="-120"/>
+              </a:rPr>
+              <a:t>FK RESTRICT</a:t>
+            </a:r>
+            <a:endParaRPr lang="en-US" sz="900" dirty="0"/>
+          </a:p>
+        </p:txBody>
+      </p:sp>
+      <p:sp>
+        <p:nvSpPr>
+          <p:cNvPr id="21" name="Shape 19"/>
+          <p:cNvSpPr/>
+          <p:nvPr/>
+        </p:nvSpPr>
+        <p:spPr>
+          <a:xfrm>
+            <a:off x="2743200" y="2468880"/>
+            <a:ext cx="5943600" cy="429768"/>
+          </a:xfrm>
+          <a:prstGeom prst="rect">
+            <a:avLst/>
+          </a:prstGeom>
+          <a:solidFill>
+            <a:srgbClr val="E3F2FD"/>
+          </a:solidFill>
+          <a:ln/>
+        </p:spPr>
+      </p:sp>
+      <p:sp>
+        <p:nvSpPr>
+          <p:cNvPr id="22" name="Text 20"/>
+          <p:cNvSpPr/>
+          <p:nvPr/>
+        </p:nvSpPr>
+        <p:spPr>
+          <a:xfrm>
+            <a:off x="2834640" y="2468880"/>
+            <a:ext cx="5760720" cy="429768"/>
+          </a:xfrm>
+          <a:prstGeom prst="rect">
+            <a:avLst/>
+          </a:prstGeom>
+          <a:noFill/>
+          <a:ln/>
+        </p:spPr>
+        <p:txBody>
+          <a:bodyPr wrap="square" lIns="0" tIns="0" rIns="0" bIns="0" rtlCol="0" anchor="ctr"/>
+          <a:lstStyle/>
+          <a:p>
+            <a:pPr indent="0" marL="0">
+              <a:buNone/>
+            </a:pPr>
+            <a:r>
+              <a:rPr lang="en-US" sz="900" dirty="0">
+                <a:solidFill>
+                  <a:srgbClr val="333333"/>
+                </a:solidFill>
+                <a:latin typeface="Calibri" pitchFamily="34" charset="0"/>
+                <a:ea typeface="Calibri" pitchFamily="34" charset="-122"/>
+                <a:cs typeface="Calibri" pitchFamily="34" charset="-120"/>
+              </a:rPr>
+              <a:t>Bloque si enfants — erreur 1451</a:t>
+            </a:r>
+            <a:endParaRPr lang="en-US" sz="900" dirty="0"/>
+          </a:p>
+        </p:txBody>
+      </p:sp>
+      <p:sp>
+        <p:nvSpPr>
+          <p:cNvPr id="23" name="Shape 21"/>
+          <p:cNvSpPr/>
+          <p:nvPr/>
+        </p:nvSpPr>
+        <p:spPr>
+          <a:xfrm>
+            <a:off x="457200" y="2926080"/>
+            <a:ext cx="2286000" cy="429768"/>
+          </a:xfrm>
+          <a:prstGeom prst="rect">
+            <a:avLst/>
+          </a:prstGeom>
+          <a:solidFill>
+            <a:srgbClr val="F0F0F0"/>
+          </a:solidFill>
+          <a:ln/>
+        </p:spPr>
+      </p:sp>
+      <p:sp>
+        <p:nvSpPr>
+          <p:cNvPr id="24" name="Text 22"/>
+          <p:cNvSpPr/>
+          <p:nvPr/>
+        </p:nvSpPr>
+        <p:spPr>
+          <a:xfrm>
+            <a:off x="548640" y="2926080"/>
+            <a:ext cx="2103120" cy="429768"/>
+          </a:xfrm>
+          <a:prstGeom prst="rect">
+            <a:avLst/>
+          </a:prstGeom>
+          <a:noFill/>
+          <a:ln/>
+        </p:spPr>
+        <p:txBody>
+          <a:bodyPr wrap="square" lIns="0" tIns="0" rIns="0" bIns="0" rtlCol="0" anchor="ctr"/>
+          <a:lstStyle/>
+          <a:p>
+            <a:pPr indent="0" marL="0">
+              <a:buNone/>
+            </a:pPr>
+            <a:r>
+              <a:rPr lang="en-US" sz="900" b="1" dirty="0">
+                <a:solidFill>
+                  <a:srgbClr val="0D47A1"/>
+                </a:solidFill>
+                <a:latin typeface="Trebuchet MS" pitchFamily="34" charset="0"/>
+                <a:ea typeface="Trebuchet MS" pitchFamily="34" charset="-122"/>
+                <a:cs typeface="Trebuchet MS" pitchFamily="34" charset="-120"/>
+              </a:rPr>
+              <a:t>FK SET NULL</a:t>
+            </a:r>
+            <a:endParaRPr lang="en-US" sz="900" dirty="0"/>
+          </a:p>
+        </p:txBody>
+      </p:sp>
+      <p:sp>
+        <p:nvSpPr>
+          <p:cNvPr id="25" name="Shape 23"/>
+          <p:cNvSpPr/>
+          <p:nvPr/>
+        </p:nvSpPr>
+        <p:spPr>
+          <a:xfrm>
+            <a:off x="2743200" y="2926080"/>
+            <a:ext cx="5943600" cy="429768"/>
+          </a:xfrm>
+          <a:prstGeom prst="rect">
+            <a:avLst/>
+          </a:prstGeom>
+          <a:solidFill>
+            <a:srgbClr val="F0F0F0"/>
+          </a:solidFill>
+          <a:ln/>
+        </p:spPr>
+      </p:sp>
+      <p:sp>
+        <p:nvSpPr>
+          <p:cNvPr id="26" name="Text 24"/>
+          <p:cNvSpPr/>
+          <p:nvPr/>
+        </p:nvSpPr>
+        <p:spPr>
+          <a:xfrm>
+            <a:off x="2834640" y="2926080"/>
+            <a:ext cx="5760720" cy="429768"/>
+          </a:xfrm>
+          <a:prstGeom prst="rect">
+            <a:avLst/>
+          </a:prstGeom>
+          <a:noFill/>
+          <a:ln/>
+        </p:spPr>
+        <p:txBody>
+          <a:bodyPr wrap="square" lIns="0" tIns="0" rIns="0" bIns="0" rtlCol="0" anchor="ctr"/>
+          <a:lstStyle/>
+          <a:p>
+            <a:pPr indent="0" marL="0">
+              <a:buNone/>
+            </a:pPr>
+            <a:r>
+              <a:rPr lang="en-US" sz="900" dirty="0">
+                <a:solidFill>
+                  <a:srgbClr val="333333"/>
+                </a:solidFill>
+                <a:latin typeface="Calibri" pitchFamily="34" charset="0"/>
+                <a:ea typeface="Calibri" pitchFamily="34" charset="-122"/>
+                <a:cs typeface="Calibri" pitchFamily="34" charset="-120"/>
+              </a:rPr>
+              <a:t>FK → NULL si parent supprime</a:t>
+            </a:r>
+            <a:endParaRPr lang="en-US" sz="900" dirty="0"/>
+          </a:p>
+        </p:txBody>
+      </p:sp>
+      <p:sp>
+        <p:nvSpPr>
+          <p:cNvPr id="27" name="Shape 25"/>
+          <p:cNvSpPr/>
+          <p:nvPr/>
+        </p:nvSpPr>
+        <p:spPr>
+          <a:xfrm>
+            <a:off x="457200" y="3383280"/>
+            <a:ext cx="2286000" cy="429768"/>
+          </a:xfrm>
+          <a:prstGeom prst="rect">
+            <a:avLst/>
+          </a:prstGeom>
+          <a:solidFill>
+            <a:srgbClr val="E3F2FD"/>
+          </a:solidFill>
+          <a:ln/>
+        </p:spPr>
+      </p:sp>
+      <p:sp>
+        <p:nvSpPr>
+          <p:cNvPr id="28" name="Text 26"/>
+          <p:cNvSpPr/>
+          <p:nvPr/>
+        </p:nvSpPr>
+        <p:spPr>
+          <a:xfrm>
+            <a:off x="548640" y="3383280"/>
+            <a:ext cx="2103120" cy="429768"/>
+          </a:xfrm>
+          <a:prstGeom prst="rect">
+            <a:avLst/>
+          </a:prstGeom>
+          <a:noFill/>
+          <a:ln/>
+        </p:spPr>
+        <p:txBody>
+          <a:bodyPr wrap="square" lIns="0" tIns="0" rIns="0" bIns="0" rtlCol="0" anchor="ctr"/>
+          <a:lstStyle/>
+          <a:p>
+            <a:pPr indent="0" marL="0">
+              <a:buNone/>
+            </a:pPr>
+            <a:r>
+              <a:rPr lang="en-US" sz="900" b="1" dirty="0">
+                <a:solidFill>
+                  <a:srgbClr val="0D47A1"/>
+                </a:solidFill>
+                <a:latin typeface="Trebuchet MS" pitchFamily="34" charset="0"/>
+                <a:ea typeface="Trebuchet MS" pitchFamily="34" charset="-122"/>
+                <a:cs typeface="Trebuchet MS" pitchFamily="34" charset="-120"/>
+              </a:rPr>
+              <a:t>ALTER TABLE</a:t>
+            </a:r>
+            <a:endParaRPr lang="en-US" sz="900" dirty="0"/>
+          </a:p>
+        </p:txBody>
+      </p:sp>
+      <p:sp>
+        <p:nvSpPr>
+          <p:cNvPr id="29" name="Shape 27"/>
+          <p:cNvSpPr/>
+          <p:nvPr/>
+        </p:nvSpPr>
+        <p:spPr>
+          <a:xfrm>
+            <a:off x="2743200" y="3383280"/>
+            <a:ext cx="5943600" cy="429768"/>
+          </a:xfrm>
+          <a:prstGeom prst="rect">
+            <a:avLst/>
+          </a:prstGeom>
+          <a:solidFill>
+            <a:srgbClr val="E3F2FD"/>
+          </a:solidFill>
+          <a:ln/>
+        </p:spPr>
+      </p:sp>
+      <p:sp>
+        <p:nvSpPr>
+          <p:cNvPr id="30" name="Text 28"/>
+          <p:cNvSpPr/>
+          <p:nvPr/>
+        </p:nvSpPr>
+        <p:spPr>
+          <a:xfrm>
+            <a:off x="2834640" y="3383280"/>
+            <a:ext cx="5760720" cy="429768"/>
+          </a:xfrm>
+          <a:prstGeom prst="rect">
+            <a:avLst/>
+          </a:prstGeom>
+          <a:noFill/>
+          <a:ln/>
+        </p:spPr>
+        <p:txBody>
+          <a:bodyPr wrap="square" lIns="0" tIns="0" rIns="0" bIns="0" rtlCol="0" anchor="ctr"/>
+          <a:lstStyle/>
+          <a:p>
+            <a:pPr indent="0" marL="0">
+              <a:buNone/>
+            </a:pPr>
+            <a:r>
+              <a:rPr lang="en-US" sz="900" dirty="0">
+                <a:solidFill>
+                  <a:srgbClr val="333333"/>
+                </a:solidFill>
+                <a:latin typeface="Calibri" pitchFamily="34" charset="0"/>
+                <a:ea typeface="Calibri" pitchFamily="34" charset="-122"/>
+                <a:cs typeface="Calibri" pitchFamily="34" charset="-120"/>
+              </a:rPr>
+              <a:t>Modifier apres creation</a:t>
+            </a:r>
+            <a:endParaRPr lang="en-US" sz="900" dirty="0"/>
           </a:p>
         </p:txBody>
       </p:sp>
@@ -1759,7 +2834,7 @@
         <p:spPr>
           <a:xfrm>
             <a:off x="457200" y="182880"/>
-            <a:ext cx="8229600" cy="594360"/>
+            <a:ext cx="8229600" cy="548640"/>
           </a:xfrm>
           <a:prstGeom prst="rect">
             <a:avLst/>
@@ -1775,7 +2850,7 @@
               <a:buNone/>
             </a:pPr>
             <a:r>
-              <a:rPr lang="en-US" sz="2400" b="1" dirty="0">
+              <a:rPr lang="en-US" sz="2200" b="1" dirty="0">
                 <a:solidFill>
                   <a:srgbClr val="0D47A1"/>
                 </a:solidFill>
@@ -1783,9 +2858,9 @@
                 <a:ea typeface="Trebuchet MS" pitchFamily="34" charset="-122"/>
                 <a:cs typeface="Trebuchet MS" pitchFamily="34" charset="-120"/>
               </a:rPr>
-              <a:t>Les 6 contraintes MySQL</a:t>
-            </a:r>
-            <a:endParaRPr lang="en-US" sz="2400" dirty="0"/>
+              <a:t>Les 6 contraintes MySQL — recapitulatif</a:t>
+            </a:r>
+            <a:endParaRPr lang="en-US" sz="2200" dirty="0"/>
           </a:p>
         </p:txBody>
       </p:sp>
@@ -1797,8 +2872,8 @@
         </p:nvSpPr>
         <p:spPr>
           <a:xfrm>
-            <a:off x="457200" y="914400"/>
-            <a:ext cx="8229600" cy="521208"/>
+            <a:off x="457200" y="868680"/>
+            <a:ext cx="8229600" cy="475488"/>
           </a:xfrm>
           <a:prstGeom prst="rect">
             <a:avLst/>
@@ -1807,13 +2882,6 @@
             <a:srgbClr val="FFFFFF"/>
           </a:solidFill>
           <a:ln/>
-          <a:effectLst>
-            <a:outerShdw sx="100000" sy="100000" kx="0" ky="0" algn="bl" rotWithShape="0" blurRad="50800" dist="25400" dir="8100000">
-              <a:srgbClr val="000000">
-                <a:alpha val="12000"/>
-              </a:srgbClr>
-            </a:outerShdw>
-          </a:effectLst>
         </p:spPr>
       </p:sp>
       <p:sp>
@@ -1824,8 +2892,8 @@
         </p:nvSpPr>
         <p:spPr>
           <a:xfrm>
-            <a:off x="457200" y="914400"/>
-            <a:ext cx="45720" cy="521208"/>
+            <a:off x="457200" y="868680"/>
+            <a:ext cx="45720" cy="475488"/>
           </a:xfrm>
           <a:prstGeom prst="rect">
             <a:avLst/>
@@ -1844,8 +2912,8 @@
         </p:nvSpPr>
         <p:spPr>
           <a:xfrm>
-            <a:off x="685800" y="914400"/>
-            <a:ext cx="7818120" cy="521208"/>
+            <a:off x="640080" y="868680"/>
+            <a:ext cx="7863840" cy="475488"/>
           </a:xfrm>
           <a:prstGeom prst="rect">
             <a:avLst/>
@@ -1869,7 +2937,7 @@
                 <a:ea typeface="JetBrains Mono" pitchFamily="34" charset="-122"/>
                 <a:cs typeface="JetBrains Mono" pitchFamily="34" charset="-120"/>
               </a:rPr>
-              <a:t>NOT NULL : valeur obligatoire (rejet si vide)</a:t>
+              <a:t>NOT NULL : valeur obligatoire — erreur 1048 si NULL</a:t>
             </a:r>
             <a:endParaRPr lang="en-US" sz="1000" dirty="0"/>
           </a:p>
@@ -1883,8 +2951,8 @@
         </p:nvSpPr>
         <p:spPr>
           <a:xfrm>
-            <a:off x="457200" y="1463040"/>
-            <a:ext cx="8229600" cy="521208"/>
+            <a:off x="457200" y="1371600"/>
+            <a:ext cx="8229600" cy="475488"/>
           </a:xfrm>
           <a:prstGeom prst="rect">
             <a:avLst/>
@@ -1893,13 +2961,6 @@
             <a:srgbClr val="E3F2FD"/>
           </a:solidFill>
           <a:ln/>
-          <a:effectLst>
-            <a:outerShdw sx="100000" sy="100000" kx="0" ky="0" algn="bl" rotWithShape="0" blurRad="50800" dist="25400" dir="8100000">
-              <a:srgbClr val="000000">
-                <a:alpha val="12000"/>
-              </a:srgbClr>
-            </a:outerShdw>
-          </a:effectLst>
         </p:spPr>
       </p:sp>
       <p:sp>
@@ -1910,8 +2971,8 @@
         </p:nvSpPr>
         <p:spPr>
           <a:xfrm>
-            <a:off x="457200" y="1463040"/>
-            <a:ext cx="45720" cy="521208"/>
+            <a:off x="457200" y="1371600"/>
+            <a:ext cx="45720" cy="475488"/>
           </a:xfrm>
           <a:prstGeom prst="rect">
             <a:avLst/>
@@ -1930,8 +2991,8 @@
         </p:nvSpPr>
         <p:spPr>
           <a:xfrm>
-            <a:off x="685800" y="1463040"/>
-            <a:ext cx="7818120" cy="521208"/>
+            <a:off x="640080" y="1371600"/>
+            <a:ext cx="7863840" cy="475488"/>
           </a:xfrm>
           <a:prstGeom prst="rect">
             <a:avLst/>
@@ -1955,7 +3016,7 @@
                 <a:ea typeface="JetBrains Mono" pitchFamily="34" charset="-122"/>
                 <a:cs typeface="JetBrains Mono" pitchFamily="34" charset="-120"/>
               </a:rPr>
-              <a:t>UNIQUE : pas de doublon dans la colonne</a:t>
+              <a:t>UNIQUE : pas de doublon — erreur 1062</a:t>
             </a:r>
             <a:endParaRPr lang="en-US" sz="1000" dirty="0"/>
           </a:p>
@@ -1969,8 +3030,8 @@
         </p:nvSpPr>
         <p:spPr>
           <a:xfrm>
-            <a:off x="457200" y="2011680"/>
-            <a:ext cx="8229600" cy="521208"/>
+            <a:off x="457200" y="1874520"/>
+            <a:ext cx="8229600" cy="475488"/>
           </a:xfrm>
           <a:prstGeom prst="rect">
             <a:avLst/>
@@ -1979,13 +3040,6 @@
             <a:srgbClr val="FFFFFF"/>
           </a:solidFill>
           <a:ln/>
-          <a:effectLst>
-            <a:outerShdw sx="100000" sy="100000" kx="0" ky="0" algn="bl" rotWithShape="0" blurRad="50800" dist="25400" dir="8100000">
-              <a:srgbClr val="000000">
-                <a:alpha val="12000"/>
-              </a:srgbClr>
-            </a:outerShdw>
-          </a:effectLst>
         </p:spPr>
       </p:sp>
       <p:sp>
@@ -1996,8 +3050,8 @@
         </p:nvSpPr>
         <p:spPr>
           <a:xfrm>
-            <a:off x="457200" y="2011680"/>
-            <a:ext cx="45720" cy="521208"/>
+            <a:off x="457200" y="1874520"/>
+            <a:ext cx="45720" cy="475488"/>
           </a:xfrm>
           <a:prstGeom prst="rect">
             <a:avLst/>
@@ -2016,8 +3070,8 @@
         </p:nvSpPr>
         <p:spPr>
           <a:xfrm>
-            <a:off x="685800" y="2011680"/>
-            <a:ext cx="7818120" cy="521208"/>
+            <a:off x="640080" y="1874520"/>
+            <a:ext cx="7863840" cy="475488"/>
           </a:xfrm>
           <a:prstGeom prst="rect">
             <a:avLst/>
@@ -2055,8 +3109,8 @@
         </p:nvSpPr>
         <p:spPr>
           <a:xfrm>
-            <a:off x="457200" y="2560320"/>
-            <a:ext cx="8229600" cy="521208"/>
+            <a:off x="457200" y="2377440"/>
+            <a:ext cx="8229600" cy="475488"/>
           </a:xfrm>
           <a:prstGeom prst="rect">
             <a:avLst/>
@@ -2065,13 +3119,6 @@
             <a:srgbClr val="E3F2FD"/>
           </a:solidFill>
           <a:ln/>
-          <a:effectLst>
-            <a:outerShdw sx="100000" sy="100000" kx="0" ky="0" algn="bl" rotWithShape="0" blurRad="50800" dist="25400" dir="8100000">
-              <a:srgbClr val="000000">
-                <a:alpha val="12000"/>
-              </a:srgbClr>
-            </a:outerShdw>
-          </a:effectLst>
         </p:spPr>
       </p:sp>
       <p:sp>
@@ -2082,8 +3129,8 @@
         </p:nvSpPr>
         <p:spPr>
           <a:xfrm>
-            <a:off x="457200" y="2560320"/>
-            <a:ext cx="45720" cy="521208"/>
+            <a:off x="457200" y="2377440"/>
+            <a:ext cx="45720" cy="475488"/>
           </a:xfrm>
           <a:prstGeom prst="rect">
             <a:avLst/>
@@ -2102,8 +3149,8 @@
         </p:nvSpPr>
         <p:spPr>
           <a:xfrm>
-            <a:off x="685800" y="2560320"/>
-            <a:ext cx="7818120" cy="521208"/>
+            <a:off x="640080" y="2377440"/>
+            <a:ext cx="7863840" cy="475488"/>
           </a:xfrm>
           <a:prstGeom prst="rect">
             <a:avLst/>
@@ -2127,7 +3174,7 @@
                 <a:ea typeface="JetBrains Mono" pitchFamily="34" charset="-122"/>
                 <a:cs typeface="JetBrains Mono" pitchFamily="34" charset="-120"/>
               </a:rPr>
-              <a:t>CHECK : condition booléenne (prix &gt;= 0, heure_fin &gt; heure_debut)</a:t>
+              <a:t>CHECK : condition booleenne (prix &gt;= 0) — erreur 3819 (MySQL 8.0.16+)</a:t>
             </a:r>
             <a:endParaRPr lang="en-US" sz="1000" dirty="0"/>
           </a:p>
@@ -2141,8 +3188,8 @@
         </p:nvSpPr>
         <p:spPr>
           <a:xfrm>
-            <a:off x="457200" y="3108960"/>
-            <a:ext cx="8229600" cy="521208"/>
+            <a:off x="457200" y="2880360"/>
+            <a:ext cx="8229600" cy="475488"/>
           </a:xfrm>
           <a:prstGeom prst="rect">
             <a:avLst/>
@@ -2151,13 +3198,6 @@
             <a:srgbClr val="FFFFFF"/>
           </a:solidFill>
           <a:ln/>
-          <a:effectLst>
-            <a:outerShdw sx="100000" sy="100000" kx="0" ky="0" algn="bl" rotWithShape="0" blurRad="50800" dist="25400" dir="8100000">
-              <a:srgbClr val="000000">
-                <a:alpha val="12000"/>
-              </a:srgbClr>
-            </a:outerShdw>
-          </a:effectLst>
         </p:spPr>
       </p:sp>
       <p:sp>
@@ -2168,8 +3208,8 @@
         </p:nvSpPr>
         <p:spPr>
           <a:xfrm>
-            <a:off x="457200" y="3108960"/>
-            <a:ext cx="45720" cy="521208"/>
+            <a:off x="457200" y="2880360"/>
+            <a:ext cx="45720" cy="475488"/>
           </a:xfrm>
           <a:prstGeom prst="rect">
             <a:avLst/>
@@ -2188,8 +3228,8 @@
         </p:nvSpPr>
         <p:spPr>
           <a:xfrm>
-            <a:off x="685800" y="3108960"/>
-            <a:ext cx="7818120" cy="521208"/>
+            <a:off x="640080" y="2880360"/>
+            <a:ext cx="7863840" cy="475488"/>
           </a:xfrm>
           <a:prstGeom prst="rect">
             <a:avLst/>
@@ -2213,7 +3253,7 @@
                 <a:ea typeface="JetBrains Mono" pitchFamily="34" charset="-122"/>
                 <a:cs typeface="JetBrains Mono" pitchFamily="34" charset="-120"/>
               </a:rPr>
-              <a:t>DEFAULT : valeur par défaut si non spécifié (actif = TRUE)</a:t>
+              <a:t>DEFAULT : valeur par defaut (actif = TRUE, date = CURDATE())</a:t>
             </a:r>
             <a:endParaRPr lang="en-US" sz="1000" dirty="0"/>
           </a:p>
@@ -2227,8 +3267,8 @@
         </p:nvSpPr>
         <p:spPr>
           <a:xfrm>
-            <a:off x="457200" y="3657600"/>
-            <a:ext cx="8229600" cy="521208"/>
+            <a:off x="457200" y="3383280"/>
+            <a:ext cx="8229600" cy="475488"/>
           </a:xfrm>
           <a:prstGeom prst="rect">
             <a:avLst/>
@@ -2237,13 +3277,6 @@
             <a:srgbClr val="E3F2FD"/>
           </a:solidFill>
           <a:ln/>
-          <a:effectLst>
-            <a:outerShdw sx="100000" sy="100000" kx="0" ky="0" algn="bl" rotWithShape="0" blurRad="50800" dist="25400" dir="8100000">
-              <a:srgbClr val="000000">
-                <a:alpha val="12000"/>
-              </a:srgbClr>
-            </a:outerShdw>
-          </a:effectLst>
         </p:spPr>
       </p:sp>
       <p:sp>
@@ -2254,8 +3287,8 @@
         </p:nvSpPr>
         <p:spPr>
           <a:xfrm>
-            <a:off x="457200" y="3657600"/>
-            <a:ext cx="45720" cy="521208"/>
+            <a:off x="457200" y="3383280"/>
+            <a:ext cx="45720" cy="475488"/>
           </a:xfrm>
           <a:prstGeom prst="rect">
             <a:avLst/>
@@ -2274,8 +3307,8 @@
         </p:nvSpPr>
         <p:spPr>
           <a:xfrm>
-            <a:off x="685800" y="3657600"/>
-            <a:ext cx="7818120" cy="521208"/>
+            <a:off x="640080" y="3383280"/>
+            <a:ext cx="7863840" cy="475488"/>
           </a:xfrm>
           <a:prstGeom prst="rect">
             <a:avLst/>
@@ -2299,95 +3332,9 @@
                 <a:ea typeface="JetBrains Mono" pitchFamily="34" charset="-122"/>
                 <a:cs typeface="JetBrains Mono" pitchFamily="34" charset="-120"/>
               </a:rPr>
-              <a:t>AUTO_INCREMENT : numérotation automatique (1, 2, 3...)</a:t>
+              <a:t>AUTO_INCREMENT : numerotation automatique (1, 2, 3...)</a:t>
             </a:r>
             <a:endParaRPr lang="en-US" sz="1000" dirty="0"/>
-          </a:p>
-        </p:txBody>
-      </p:sp>
-      <p:sp>
-        <p:nvSpPr>
-          <p:cNvPr id="22" name="Shape 20"/>
-          <p:cNvSpPr/>
-          <p:nvPr/>
-        </p:nvSpPr>
-        <p:spPr>
-          <a:xfrm>
-            <a:off x="457200" y="4206240"/>
-            <a:ext cx="8229600" cy="521208"/>
-          </a:xfrm>
-          <a:prstGeom prst="rect">
-            <a:avLst/>
-          </a:prstGeom>
-          <a:solidFill>
-            <a:srgbClr val="FFFFFF"/>
-          </a:solidFill>
-          <a:ln/>
-          <a:effectLst>
-            <a:outerShdw sx="100000" sy="100000" kx="0" ky="0" algn="bl" rotWithShape="0" blurRad="50800" dist="25400" dir="8100000">
-              <a:srgbClr val="000000">
-                <a:alpha val="12000"/>
-              </a:srgbClr>
-            </a:outerShdw>
-          </a:effectLst>
-        </p:spPr>
-      </p:sp>
-      <p:sp>
-        <p:nvSpPr>
-          <p:cNvPr id="23" name="Shape 21"/>
-          <p:cNvSpPr/>
-          <p:nvPr/>
-        </p:nvSpPr>
-        <p:spPr>
-          <a:xfrm>
-            <a:off x="457200" y="4206240"/>
-            <a:ext cx="45720" cy="521208"/>
-          </a:xfrm>
-          <a:prstGeom prst="rect">
-            <a:avLst/>
-          </a:prstGeom>
-          <a:solidFill>
-            <a:srgbClr val="1565C0"/>
-          </a:solidFill>
-          <a:ln/>
-        </p:spPr>
-      </p:sp>
-      <p:sp>
-        <p:nvSpPr>
-          <p:cNvPr id="24" name="Text 22"/>
-          <p:cNvSpPr/>
-          <p:nvPr/>
-        </p:nvSpPr>
-        <p:spPr>
-          <a:xfrm>
-            <a:off x="685800" y="4206240"/>
-            <a:ext cx="7818120" cy="521208"/>
-          </a:xfrm>
-          <a:prstGeom prst="rect">
-            <a:avLst/>
-          </a:prstGeom>
-          <a:noFill/>
-          <a:ln/>
-        </p:spPr>
-        <p:txBody>
-          <a:bodyPr wrap="square" lIns="0" tIns="0" rIns="0" bIns="0" rtlCol="0" anchor="ctr"/>
-          <a:lstStyle/>
-          <a:p>
-            <a:pPr indent="0" marL="0">
-              <a:buNone/>
-            </a:pPr>
-            <a:r>
-              <a:rPr lang="en-US" sz="1200" dirty="0">
-                <a:solidFill>
-                  <a:srgbClr val="1A1A2E"/>
-                </a:solidFill>
-                <a:latin typeface="Calibri" pitchFamily="34" charset="0"/>
-                <a:ea typeface="Calibri" pitchFamily="34" charset="-122"/>
-                <a:cs typeface="Calibri" pitchFamily="34" charset="-120"/>
-              </a:rPr>
-              <a:t>⚠️ CHECK est réellement appliqué depuis MySQL 8.0.16</a:t>
-            </a:r>
-            <a:endParaRPr lang="en-US" sz="1200" dirty="0"/>
           </a:p>
         </p:txBody>
       </p:sp>
@@ -2452,7 +3399,7 @@
         <p:spPr>
           <a:xfrm>
             <a:off x="457200" y="182880"/>
-            <a:ext cx="8229600" cy="594360"/>
+            <a:ext cx="8229600" cy="548640"/>
           </a:xfrm>
           <a:prstGeom prst="rect">
             <a:avLst/>
@@ -2468,7 +3415,7 @@
               <a:buNone/>
             </a:pPr>
             <a:r>
-              <a:rPr lang="en-US" sz="2400" b="1" dirty="0">
+              <a:rPr lang="en-US" sz="2200" b="1" dirty="0">
                 <a:solidFill>
                   <a:srgbClr val="0D47A1"/>
                 </a:solidFill>
@@ -2478,7 +3425,7 @@
               </a:rPr>
               <a:t>FOREIGN KEY : les 4 comportements ON DELETE</a:t>
             </a:r>
-            <a:endParaRPr lang="en-US" sz="2400" dirty="0"/>
+            <a:endParaRPr lang="en-US" sz="2200" dirty="0"/>
           </a:p>
         </p:txBody>
       </p:sp>
@@ -2490,8 +3437,8 @@
         </p:nvSpPr>
         <p:spPr>
           <a:xfrm>
-            <a:off x="457200" y="914400"/>
-            <a:ext cx="8229600" cy="464058"/>
+            <a:off x="457200" y="868680"/>
+            <a:ext cx="8229600" cy="475488"/>
           </a:xfrm>
           <a:prstGeom prst="rect">
             <a:avLst/>
@@ -2500,13 +3447,6 @@
             <a:srgbClr val="FFFFFF"/>
           </a:solidFill>
           <a:ln/>
-          <a:effectLst>
-            <a:outerShdw sx="100000" sy="100000" kx="0" ky="0" algn="bl" rotWithShape="0" blurRad="50800" dist="25400" dir="8100000">
-              <a:srgbClr val="000000">
-                <a:alpha val="12000"/>
-              </a:srgbClr>
-            </a:outerShdw>
-          </a:effectLst>
         </p:spPr>
       </p:sp>
       <p:sp>
@@ -2517,8 +3457,8 @@
         </p:nvSpPr>
         <p:spPr>
           <a:xfrm>
-            <a:off x="457200" y="914400"/>
-            <a:ext cx="45720" cy="464058"/>
+            <a:off x="457200" y="868680"/>
+            <a:ext cx="45720" cy="475488"/>
           </a:xfrm>
           <a:prstGeom prst="rect">
             <a:avLst/>
@@ -2537,8 +3477,8 @@
         </p:nvSpPr>
         <p:spPr>
           <a:xfrm>
-            <a:off x="685800" y="914400"/>
-            <a:ext cx="7818120" cy="464058"/>
+            <a:off x="640080" y="868680"/>
+            <a:ext cx="7863840" cy="475488"/>
           </a:xfrm>
           <a:prstGeom prst="rect">
             <a:avLst/>
@@ -2554,7 +3494,7 @@
               <a:buNone/>
             </a:pPr>
             <a:r>
-              <a:rPr lang="en-US" sz="1200" dirty="0">
+              <a:rPr lang="en-US" sz="1100" dirty="0">
                 <a:solidFill>
                   <a:srgbClr val="1A1A2E"/>
                 </a:solidFill>
@@ -2562,9 +3502,9 @@
                 <a:ea typeface="Calibri" pitchFamily="34" charset="-122"/>
                 <a:cs typeface="Calibri" pitchFamily="34" charset="-120"/>
               </a:rPr>
-              <a:t>CASCADE : supprimer le parent → supprime les enfants</a:t>
-            </a:r>
-            <a:endParaRPr lang="en-US" sz="1200" dirty="0"/>
+              <a:t>CASCADE : supprimer parent → supprime les enfants automatiquement</a:t>
+            </a:r>
+            <a:endParaRPr lang="en-US" sz="1100" dirty="0"/>
           </a:p>
         </p:txBody>
       </p:sp>
@@ -2576,8 +3516,8 @@
         </p:nvSpPr>
         <p:spPr>
           <a:xfrm>
-            <a:off x="457200" y="1405890"/>
-            <a:ext cx="8229600" cy="464058"/>
+            <a:off x="457200" y="1371600"/>
+            <a:ext cx="8229600" cy="475488"/>
           </a:xfrm>
           <a:prstGeom prst="rect">
             <a:avLst/>
@@ -2586,13 +3526,6 @@
             <a:srgbClr val="E3F2FD"/>
           </a:solidFill>
           <a:ln/>
-          <a:effectLst>
-            <a:outerShdw sx="100000" sy="100000" kx="0" ky="0" algn="bl" rotWithShape="0" blurRad="50800" dist="25400" dir="8100000">
-              <a:srgbClr val="000000">
-                <a:alpha val="12000"/>
-              </a:srgbClr>
-            </a:outerShdw>
-          </a:effectLst>
         </p:spPr>
       </p:sp>
       <p:sp>
@@ -2603,8 +3536,8 @@
         </p:nvSpPr>
         <p:spPr>
           <a:xfrm>
-            <a:off x="457200" y="1405890"/>
-            <a:ext cx="45720" cy="464058"/>
+            <a:off x="457200" y="1371600"/>
+            <a:ext cx="45720" cy="475488"/>
           </a:xfrm>
           <a:prstGeom prst="rect">
             <a:avLst/>
@@ -2623,8 +3556,8 @@
         </p:nvSpPr>
         <p:spPr>
           <a:xfrm>
-            <a:off x="685800" y="1405890"/>
-            <a:ext cx="7818120" cy="464058"/>
+            <a:off x="640080" y="1371600"/>
+            <a:ext cx="7863840" cy="475488"/>
           </a:xfrm>
           <a:prstGeom prst="rect">
             <a:avLst/>
@@ -2648,7 +3581,7 @@
                 <a:ea typeface="JetBrains Mono" pitchFamily="34" charset="-122"/>
                 <a:cs typeface="JetBrains Mono" pitchFamily="34" charset="-120"/>
               </a:rPr>
-              <a:t>SET NULL : supprimer le parent → FK des enfants = NULL</a:t>
+              <a:t>SET NULL : supprimer parent → FK des enfants = NULL</a:t>
             </a:r>
             <a:endParaRPr lang="en-US" sz="1000" dirty="0"/>
           </a:p>
@@ -2662,8 +3595,8 @@
         </p:nvSpPr>
         <p:spPr>
           <a:xfrm>
-            <a:off x="457200" y="1897380"/>
-            <a:ext cx="8229600" cy="464058"/>
+            <a:off x="457200" y="1874520"/>
+            <a:ext cx="8229600" cy="475488"/>
           </a:xfrm>
           <a:prstGeom prst="rect">
             <a:avLst/>
@@ -2672,13 +3605,6 @@
             <a:srgbClr val="FFFFFF"/>
           </a:solidFill>
           <a:ln/>
-          <a:effectLst>
-            <a:outerShdw sx="100000" sy="100000" kx="0" ky="0" algn="bl" rotWithShape="0" blurRad="50800" dist="25400" dir="8100000">
-              <a:srgbClr val="000000">
-                <a:alpha val="12000"/>
-              </a:srgbClr>
-            </a:outerShdw>
-          </a:effectLst>
         </p:spPr>
       </p:sp>
       <p:sp>
@@ -2689,8 +3615,8 @@
         </p:nvSpPr>
         <p:spPr>
           <a:xfrm>
-            <a:off x="457200" y="1897380"/>
-            <a:ext cx="45720" cy="464058"/>
+            <a:off x="457200" y="1874520"/>
+            <a:ext cx="45720" cy="475488"/>
           </a:xfrm>
           <a:prstGeom prst="rect">
             <a:avLst/>
@@ -2709,8 +3635,8 @@
         </p:nvSpPr>
         <p:spPr>
           <a:xfrm>
-            <a:off x="685800" y="1897380"/>
-            <a:ext cx="7818120" cy="464058"/>
+            <a:off x="640080" y="1874520"/>
+            <a:ext cx="7863840" cy="475488"/>
           </a:xfrm>
           <a:prstGeom prst="rect">
             <a:avLst/>
@@ -2726,7 +3652,7 @@
               <a:buNone/>
             </a:pPr>
             <a:r>
-              <a:rPr lang="en-US" sz="1200" dirty="0">
+              <a:rPr lang="en-US" sz="1100" dirty="0">
                 <a:solidFill>
                   <a:srgbClr val="1A1A2E"/>
                 </a:solidFill>
@@ -2734,9 +3660,9 @@
                 <a:ea typeface="Calibri" pitchFamily="34" charset="-122"/>
                 <a:cs typeface="Calibri" pitchFamily="34" charset="-120"/>
               </a:rPr>
-              <a:t>RESTRICT : bloquer la suppression si enfants existent</a:t>
-            </a:r>
-            <a:endParaRPr lang="en-US" sz="1200" dirty="0"/>
+              <a:t>RESTRICT : BLOQUE la suppression si enfants existent (par defaut)</a:t>
+            </a:r>
+            <a:endParaRPr lang="en-US" sz="1100" dirty="0"/>
           </a:p>
         </p:txBody>
       </p:sp>
@@ -2748,8 +3674,8 @@
         </p:nvSpPr>
         <p:spPr>
           <a:xfrm>
-            <a:off x="457200" y="2388870"/>
-            <a:ext cx="8229600" cy="464058"/>
+            <a:off x="457200" y="2377440"/>
+            <a:ext cx="8229600" cy="475488"/>
           </a:xfrm>
           <a:prstGeom prst="rect">
             <a:avLst/>
@@ -2758,13 +3684,6 @@
             <a:srgbClr val="E3F2FD"/>
           </a:solidFill>
           <a:ln/>
-          <a:effectLst>
-            <a:outerShdw sx="100000" sy="100000" kx="0" ky="0" algn="bl" rotWithShape="0" blurRad="50800" dist="25400" dir="8100000">
-              <a:srgbClr val="000000">
-                <a:alpha val="12000"/>
-              </a:srgbClr>
-            </a:outerShdw>
-          </a:effectLst>
         </p:spPr>
       </p:sp>
       <p:sp>
@@ -2775,8 +3694,8 @@
         </p:nvSpPr>
         <p:spPr>
           <a:xfrm>
-            <a:off x="457200" y="2388870"/>
-            <a:ext cx="45720" cy="464058"/>
+            <a:off x="457200" y="2377440"/>
+            <a:ext cx="45720" cy="475488"/>
           </a:xfrm>
           <a:prstGeom prst="rect">
             <a:avLst/>
@@ -2795,8 +3714,8 @@
         </p:nvSpPr>
         <p:spPr>
           <a:xfrm>
-            <a:off x="685800" y="2388870"/>
-            <a:ext cx="7818120" cy="464058"/>
+            <a:off x="640080" y="2377440"/>
+            <a:ext cx="7863840" cy="475488"/>
           </a:xfrm>
           <a:prstGeom prst="rect">
             <a:avLst/>
@@ -2812,7 +3731,7 @@
               <a:buNone/>
             </a:pPr>
             <a:r>
-              <a:rPr lang="en-US" sz="1200" dirty="0">
+              <a:rPr lang="en-US" sz="1100" dirty="0">
                 <a:solidFill>
                   <a:srgbClr val="1A1A2E"/>
                 </a:solidFill>
@@ -2820,9 +3739,9 @@
                 <a:ea typeface="Calibri" pitchFamily="34" charset="-122"/>
                 <a:cs typeface="Calibri" pitchFamily="34" charset="-120"/>
               </a:rPr>
-              <a:t>NO ACTION : identique à RESTRICT en MySQL</a:t>
-            </a:r>
-            <a:endParaRPr lang="en-US" sz="1200" dirty="0"/>
+              <a:t>NO ACTION : identique a RESTRICT en MySQL</a:t>
+            </a:r>
+            <a:endParaRPr lang="en-US" sz="1100" dirty="0"/>
           </a:p>
         </p:txBody>
       </p:sp>
@@ -2835,7 +3754,7 @@
         <p:spPr>
           <a:xfrm>
             <a:off x="457200" y="2880360"/>
-            <a:ext cx="8229600" cy="464058"/>
+            <a:ext cx="8229600" cy="475488"/>
           </a:xfrm>
           <a:prstGeom prst="rect">
             <a:avLst/>
@@ -2844,13 +3763,6 @@
             <a:srgbClr val="FFFFFF"/>
           </a:solidFill>
           <a:ln/>
-          <a:effectLst>
-            <a:outerShdw sx="100000" sy="100000" kx="0" ky="0" algn="bl" rotWithShape="0" blurRad="50800" dist="25400" dir="8100000">
-              <a:srgbClr val="000000">
-                <a:alpha val="12000"/>
-              </a:srgbClr>
-            </a:outerShdw>
-          </a:effectLst>
         </p:spPr>
       </p:sp>
       <p:sp>
@@ -2862,7 +3774,7 @@
         <p:spPr>
           <a:xfrm>
             <a:off x="457200" y="2880360"/>
-            <a:ext cx="45720" cy="464058"/>
+            <a:ext cx="45720" cy="475488"/>
           </a:xfrm>
           <a:prstGeom prst="rect">
             <a:avLst/>
@@ -2881,8 +3793,8 @@
         </p:nvSpPr>
         <p:spPr>
           <a:xfrm>
-            <a:off x="685800" y="2880360"/>
-            <a:ext cx="7818120" cy="464058"/>
+            <a:off x="640080" y="2880360"/>
+            <a:ext cx="7863840" cy="475488"/>
           </a:xfrm>
           <a:prstGeom prst="rect">
             <a:avLst/>
@@ -2898,7 +3810,7 @@
               <a:buNone/>
             </a:pPr>
             <a:r>
-              <a:rPr lang="en-US" sz="1200" dirty="0">
+              <a:rPr lang="en-US" sz="1100" dirty="0">
                 <a:solidFill>
                   <a:srgbClr val="1A1A2E"/>
                 </a:solidFill>
@@ -2906,9 +3818,9 @@
                 <a:ea typeface="Calibri" pitchFamily="34" charset="-122"/>
                 <a:cs typeface="Calibri" pitchFamily="34" charset="-120"/>
               </a:rPr>
-              <a:t>SwissSound :</a:t>
-            </a:r>
-            <a:endParaRPr lang="en-US" sz="1200" dirty="0"/>
+              <a:t>SwissSound : album→artiste RESTRICT | genre_artiste→genre CASCADE</a:t>
+            </a:r>
+            <a:endParaRPr lang="en-US" sz="1100" dirty="0"/>
           </a:p>
         </p:txBody>
       </p:sp>
@@ -2920,8 +3832,8 @@
         </p:nvSpPr>
         <p:spPr>
           <a:xfrm>
-            <a:off x="457200" y="3371850"/>
-            <a:ext cx="8229600" cy="464058"/>
+            <a:off x="457200" y="3383280"/>
+            <a:ext cx="8229600" cy="475488"/>
           </a:xfrm>
           <a:prstGeom prst="rect">
             <a:avLst/>
@@ -2930,13 +3842,6 @@
             <a:srgbClr val="E3F2FD"/>
           </a:solidFill>
           <a:ln/>
-          <a:effectLst>
-            <a:outerShdw sx="100000" sy="100000" kx="0" ky="0" algn="bl" rotWithShape="0" blurRad="50800" dist="25400" dir="8100000">
-              <a:srgbClr val="000000">
-                <a:alpha val="12000"/>
-              </a:srgbClr>
-            </a:outerShdw>
-          </a:effectLst>
         </p:spPr>
       </p:sp>
       <p:sp>
@@ -2947,8 +3852,8 @@
         </p:nvSpPr>
         <p:spPr>
           <a:xfrm>
-            <a:off x="457200" y="3371850"/>
-            <a:ext cx="45720" cy="464058"/>
+            <a:off x="457200" y="3383280"/>
+            <a:ext cx="45720" cy="475488"/>
           </a:xfrm>
           <a:prstGeom prst="rect">
             <a:avLst/>
@@ -2967,8 +3872,8 @@
         </p:nvSpPr>
         <p:spPr>
           <a:xfrm>
-            <a:off x="685800" y="3371850"/>
-            <a:ext cx="7818120" cy="464058"/>
+            <a:off x="640080" y="3383280"/>
+            <a:ext cx="7863840" cy="475488"/>
           </a:xfrm>
           <a:prstGeom prst="rect">
             <a:avLst/>
@@ -2984,7 +3889,7 @@
               <a:buNone/>
             </a:pPr>
             <a:r>
-              <a:rPr lang="en-US" sz="1200" dirty="0">
+              <a:rPr lang="en-US" sz="1100" dirty="0">
                 <a:solidFill>
                   <a:srgbClr val="1A1A2E"/>
                 </a:solidFill>
@@ -2992,9 +3897,9 @@
                 <a:ea typeface="Calibri" pitchFamily="34" charset="-122"/>
                 <a:cs typeface="Calibri" pitchFamily="34" charset="-120"/>
               </a:rPr>
-              <a:t>album→artiste : RESTRICT (garder l'historique)</a:t>
-            </a:r>
-            <a:endParaRPr lang="en-US" sz="1200" dirty="0"/>
+              <a:t>equipement→salle SET NULL | session→artiste RESTRICT</a:t>
+            </a:r>
+            <a:endParaRPr lang="en-US" sz="1100" dirty="0"/>
           </a:p>
         </p:txBody>
       </p:sp>
@@ -3006,8 +3911,8 @@
         </p:nvSpPr>
         <p:spPr>
           <a:xfrm>
-            <a:off x="457200" y="3863340"/>
-            <a:ext cx="8229600" cy="464058"/>
+            <a:off x="457200" y="3886200"/>
+            <a:ext cx="8229600" cy="475488"/>
           </a:xfrm>
           <a:prstGeom prst="rect">
             <a:avLst/>
@@ -3016,13 +3921,6 @@
             <a:srgbClr val="FFFFFF"/>
           </a:solidFill>
           <a:ln/>
-          <a:effectLst>
-            <a:outerShdw sx="100000" sy="100000" kx="0" ky="0" algn="bl" rotWithShape="0" blurRad="50800" dist="25400" dir="8100000">
-              <a:srgbClr val="000000">
-                <a:alpha val="12000"/>
-              </a:srgbClr>
-            </a:outerShdw>
-          </a:effectLst>
         </p:spPr>
       </p:sp>
       <p:sp>
@@ -3033,8 +3931,8 @@
         </p:nvSpPr>
         <p:spPr>
           <a:xfrm>
-            <a:off x="457200" y="3863340"/>
-            <a:ext cx="45720" cy="464058"/>
+            <a:off x="457200" y="3886200"/>
+            <a:ext cx="45720" cy="475488"/>
           </a:xfrm>
           <a:prstGeom prst="rect">
             <a:avLst/>
@@ -3053,8 +3951,8 @@
         </p:nvSpPr>
         <p:spPr>
           <a:xfrm>
-            <a:off x="685800" y="3863340"/>
-            <a:ext cx="7818120" cy="464058"/>
+            <a:off x="640080" y="3886200"/>
+            <a:ext cx="7863840" cy="475488"/>
           </a:xfrm>
           <a:prstGeom prst="rect">
             <a:avLst/>
@@ -3070,7 +3968,7 @@
               <a:buNone/>
             </a:pPr>
             <a:r>
-              <a:rPr lang="en-US" sz="1200" dirty="0">
+              <a:rPr lang="en-US" sz="1100" dirty="0">
                 <a:solidFill>
                   <a:srgbClr val="1A1A2E"/>
                 </a:solidFill>
@@ -3078,95 +3976,9 @@
                 <a:ea typeface="Calibri" pitchFamily="34" charset="-122"/>
                 <a:cs typeface="Calibri" pitchFamily="34" charset="-120"/>
               </a:rPr>
-              <a:t>equipement→salle : SET NULL (équipement reste mais sans salle)</a:t>
-            </a:r>
-            <a:endParaRPr lang="en-US" sz="1200" dirty="0"/>
-          </a:p>
-        </p:txBody>
-      </p:sp>
-      <p:sp>
-        <p:nvSpPr>
-          <p:cNvPr id="25" name="Shape 23"/>
-          <p:cNvSpPr/>
-          <p:nvPr/>
-        </p:nvSpPr>
-        <p:spPr>
-          <a:xfrm>
-            <a:off x="457200" y="4354830"/>
-            <a:ext cx="8229600" cy="464058"/>
-          </a:xfrm>
-          <a:prstGeom prst="rect">
-            <a:avLst/>
-          </a:prstGeom>
-          <a:solidFill>
-            <a:srgbClr val="E3F2FD"/>
-          </a:solidFill>
-          <a:ln/>
-          <a:effectLst>
-            <a:outerShdw sx="100000" sy="100000" kx="0" ky="0" algn="bl" rotWithShape="0" blurRad="50800" dist="25400" dir="8100000">
-              <a:srgbClr val="000000">
-                <a:alpha val="12000"/>
-              </a:srgbClr>
-            </a:outerShdw>
-          </a:effectLst>
-        </p:spPr>
-      </p:sp>
-      <p:sp>
-        <p:nvSpPr>
-          <p:cNvPr id="26" name="Shape 24"/>
-          <p:cNvSpPr/>
-          <p:nvPr/>
-        </p:nvSpPr>
-        <p:spPr>
-          <a:xfrm>
-            <a:off x="457200" y="4354830"/>
-            <a:ext cx="45720" cy="464058"/>
-          </a:xfrm>
-          <a:prstGeom prst="rect">
-            <a:avLst/>
-          </a:prstGeom>
-          <a:solidFill>
-            <a:srgbClr val="1565C0"/>
-          </a:solidFill>
-          <a:ln/>
-        </p:spPr>
-      </p:sp>
-      <p:sp>
-        <p:nvSpPr>
-          <p:cNvPr id="27" name="Text 25"/>
-          <p:cNvSpPr/>
-          <p:nvPr/>
-        </p:nvSpPr>
-        <p:spPr>
-          <a:xfrm>
-            <a:off x="685800" y="4354830"/>
-            <a:ext cx="7818120" cy="464058"/>
-          </a:xfrm>
-          <a:prstGeom prst="rect">
-            <a:avLst/>
-          </a:prstGeom>
-          <a:noFill/>
-          <a:ln/>
-        </p:spPr>
-        <p:txBody>
-          <a:bodyPr wrap="square" lIns="0" tIns="0" rIns="0" bIns="0" rtlCol="0" anchor="ctr"/>
-          <a:lstStyle/>
-          <a:p>
-            <a:pPr indent="0" marL="0">
-              <a:buNone/>
-            </a:pPr>
-            <a:r>
-              <a:rPr lang="en-US" sz="1200" dirty="0">
-                <a:solidFill>
-                  <a:srgbClr val="1A1A2E"/>
-                </a:solidFill>
-                <a:latin typeface="Calibri" pitchFamily="34" charset="0"/>
-                <a:ea typeface="Calibri" pitchFamily="34" charset="-122"/>
-                <a:cs typeface="Calibri" pitchFamily="34" charset="-120"/>
-              </a:rPr>
-              <a:t>genre_artiste→artiste : CASCADE (supprimer les associations)</a:t>
-            </a:r>
-            <a:endParaRPr lang="en-US" sz="1200" dirty="0"/>
+              <a:t>Le choix depend du METIER, pas de la technique !</a:t>
+            </a:r>
+            <a:endParaRPr lang="en-US" sz="1100" dirty="0"/>
           </a:p>
         </p:txBody>
       </p:sp>
@@ -3231,7 +4043,7 @@
         <p:spPr>
           <a:xfrm>
             <a:off x="457200" y="182880"/>
-            <a:ext cx="8229600" cy="594360"/>
+            <a:ext cx="8229600" cy="548640"/>
           </a:xfrm>
           <a:prstGeom prst="rect">
             <a:avLst/>
@@ -3247,7 +4059,7 @@
               <a:buNone/>
             </a:pPr>
             <a:r>
-              <a:rPr lang="en-US" sz="2400" b="1" dirty="0">
+              <a:rPr lang="en-US" sz="2200" b="1" dirty="0">
                 <a:solidFill>
                   <a:srgbClr val="0D47A1"/>
                 </a:solidFill>
@@ -3255,9 +4067,9 @@
                 <a:ea typeface="Trebuchet MS" pitchFamily="34" charset="-122"/>
                 <a:cs typeface="Trebuchet MS" pitchFamily="34" charset="-120"/>
               </a:rPr>
-              <a:t>ALTER TABLE : modifier après création</a:t>
-            </a:r>
-            <a:endParaRPr lang="en-US" sz="2400" dirty="0"/>
+              <a:t>ALTER TABLE : modifier apres creation</a:t>
+            </a:r>
+            <a:endParaRPr lang="en-US" sz="2200" dirty="0"/>
           </a:p>
         </p:txBody>
       </p:sp>
@@ -3269,8 +4081,8 @@
         </p:nvSpPr>
         <p:spPr>
           <a:xfrm>
-            <a:off x="457200" y="914400"/>
-            <a:ext cx="8229600" cy="521208"/>
+            <a:off x="457200" y="868680"/>
+            <a:ext cx="8229600" cy="475488"/>
           </a:xfrm>
           <a:prstGeom prst="rect">
             <a:avLst/>
@@ -3279,13 +4091,6 @@
             <a:srgbClr val="FFFFFF"/>
           </a:solidFill>
           <a:ln/>
-          <a:effectLst>
-            <a:outerShdw sx="100000" sy="100000" kx="0" ky="0" algn="bl" rotWithShape="0" blurRad="50800" dist="25400" dir="8100000">
-              <a:srgbClr val="000000">
-                <a:alpha val="12000"/>
-              </a:srgbClr>
-            </a:outerShdw>
-          </a:effectLst>
         </p:spPr>
       </p:sp>
       <p:sp>
@@ -3296,8 +4101,8 @@
         </p:nvSpPr>
         <p:spPr>
           <a:xfrm>
-            <a:off x="457200" y="914400"/>
-            <a:ext cx="45720" cy="521208"/>
+            <a:off x="457200" y="868680"/>
+            <a:ext cx="45720" cy="475488"/>
           </a:xfrm>
           <a:prstGeom prst="rect">
             <a:avLst/>
@@ -3316,8 +4121,8 @@
         </p:nvSpPr>
         <p:spPr>
           <a:xfrm>
-            <a:off x="685800" y="914400"/>
-            <a:ext cx="7818120" cy="521208"/>
+            <a:off x="640080" y="868680"/>
+            <a:ext cx="7863840" cy="475488"/>
           </a:xfrm>
           <a:prstGeom prst="rect">
             <a:avLst/>
@@ -3355,8 +4160,8 @@
         </p:nvSpPr>
         <p:spPr>
           <a:xfrm>
-            <a:off x="457200" y="1463040"/>
-            <a:ext cx="8229600" cy="521208"/>
+            <a:off x="457200" y="1371600"/>
+            <a:ext cx="8229600" cy="475488"/>
           </a:xfrm>
           <a:prstGeom prst="rect">
             <a:avLst/>
@@ -3365,13 +4170,6 @@
             <a:srgbClr val="E3F2FD"/>
           </a:solidFill>
           <a:ln/>
-          <a:effectLst>
-            <a:outerShdw sx="100000" sy="100000" kx="0" ky="0" algn="bl" rotWithShape="0" blurRad="50800" dist="25400" dir="8100000">
-              <a:srgbClr val="000000">
-                <a:alpha val="12000"/>
-              </a:srgbClr>
-            </a:outerShdw>
-          </a:effectLst>
         </p:spPr>
       </p:sp>
       <p:sp>
@@ -3382,8 +4180,8 @@
         </p:nvSpPr>
         <p:spPr>
           <a:xfrm>
-            <a:off x="457200" y="1463040"/>
-            <a:ext cx="45720" cy="521208"/>
+            <a:off x="457200" y="1371600"/>
+            <a:ext cx="45720" cy="475488"/>
           </a:xfrm>
           <a:prstGeom prst="rect">
             <a:avLst/>
@@ -3402,8 +4200,8 @@
         </p:nvSpPr>
         <p:spPr>
           <a:xfrm>
-            <a:off x="685800" y="1463040"/>
-            <a:ext cx="7818120" cy="521208"/>
+            <a:off x="640080" y="1371600"/>
+            <a:ext cx="7863840" cy="475488"/>
           </a:xfrm>
           <a:prstGeom prst="rect">
             <a:avLst/>
@@ -3441,8 +4239,8 @@
         </p:nvSpPr>
         <p:spPr>
           <a:xfrm>
-            <a:off x="457200" y="2011680"/>
-            <a:ext cx="8229600" cy="521208"/>
+            <a:off x="457200" y="1874520"/>
+            <a:ext cx="8229600" cy="475488"/>
           </a:xfrm>
           <a:prstGeom prst="rect">
             <a:avLst/>
@@ -3451,13 +4249,6 @@
             <a:srgbClr val="FFFFFF"/>
           </a:solidFill>
           <a:ln/>
-          <a:effectLst>
-            <a:outerShdw sx="100000" sy="100000" kx="0" ky="0" algn="bl" rotWithShape="0" blurRad="50800" dist="25400" dir="8100000">
-              <a:srgbClr val="000000">
-                <a:alpha val="12000"/>
-              </a:srgbClr>
-            </a:outerShdw>
-          </a:effectLst>
         </p:spPr>
       </p:sp>
       <p:sp>
@@ -3468,8 +4259,8 @@
         </p:nvSpPr>
         <p:spPr>
           <a:xfrm>
-            <a:off x="457200" y="2011680"/>
-            <a:ext cx="45720" cy="521208"/>
+            <a:off x="457200" y="1874520"/>
+            <a:ext cx="45720" cy="475488"/>
           </a:xfrm>
           <a:prstGeom prst="rect">
             <a:avLst/>
@@ -3488,8 +4279,8 @@
         </p:nvSpPr>
         <p:spPr>
           <a:xfrm>
-            <a:off x="685800" y="2011680"/>
-            <a:ext cx="7818120" cy="521208"/>
+            <a:off x="640080" y="1874520"/>
+            <a:ext cx="7863840" cy="475488"/>
           </a:xfrm>
           <a:prstGeom prst="rect">
             <a:avLst/>
@@ -3527,8 +4318,8 @@
         </p:nvSpPr>
         <p:spPr>
           <a:xfrm>
-            <a:off x="457200" y="2560320"/>
-            <a:ext cx="8229600" cy="521208"/>
+            <a:off x="457200" y="2377440"/>
+            <a:ext cx="8229600" cy="475488"/>
           </a:xfrm>
           <a:prstGeom prst="rect">
             <a:avLst/>
@@ -3537,13 +4328,6 @@
             <a:srgbClr val="E3F2FD"/>
           </a:solidFill>
           <a:ln/>
-          <a:effectLst>
-            <a:outerShdw sx="100000" sy="100000" kx="0" ky="0" algn="bl" rotWithShape="0" blurRad="50800" dist="25400" dir="8100000">
-              <a:srgbClr val="000000">
-                <a:alpha val="12000"/>
-              </a:srgbClr>
-            </a:outerShdw>
-          </a:effectLst>
         </p:spPr>
       </p:sp>
       <p:sp>
@@ -3554,8 +4338,8 @@
         </p:nvSpPr>
         <p:spPr>
           <a:xfrm>
-            <a:off x="457200" y="2560320"/>
-            <a:ext cx="45720" cy="521208"/>
+            <a:off x="457200" y="2377440"/>
+            <a:ext cx="45720" cy="475488"/>
           </a:xfrm>
           <a:prstGeom prst="rect">
             <a:avLst/>
@@ -3574,8 +4358,8 @@
         </p:nvSpPr>
         <p:spPr>
           <a:xfrm>
-            <a:off x="685800" y="2560320"/>
-            <a:ext cx="7818120" cy="521208"/>
+            <a:off x="640080" y="2377440"/>
+            <a:ext cx="7863840" cy="475488"/>
           </a:xfrm>
           <a:prstGeom prst="rect">
             <a:avLst/>
@@ -3613,8 +4397,8 @@
         </p:nvSpPr>
         <p:spPr>
           <a:xfrm>
-            <a:off x="457200" y="3108960"/>
-            <a:ext cx="8229600" cy="521208"/>
+            <a:off x="457200" y="2880360"/>
+            <a:ext cx="8229600" cy="475488"/>
           </a:xfrm>
           <a:prstGeom prst="rect">
             <a:avLst/>
@@ -3623,13 +4407,6 @@
             <a:srgbClr val="FFFFFF"/>
           </a:solidFill>
           <a:ln/>
-          <a:effectLst>
-            <a:outerShdw sx="100000" sy="100000" kx="0" ky="0" algn="bl" rotWithShape="0" blurRad="50800" dist="25400" dir="8100000">
-              <a:srgbClr val="000000">
-                <a:alpha val="12000"/>
-              </a:srgbClr>
-            </a:outerShdw>
-          </a:effectLst>
         </p:spPr>
       </p:sp>
       <p:sp>
@@ -3640,8 +4417,8 @@
         </p:nvSpPr>
         <p:spPr>
           <a:xfrm>
-            <a:off x="457200" y="3108960"/>
-            <a:ext cx="45720" cy="521208"/>
+            <a:off x="457200" y="2880360"/>
+            <a:ext cx="45720" cy="475488"/>
           </a:xfrm>
           <a:prstGeom prst="rect">
             <a:avLst/>
@@ -3660,8 +4437,8 @@
         </p:nvSpPr>
         <p:spPr>
           <a:xfrm>
-            <a:off x="685800" y="3108960"/>
-            <a:ext cx="7818120" cy="521208"/>
+            <a:off x="640080" y="2880360"/>
+            <a:ext cx="7863840" cy="475488"/>
           </a:xfrm>
           <a:prstGeom prst="rect">
             <a:avLst/>
@@ -3699,8 +4476,8 @@
         </p:nvSpPr>
         <p:spPr>
           <a:xfrm>
-            <a:off x="457200" y="3657600"/>
-            <a:ext cx="8229600" cy="521208"/>
+            <a:off x="457200" y="3383280"/>
+            <a:ext cx="8229600" cy="475488"/>
           </a:xfrm>
           <a:prstGeom prst="rect">
             <a:avLst/>
@@ -3709,13 +4486,6 @@
             <a:srgbClr val="E3F2FD"/>
           </a:solidFill>
           <a:ln/>
-          <a:effectLst>
-            <a:outerShdw sx="100000" sy="100000" kx="0" ky="0" algn="bl" rotWithShape="0" blurRad="50800" dist="25400" dir="8100000">
-              <a:srgbClr val="000000">
-                <a:alpha val="12000"/>
-              </a:srgbClr>
-            </a:outerShdw>
-          </a:effectLst>
         </p:spPr>
       </p:sp>
       <p:sp>
@@ -3726,8 +4496,8 @@
         </p:nvSpPr>
         <p:spPr>
           <a:xfrm>
-            <a:off x="457200" y="3657600"/>
-            <a:ext cx="45720" cy="521208"/>
+            <a:off x="457200" y="3383280"/>
+            <a:ext cx="45720" cy="475488"/>
           </a:xfrm>
           <a:prstGeom prst="rect">
             <a:avLst/>
@@ -3746,8 +4516,8 @@
         </p:nvSpPr>
         <p:spPr>
           <a:xfrm>
-            <a:off x="685800" y="3657600"/>
-            <a:ext cx="7818120" cy="521208"/>
+            <a:off x="640080" y="3383280"/>
+            <a:ext cx="7863840" cy="475488"/>
           </a:xfrm>
           <a:prstGeom prst="rect">
             <a:avLst/>
@@ -3785,8 +4555,8 @@
         </p:nvSpPr>
         <p:spPr>
           <a:xfrm>
-            <a:off x="457200" y="4206240"/>
-            <a:ext cx="8229600" cy="521208"/>
+            <a:off x="457200" y="3886200"/>
+            <a:ext cx="8229600" cy="475488"/>
           </a:xfrm>
           <a:prstGeom prst="rect">
             <a:avLst/>
@@ -3795,13 +4565,6 @@
             <a:srgbClr val="FFFFFF"/>
           </a:solidFill>
           <a:ln/>
-          <a:effectLst>
-            <a:outerShdw sx="100000" sy="100000" kx="0" ky="0" algn="bl" rotWithShape="0" blurRad="50800" dist="25400" dir="8100000">
-              <a:srgbClr val="000000">
-                <a:alpha val="12000"/>
-              </a:srgbClr>
-            </a:outerShdw>
-          </a:effectLst>
         </p:spPr>
       </p:sp>
       <p:sp>
@@ -3812,8 +4575,8 @@
         </p:nvSpPr>
         <p:spPr>
           <a:xfrm>
-            <a:off x="457200" y="4206240"/>
-            <a:ext cx="45720" cy="521208"/>
+            <a:off x="457200" y="3886200"/>
+            <a:ext cx="45720" cy="475488"/>
           </a:xfrm>
           <a:prstGeom prst="rect">
             <a:avLst/>
@@ -3832,8 +4595,8 @@
         </p:nvSpPr>
         <p:spPr>
           <a:xfrm>
-            <a:off x="685800" y="4206240"/>
-            <a:ext cx="7818120" cy="521208"/>
+            <a:off x="640080" y="3886200"/>
+            <a:ext cx="7863840" cy="475488"/>
           </a:xfrm>
           <a:prstGeom prst="rect">
             <a:avLst/>
@@ -3849,7 +4612,7 @@
               <a:buNone/>
             </a:pPr>
             <a:r>
-              <a:rPr lang="en-US" sz="1200" dirty="0">
+              <a:rPr lang="en-US" sz="1100" dirty="0">
                 <a:solidFill>
                   <a:srgbClr val="1A1A2E"/>
                 </a:solidFill>
@@ -3857,9 +4620,9 @@
                 <a:ea typeface="Calibri" pitchFamily="34" charset="-122"/>
                 <a:cs typeface="Calibri" pitchFamily="34" charset="-120"/>
               </a:rPr>
-              <a:t>Vérifier : SHOW CREATE TABLE artiste;</a:t>
-            </a:r>
-            <a:endParaRPr lang="en-US" sz="1200" dirty="0"/>
+              <a:t>Verifier : SHOW CREATE TABLE artiste;</a:t>
+            </a:r>
+            <a:endParaRPr lang="en-US" sz="1100" dirty="0"/>
           </a:p>
         </p:txBody>
       </p:sp>
@@ -3924,7 +4687,7 @@
         <p:spPr>
           <a:xfrm>
             <a:off x="457200" y="182880"/>
-            <a:ext cx="8229600" cy="594360"/>
+            <a:ext cx="8229600" cy="548640"/>
           </a:xfrm>
           <a:prstGeom prst="rect">
             <a:avLst/>
@@ -3940,7 +4703,7 @@
               <a:buNone/>
             </a:pPr>
             <a:r>
-              <a:rPr lang="en-US" sz="2400" b="1" dirty="0">
+              <a:rPr lang="en-US" sz="2200" b="1" dirty="0">
                 <a:solidFill>
                   <a:srgbClr val="0D47A1"/>
                 </a:solidFill>
@@ -3950,7 +4713,7 @@
               </a:rPr>
               <a:t>Tester les contraintes — erreurs MySQL</a:t>
             </a:r>
-            <a:endParaRPr lang="en-US" sz="2400" dirty="0"/>
+            <a:endParaRPr lang="en-US" sz="2200" dirty="0"/>
           </a:p>
         </p:txBody>
       </p:sp>
@@ -3962,8 +4725,8 @@
         </p:nvSpPr>
         <p:spPr>
           <a:xfrm>
-            <a:off x="457200" y="914400"/>
-            <a:ext cx="8229600" cy="521208"/>
+            <a:off x="457200" y="868680"/>
+            <a:ext cx="8229600" cy="475488"/>
           </a:xfrm>
           <a:prstGeom prst="rect">
             <a:avLst/>
@@ -3972,13 +4735,6 @@
             <a:srgbClr val="FFFFFF"/>
           </a:solidFill>
           <a:ln/>
-          <a:effectLst>
-            <a:outerShdw sx="100000" sy="100000" kx="0" ky="0" algn="bl" rotWithShape="0" blurRad="50800" dist="25400" dir="8100000">
-              <a:srgbClr val="000000">
-                <a:alpha val="12000"/>
-              </a:srgbClr>
-            </a:outerShdw>
-          </a:effectLst>
         </p:spPr>
       </p:sp>
       <p:sp>
@@ -3989,8 +4745,8 @@
         </p:nvSpPr>
         <p:spPr>
           <a:xfrm>
-            <a:off x="457200" y="914400"/>
-            <a:ext cx="45720" cy="521208"/>
+            <a:off x="457200" y="868680"/>
+            <a:ext cx="45720" cy="475488"/>
           </a:xfrm>
           <a:prstGeom prst="rect">
             <a:avLst/>
@@ -4009,8 +4765,8 @@
         </p:nvSpPr>
         <p:spPr>
           <a:xfrm>
-            <a:off x="685800" y="914400"/>
-            <a:ext cx="7818120" cy="521208"/>
+            <a:off x="640080" y="868680"/>
+            <a:ext cx="7863840" cy="475488"/>
           </a:xfrm>
           <a:prstGeom prst="rect">
             <a:avLst/>
@@ -4034,7 +4790,7 @@
                 <a:ea typeface="JetBrains Mono" pitchFamily="34" charset="-122"/>
                 <a:cs typeface="JetBrains Mono" pitchFamily="34" charset="-120"/>
               </a:rPr>
-              <a:t>INSERT avec NULL sur NOT NULL → Erreur 1048 (Column cannot be null)</a:t>
+              <a:t>INSERT NULL sur NOT NULL → Erreur 1048 (Column cannot be null)</a:t>
             </a:r>
             <a:endParaRPr lang="en-US" sz="1000" dirty="0"/>
           </a:p>
@@ -4048,8 +4804,8 @@
         </p:nvSpPr>
         <p:spPr>
           <a:xfrm>
-            <a:off x="457200" y="1463040"/>
-            <a:ext cx="8229600" cy="521208"/>
+            <a:off x="457200" y="1371600"/>
+            <a:ext cx="8229600" cy="475488"/>
           </a:xfrm>
           <a:prstGeom prst="rect">
             <a:avLst/>
@@ -4058,13 +4814,6 @@
             <a:srgbClr val="E3F2FD"/>
           </a:solidFill>
           <a:ln/>
-          <a:effectLst>
-            <a:outerShdw sx="100000" sy="100000" kx="0" ky="0" algn="bl" rotWithShape="0" blurRad="50800" dist="25400" dir="8100000">
-              <a:srgbClr val="000000">
-                <a:alpha val="12000"/>
-              </a:srgbClr>
-            </a:outerShdw>
-          </a:effectLst>
         </p:spPr>
       </p:sp>
       <p:sp>
@@ -4075,8 +4824,8 @@
         </p:nvSpPr>
         <p:spPr>
           <a:xfrm>
-            <a:off x="457200" y="1463040"/>
-            <a:ext cx="45720" cy="521208"/>
+            <a:off x="457200" y="1371600"/>
+            <a:ext cx="45720" cy="475488"/>
           </a:xfrm>
           <a:prstGeom prst="rect">
             <a:avLst/>
@@ -4095,8 +4844,8 @@
         </p:nvSpPr>
         <p:spPr>
           <a:xfrm>
-            <a:off x="685800" y="1463040"/>
-            <a:ext cx="7818120" cy="521208"/>
+            <a:off x="640080" y="1371600"/>
+            <a:ext cx="7863840" cy="475488"/>
           </a:xfrm>
           <a:prstGeom prst="rect">
             <a:avLst/>
@@ -4120,7 +4869,7 @@
                 <a:ea typeface="JetBrains Mono" pitchFamily="34" charset="-122"/>
                 <a:cs typeface="JetBrains Mono" pitchFamily="34" charset="-120"/>
               </a:rPr>
-              <a:t>INSERT avec doublon UNIQUE → Erreur 1062 (Duplicate entry)</a:t>
+              <a:t>INSERT doublon UNIQUE → Erreur 1062 (Duplicate entry)</a:t>
             </a:r>
             <a:endParaRPr lang="en-US" sz="1000" dirty="0"/>
           </a:p>
@@ -4134,8 +4883,8 @@
         </p:nvSpPr>
         <p:spPr>
           <a:xfrm>
-            <a:off x="457200" y="2011680"/>
-            <a:ext cx="8229600" cy="521208"/>
+            <a:off x="457200" y="1874520"/>
+            <a:ext cx="8229600" cy="475488"/>
           </a:xfrm>
           <a:prstGeom prst="rect">
             <a:avLst/>
@@ -4144,13 +4893,6 @@
             <a:srgbClr val="FFFFFF"/>
           </a:solidFill>
           <a:ln/>
-          <a:effectLst>
-            <a:outerShdw sx="100000" sy="100000" kx="0" ky="0" algn="bl" rotWithShape="0" blurRad="50800" dist="25400" dir="8100000">
-              <a:srgbClr val="000000">
-                <a:alpha val="12000"/>
-              </a:srgbClr>
-            </a:outerShdw>
-          </a:effectLst>
         </p:spPr>
       </p:sp>
       <p:sp>
@@ -4161,8 +4903,8 @@
         </p:nvSpPr>
         <p:spPr>
           <a:xfrm>
-            <a:off x="457200" y="2011680"/>
-            <a:ext cx="45720" cy="521208"/>
+            <a:off x="457200" y="1874520"/>
+            <a:ext cx="45720" cy="475488"/>
           </a:xfrm>
           <a:prstGeom prst="rect">
             <a:avLst/>
@@ -4181,8 +4923,8 @@
         </p:nvSpPr>
         <p:spPr>
           <a:xfrm>
-            <a:off x="685800" y="2011680"/>
-            <a:ext cx="7818120" cy="521208"/>
+            <a:off x="640080" y="1874520"/>
+            <a:ext cx="7863840" cy="475488"/>
           </a:xfrm>
           <a:prstGeom prst="rect">
             <a:avLst/>
@@ -4206,7 +4948,7 @@
                 <a:ea typeface="JetBrains Mono" pitchFamily="34" charset="-122"/>
                 <a:cs typeface="JetBrains Mono" pitchFamily="34" charset="-120"/>
               </a:rPr>
-              <a:t>INSERT avec FK invalide → Erreur 1452 (Cannot add child row)</a:t>
+              <a:t>INSERT FK inexistante → Erreur 1452 (Cannot add child row)</a:t>
             </a:r>
             <a:endParaRPr lang="en-US" sz="1000" dirty="0"/>
           </a:p>
@@ -4220,8 +4962,8 @@
         </p:nvSpPr>
         <p:spPr>
           <a:xfrm>
-            <a:off x="457200" y="2560320"/>
-            <a:ext cx="8229600" cy="521208"/>
+            <a:off x="457200" y="2377440"/>
+            <a:ext cx="8229600" cy="475488"/>
           </a:xfrm>
           <a:prstGeom prst="rect">
             <a:avLst/>
@@ -4230,13 +4972,6 @@
             <a:srgbClr val="E3F2FD"/>
           </a:solidFill>
           <a:ln/>
-          <a:effectLst>
-            <a:outerShdw sx="100000" sy="100000" kx="0" ky="0" algn="bl" rotWithShape="0" blurRad="50800" dist="25400" dir="8100000">
-              <a:srgbClr val="000000">
-                <a:alpha val="12000"/>
-              </a:srgbClr>
-            </a:outerShdw>
-          </a:effectLst>
         </p:spPr>
       </p:sp>
       <p:sp>
@@ -4247,8 +4982,8 @@
         </p:nvSpPr>
         <p:spPr>
           <a:xfrm>
-            <a:off x="457200" y="2560320"/>
-            <a:ext cx="45720" cy="521208"/>
+            <a:off x="457200" y="2377440"/>
+            <a:ext cx="45720" cy="475488"/>
           </a:xfrm>
           <a:prstGeom prst="rect">
             <a:avLst/>
@@ -4267,8 +5002,8 @@
         </p:nvSpPr>
         <p:spPr>
           <a:xfrm>
-            <a:off x="685800" y="2560320"/>
-            <a:ext cx="7818120" cy="521208"/>
+            <a:off x="640080" y="2377440"/>
+            <a:ext cx="7863840" cy="475488"/>
           </a:xfrm>
           <a:prstGeom prst="rect">
             <a:avLst/>
@@ -4306,8 +5041,8 @@
         </p:nvSpPr>
         <p:spPr>
           <a:xfrm>
-            <a:off x="457200" y="3108960"/>
-            <a:ext cx="8229600" cy="521208"/>
+            <a:off x="457200" y="2880360"/>
+            <a:ext cx="8229600" cy="475488"/>
           </a:xfrm>
           <a:prstGeom prst="rect">
             <a:avLst/>
@@ -4316,13 +5051,6 @@
             <a:srgbClr val="FFFFFF"/>
           </a:solidFill>
           <a:ln/>
-          <a:effectLst>
-            <a:outerShdw sx="100000" sy="100000" kx="0" ky="0" algn="bl" rotWithShape="0" blurRad="50800" dist="25400" dir="8100000">
-              <a:srgbClr val="000000">
-                <a:alpha val="12000"/>
-              </a:srgbClr>
-            </a:outerShdw>
-          </a:effectLst>
         </p:spPr>
       </p:sp>
       <p:sp>
@@ -4333,8 +5061,8 @@
         </p:nvSpPr>
         <p:spPr>
           <a:xfrm>
-            <a:off x="457200" y="3108960"/>
-            <a:ext cx="45720" cy="521208"/>
+            <a:off x="457200" y="2880360"/>
+            <a:ext cx="45720" cy="475488"/>
           </a:xfrm>
           <a:prstGeom prst="rect">
             <a:avLst/>
@@ -4353,8 +5081,8 @@
         </p:nvSpPr>
         <p:spPr>
           <a:xfrm>
-            <a:off x="685800" y="3108960"/>
-            <a:ext cx="7818120" cy="521208"/>
+            <a:off x="640080" y="2880360"/>
+            <a:ext cx="7863840" cy="475488"/>
           </a:xfrm>
           <a:prstGeom prst="rect">
             <a:avLst/>
@@ -4370,7 +5098,7 @@
               <a:buNone/>
             </a:pPr>
             <a:r>
-              <a:rPr lang="en-US" sz="1200" dirty="0">
+              <a:rPr lang="en-US" sz="1100" dirty="0">
                 <a:solidFill>
                   <a:srgbClr val="1A1A2E"/>
                 </a:solidFill>
@@ -4378,9 +5106,9 @@
                 <a:ea typeface="Calibri" pitchFamily="34" charset="-122"/>
                 <a:cs typeface="Calibri" pitchFamily="34" charset="-120"/>
               </a:rPr>
-              <a:t>DELETE parent avec RESTRICT → Erreur 1451 (Cannot delete parent row)</a:t>
-            </a:r>
-            <a:endParaRPr lang="en-US" sz="1200" dirty="0"/>
+              <a:t>DELETE parent avec enfants RESTRICT → Erreur 1451</a:t>
+            </a:r>
+            <a:endParaRPr lang="en-US" sz="1100" dirty="0"/>
           </a:p>
         </p:txBody>
       </p:sp>
@@ -4392,8 +5120,8 @@
         </p:nvSpPr>
         <p:spPr>
           <a:xfrm>
-            <a:off x="457200" y="3657600"/>
-            <a:ext cx="8229600" cy="521208"/>
+            <a:off x="457200" y="3383280"/>
+            <a:ext cx="8229600" cy="475488"/>
           </a:xfrm>
           <a:prstGeom prst="rect">
             <a:avLst/>
@@ -4402,13 +5130,6 @@
             <a:srgbClr val="E3F2FD"/>
           </a:solidFill>
           <a:ln/>
-          <a:effectLst>
-            <a:outerShdw sx="100000" sy="100000" kx="0" ky="0" algn="bl" rotWithShape="0" blurRad="50800" dist="25400" dir="8100000">
-              <a:srgbClr val="000000">
-                <a:alpha val="12000"/>
-              </a:srgbClr>
-            </a:outerShdw>
-          </a:effectLst>
         </p:spPr>
       </p:sp>
       <p:sp>
@@ -4419,8 +5140,8 @@
         </p:nvSpPr>
         <p:spPr>
           <a:xfrm>
-            <a:off x="457200" y="3657600"/>
-            <a:ext cx="45720" cy="521208"/>
+            <a:off x="457200" y="3383280"/>
+            <a:ext cx="45720" cy="475488"/>
           </a:xfrm>
           <a:prstGeom prst="rect">
             <a:avLst/>
@@ -4439,8 +5160,8 @@
         </p:nvSpPr>
         <p:spPr>
           <a:xfrm>
-            <a:off x="685800" y="3657600"/>
-            <a:ext cx="7818120" cy="521208"/>
+            <a:off x="640080" y="3383280"/>
+            <a:ext cx="7863840" cy="475488"/>
           </a:xfrm>
           <a:prstGeom prst="rect">
             <a:avLst/>
@@ -4456,7 +5177,7 @@
               <a:buNone/>
             </a:pPr>
             <a:r>
-              <a:rPr lang="en-US" sz="1200" dirty="0">
+              <a:rPr lang="en-US" sz="1100" dirty="0">
                 <a:solidFill>
                   <a:srgbClr val="1A1A2E"/>
                 </a:solidFill>
@@ -4464,9 +5185,9 @@
                 <a:ea typeface="Calibri" pitchFamily="34" charset="-122"/>
                 <a:cs typeface="Calibri" pitchFamily="34" charset="-120"/>
               </a:rPr>
-              <a:t>Chaque erreur est une PREUVE que la contrainte fonctionne !</a:t>
-            </a:r>
-            <a:endParaRPr lang="en-US" sz="1200" dirty="0"/>
+              <a:t>Chaque erreur PROUVE que la contrainte fonctionne</a:t>
+            </a:r>
+            <a:endParaRPr lang="en-US" sz="1100" dirty="0"/>
           </a:p>
         </p:txBody>
       </p:sp>
@@ -4478,8 +5199,8 @@
         </p:nvSpPr>
         <p:spPr>
           <a:xfrm>
-            <a:off x="457200" y="4206240"/>
-            <a:ext cx="8229600" cy="521208"/>
+            <a:off x="457200" y="3886200"/>
+            <a:ext cx="8229600" cy="475488"/>
           </a:xfrm>
           <a:prstGeom prst="rect">
             <a:avLst/>
@@ -4488,13 +5209,6 @@
             <a:srgbClr val="FFFFFF"/>
           </a:solidFill>
           <a:ln/>
-          <a:effectLst>
-            <a:outerShdw sx="100000" sy="100000" kx="0" ky="0" algn="bl" rotWithShape="0" blurRad="50800" dist="25400" dir="8100000">
-              <a:srgbClr val="000000">
-                <a:alpha val="12000"/>
-              </a:srgbClr>
-            </a:outerShdw>
-          </a:effectLst>
         </p:spPr>
       </p:sp>
       <p:sp>
@@ -4505,8 +5219,8 @@
         </p:nvSpPr>
         <p:spPr>
           <a:xfrm>
-            <a:off x="457200" y="4206240"/>
-            <a:ext cx="45720" cy="521208"/>
+            <a:off x="457200" y="3886200"/>
+            <a:ext cx="45720" cy="475488"/>
           </a:xfrm>
           <a:prstGeom prst="rect">
             <a:avLst/>
@@ -4525,8 +5239,8 @@
         </p:nvSpPr>
         <p:spPr>
           <a:xfrm>
-            <a:off x="685800" y="4206240"/>
-            <a:ext cx="7818120" cy="521208"/>
+            <a:off x="640080" y="3886200"/>
+            <a:ext cx="7863840" cy="475488"/>
           </a:xfrm>
           <a:prstGeom prst="rect">
             <a:avLst/>
@@ -4542,7 +5256,7 @@
               <a:buNone/>
             </a:pPr>
             <a:r>
-              <a:rPr lang="en-US" sz="1200" dirty="0">
+              <a:rPr lang="en-US" sz="1100" dirty="0">
                 <a:solidFill>
                   <a:srgbClr val="1A1A2E"/>
                 </a:solidFill>
@@ -4552,7 +5266,7 @@
               </a:rPr>
               <a:t>Documenter ces erreurs = base pour le plan de tests (LO3)</a:t>
             </a:r>
-            <a:endParaRPr lang="en-US" sz="1200" dirty="0"/>
+            <a:endParaRPr lang="en-US" sz="1100" dirty="0"/>
           </a:p>
         </p:txBody>
       </p:sp>
@@ -4617,7 +5331,7 @@
         <p:spPr>
           <a:xfrm>
             <a:off x="457200" y="182880"/>
-            <a:ext cx="8229600" cy="594360"/>
+            <a:ext cx="8229600" cy="548640"/>
           </a:xfrm>
           <a:prstGeom prst="rect">
             <a:avLst/>
@@ -4633,7 +5347,7 @@
               <a:buNone/>
             </a:pPr>
             <a:r>
-              <a:rPr lang="en-US" sz="2400" b="1" dirty="0">
+              <a:rPr lang="en-US" sz="2200" b="1" dirty="0">
                 <a:solidFill>
                   <a:srgbClr val="0D47A1"/>
                 </a:solidFill>
@@ -4641,9 +5355,9 @@
                 <a:ea typeface="Trebuchet MS" pitchFamily="34" charset="-122"/>
                 <a:cs typeface="Trebuchet MS" pitchFamily="34" charset="-120"/>
               </a:rPr>
-              <a:t>Exercice Module 10</a:t>
-            </a:r>
-            <a:endParaRPr lang="en-US" sz="2400" dirty="0"/>
+              <a:t>SwissSound : contraintes par table (recapitulatif)</a:t>
+            </a:r>
+            <a:endParaRPr lang="en-US" sz="2200" dirty="0"/>
           </a:p>
         </p:txBody>
       </p:sp>
@@ -4655,8 +5369,8 @@
         </p:nvSpPr>
         <p:spPr>
           <a:xfrm>
-            <a:off x="457200" y="914400"/>
-            <a:ext cx="8229600" cy="521208"/>
+            <a:off x="457200" y="868680"/>
+            <a:ext cx="8229600" cy="475488"/>
           </a:xfrm>
           <a:prstGeom prst="rect">
             <a:avLst/>
@@ -4665,13 +5379,6 @@
             <a:srgbClr val="FFFFFF"/>
           </a:solidFill>
           <a:ln/>
-          <a:effectLst>
-            <a:outerShdw sx="100000" sy="100000" kx="0" ky="0" algn="bl" rotWithShape="0" blurRad="50800" dist="25400" dir="8100000">
-              <a:srgbClr val="000000">
-                <a:alpha val="12000"/>
-              </a:srgbClr>
-            </a:outerShdw>
-          </a:effectLst>
         </p:spPr>
       </p:sp>
       <p:sp>
@@ -4682,8 +5389,8 @@
         </p:nvSpPr>
         <p:spPr>
           <a:xfrm>
-            <a:off x="457200" y="914400"/>
-            <a:ext cx="45720" cy="521208"/>
+            <a:off x="457200" y="868680"/>
+            <a:ext cx="45720" cy="475488"/>
           </a:xfrm>
           <a:prstGeom prst="rect">
             <a:avLst/>
@@ -4702,8 +5409,8 @@
         </p:nvSpPr>
         <p:spPr>
           <a:xfrm>
-            <a:off x="685800" y="914400"/>
-            <a:ext cx="7818120" cy="521208"/>
+            <a:off x="640080" y="868680"/>
+            <a:ext cx="7863840" cy="475488"/>
           </a:xfrm>
           <a:prstGeom prst="rect">
             <a:avLst/>
@@ -4719,7 +5426,7 @@
               <a:buNone/>
             </a:pPr>
             <a:r>
-              <a:rPr lang="en-US" sz="1200" dirty="0">
+              <a:rPr lang="en-US" sz="1100" dirty="0">
                 <a:solidFill>
                   <a:srgbClr val="1A1A2E"/>
                 </a:solidFill>
@@ -4727,9 +5434,9 @@
                 <a:ea typeface="Calibri" pitchFamily="34" charset="-122"/>
                 <a:cs typeface="Calibri" pitchFamily="34" charset="-120"/>
               </a:rPr>
-              <a:t>Ajouter les contraintes manquantes avec ALTER TABLE</a:t>
-            </a:r>
-            <a:endParaRPr lang="en-US" sz="1200" dirty="0"/>
+              <a:t>artiste : nom NOT NULL, email NOT NULL UNIQUE, actif DEFAULT TRUE</a:t>
+            </a:r>
+            <a:endParaRPr lang="en-US" sz="1100" dirty="0"/>
           </a:p>
         </p:txBody>
       </p:sp>
@@ -4741,8 +5448,8 @@
         </p:nvSpPr>
         <p:spPr>
           <a:xfrm>
-            <a:off x="457200" y="1463040"/>
-            <a:ext cx="8229600" cy="521208"/>
+            <a:off x="457200" y="1371600"/>
+            <a:ext cx="8229600" cy="475488"/>
           </a:xfrm>
           <a:prstGeom prst="rect">
             <a:avLst/>
@@ -4751,13 +5458,6 @@
             <a:srgbClr val="E3F2FD"/>
           </a:solidFill>
           <a:ln/>
-          <a:effectLst>
-            <a:outerShdw sx="100000" sy="100000" kx="0" ky="0" algn="bl" rotWithShape="0" blurRad="50800" dist="25400" dir="8100000">
-              <a:srgbClr val="000000">
-                <a:alpha val="12000"/>
-              </a:srgbClr>
-            </a:outerShdw>
-          </a:effectLst>
         </p:spPr>
       </p:sp>
       <p:sp>
@@ -4768,8 +5468,8 @@
         </p:nvSpPr>
         <p:spPr>
           <a:xfrm>
-            <a:off x="457200" y="1463040"/>
-            <a:ext cx="45720" cy="521208"/>
+            <a:off x="457200" y="1371600"/>
+            <a:ext cx="45720" cy="475488"/>
           </a:xfrm>
           <a:prstGeom prst="rect">
             <a:avLst/>
@@ -4788,8 +5488,8 @@
         </p:nvSpPr>
         <p:spPr>
           <a:xfrm>
-            <a:off x="685800" y="1463040"/>
-            <a:ext cx="7818120" cy="521208"/>
+            <a:off x="640080" y="1371600"/>
+            <a:ext cx="7863840" cy="475488"/>
           </a:xfrm>
           <a:prstGeom prst="rect">
             <a:avLst/>
@@ -4805,7 +5505,7 @@
               <a:buNone/>
             </a:pPr>
             <a:r>
-              <a:rPr lang="en-US" sz="1200" dirty="0">
+              <a:rPr lang="en-US" sz="1100" dirty="0">
                 <a:solidFill>
                   <a:srgbClr val="1A1A2E"/>
                 </a:solidFill>
@@ -4813,9 +5513,9 @@
                 <a:ea typeface="Calibri" pitchFamily="34" charset="-122"/>
                 <a:cs typeface="Calibri" pitchFamily="34" charset="-120"/>
               </a:rPr>
-              <a:t>Tester chaque contrainte avec un INSERT invalide</a:t>
-            </a:r>
-            <a:endParaRPr lang="en-US" sz="1200" dirty="0"/>
+              <a:t>album : titre NOT NULL, prix CHECK &gt;= 0, id_artiste FK RESTRICT</a:t>
+            </a:r>
+            <a:endParaRPr lang="en-US" sz="1100" dirty="0"/>
           </a:p>
         </p:txBody>
       </p:sp>
@@ -4827,8 +5527,8 @@
         </p:nvSpPr>
         <p:spPr>
           <a:xfrm>
-            <a:off x="457200" y="2011680"/>
-            <a:ext cx="8229600" cy="521208"/>
+            <a:off x="457200" y="1874520"/>
+            <a:ext cx="8229600" cy="475488"/>
           </a:xfrm>
           <a:prstGeom prst="rect">
             <a:avLst/>
@@ -4837,13 +5537,6 @@
             <a:srgbClr val="FFFFFF"/>
           </a:solidFill>
           <a:ln/>
-          <a:effectLst>
-            <a:outerShdw sx="100000" sy="100000" kx="0" ky="0" algn="bl" rotWithShape="0" blurRad="50800" dist="25400" dir="8100000">
-              <a:srgbClr val="000000">
-                <a:alpha val="12000"/>
-              </a:srgbClr>
-            </a:outerShdw>
-          </a:effectLst>
         </p:spPr>
       </p:sp>
       <p:sp>
@@ -4854,8 +5547,8 @@
         </p:nvSpPr>
         <p:spPr>
           <a:xfrm>
-            <a:off x="457200" y="2011680"/>
-            <a:ext cx="45720" cy="521208"/>
+            <a:off x="457200" y="1874520"/>
+            <a:ext cx="45720" cy="475488"/>
           </a:xfrm>
           <a:prstGeom prst="rect">
             <a:avLst/>
@@ -4874,8 +5567,8 @@
         </p:nvSpPr>
         <p:spPr>
           <a:xfrm>
-            <a:off x="685800" y="2011680"/>
-            <a:ext cx="7818120" cy="521208"/>
+            <a:off x="640080" y="1874520"/>
+            <a:ext cx="7863840" cy="475488"/>
           </a:xfrm>
           <a:prstGeom prst="rect">
             <a:avLst/>
@@ -4891,7 +5584,7 @@
               <a:buNone/>
             </a:pPr>
             <a:r>
-              <a:rPr lang="en-US" sz="1200" dirty="0">
+              <a:rPr lang="en-US" sz="1100" dirty="0">
                 <a:solidFill>
                   <a:srgbClr val="1A1A2E"/>
                 </a:solidFill>
@@ -4899,9 +5592,9 @@
                 <a:ea typeface="Calibri" pitchFamily="34" charset="-122"/>
                 <a:cs typeface="Calibri" pitchFamily="34" charset="-120"/>
               </a:rPr>
-              <a:t>Documenter : contrainte testée, valeur insérée, erreur obtenue</a:t>
-            </a:r>
-            <a:endParaRPr lang="en-US" sz="1200" dirty="0"/>
+              <a:t>salle : nom NOT NULL UNIQUE, tarif CHECK &gt; 0</a:t>
+            </a:r>
+            <a:endParaRPr lang="en-US" sz="1100" dirty="0"/>
           </a:p>
         </p:txBody>
       </p:sp>
@@ -4913,8 +5606,8 @@
         </p:nvSpPr>
         <p:spPr>
           <a:xfrm>
-            <a:off x="457200" y="2560320"/>
-            <a:ext cx="8229600" cy="521208"/>
+            <a:off x="457200" y="2377440"/>
+            <a:ext cx="8229600" cy="475488"/>
           </a:xfrm>
           <a:prstGeom prst="rect">
             <a:avLst/>
@@ -4923,13 +5616,6 @@
             <a:srgbClr val="E3F2FD"/>
           </a:solidFill>
           <a:ln/>
-          <a:effectLst>
-            <a:outerShdw sx="100000" sy="100000" kx="0" ky="0" algn="bl" rotWithShape="0" blurRad="50800" dist="25400" dir="8100000">
-              <a:srgbClr val="000000">
-                <a:alpha val="12000"/>
-              </a:srgbClr>
-            </a:outerShdw>
-          </a:effectLst>
         </p:spPr>
       </p:sp>
       <p:sp>
@@ -4940,8 +5626,8 @@
         </p:nvSpPr>
         <p:spPr>
           <a:xfrm>
-            <a:off x="457200" y="2560320"/>
-            <a:ext cx="45720" cy="521208"/>
+            <a:off x="457200" y="2377440"/>
+            <a:ext cx="45720" cy="475488"/>
           </a:xfrm>
           <a:prstGeom prst="rect">
             <a:avLst/>
@@ -4960,8 +5646,8 @@
         </p:nvSpPr>
         <p:spPr>
           <a:xfrm>
-            <a:off x="685800" y="2560320"/>
-            <a:ext cx="7818120" cy="521208"/>
+            <a:off x="640080" y="2377440"/>
+            <a:ext cx="7863840" cy="475488"/>
           </a:xfrm>
           <a:prstGeom prst="rect">
             <a:avLst/>
@@ -4977,7 +5663,7 @@
               <a:buNone/>
             </a:pPr>
             <a:r>
-              <a:rPr lang="en-US" sz="1200" dirty="0">
+              <a:rPr lang="en-US" sz="1100" dirty="0">
                 <a:solidFill>
                   <a:srgbClr val="1A1A2E"/>
                 </a:solidFill>
@@ -4985,9 +5671,9 @@
                 <a:ea typeface="Calibri" pitchFamily="34" charset="-122"/>
                 <a:cs typeface="Calibri" pitchFamily="34" charset="-120"/>
               </a:rPr>
-              <a:t>Tester ON DELETE CASCADE sur genre_artiste (supprimer un genre)</a:t>
-            </a:r>
-            <a:endParaRPr lang="en-US" sz="1200" dirty="0"/>
+              <a:t>ingenieur : nom NOT NULL, prenom NOT NULL, tarif CHECK &gt; 0</a:t>
+            </a:r>
+            <a:endParaRPr lang="en-US" sz="1100" dirty="0"/>
           </a:p>
         </p:txBody>
       </p:sp>
@@ -4999,8 +5685,8 @@
         </p:nvSpPr>
         <p:spPr>
           <a:xfrm>
-            <a:off x="457200" y="3108960"/>
-            <a:ext cx="8229600" cy="521208"/>
+            <a:off x="457200" y="2880360"/>
+            <a:ext cx="8229600" cy="475488"/>
           </a:xfrm>
           <a:prstGeom prst="rect">
             <a:avLst/>
@@ -5009,13 +5695,6 @@
             <a:srgbClr val="FFFFFF"/>
           </a:solidFill>
           <a:ln/>
-          <a:effectLst>
-            <a:outerShdw sx="100000" sy="100000" kx="0" ky="0" algn="bl" rotWithShape="0" blurRad="50800" dist="25400" dir="8100000">
-              <a:srgbClr val="000000">
-                <a:alpha val="12000"/>
-              </a:srgbClr>
-            </a:outerShdw>
-          </a:effectLst>
         </p:spPr>
       </p:sp>
       <p:sp>
@@ -5026,8 +5705,8 @@
         </p:nvSpPr>
         <p:spPr>
           <a:xfrm>
-            <a:off x="457200" y="3108960"/>
-            <a:ext cx="45720" cy="521208"/>
+            <a:off x="457200" y="2880360"/>
+            <a:ext cx="45720" cy="475488"/>
           </a:xfrm>
           <a:prstGeom prst="rect">
             <a:avLst/>
@@ -5046,8 +5725,8 @@
         </p:nvSpPr>
         <p:spPr>
           <a:xfrm>
-            <a:off x="685800" y="3108960"/>
-            <a:ext cx="7818120" cy="521208"/>
+            <a:off x="640080" y="2880360"/>
+            <a:ext cx="7863840" cy="475488"/>
           </a:xfrm>
           <a:prstGeom prst="rect">
             <a:avLst/>
@@ -5063,7 +5742,7 @@
               <a:buNone/>
             </a:pPr>
             <a:r>
-              <a:rPr lang="en-US" sz="1200" dirty="0">
+              <a:rPr lang="en-US" sz="1100" dirty="0">
                 <a:solidFill>
                   <a:srgbClr val="1A1A2E"/>
                 </a:solidFill>
@@ -5071,9 +5750,9 @@
                 <a:ea typeface="Calibri" pitchFamily="34" charset="-122"/>
                 <a:cs typeface="Calibri" pitchFamily="34" charset="-120"/>
               </a:rPr>
-              <a:t>Tester ON DELETE RESTRICT sur album (essayer de supprimer un artiste avec albums)</a:t>
-            </a:r>
-            <a:endParaRPr lang="en-US" sz="1200" dirty="0"/>
+              <a:t>session : heure_fin CHECK &gt; heure_debut, 3 FK RESTRICT</a:t>
+            </a:r>
+            <a:endParaRPr lang="en-US" sz="1100" dirty="0"/>
           </a:p>
         </p:txBody>
       </p:sp>
@@ -5085,8 +5764,8 @@
         </p:nvSpPr>
         <p:spPr>
           <a:xfrm>
-            <a:off x="457200" y="3657600"/>
-            <a:ext cx="8229600" cy="521208"/>
+            <a:off x="457200" y="3383280"/>
+            <a:ext cx="8229600" cy="475488"/>
           </a:xfrm>
           <a:prstGeom prst="rect">
             <a:avLst/>
@@ -5095,13 +5774,6 @@
             <a:srgbClr val="E3F2FD"/>
           </a:solidFill>
           <a:ln/>
-          <a:effectLst>
-            <a:outerShdw sx="100000" sy="100000" kx="0" ky="0" algn="bl" rotWithShape="0" blurRad="50800" dist="25400" dir="8100000">
-              <a:srgbClr val="000000">
-                <a:alpha val="12000"/>
-              </a:srgbClr>
-            </a:outerShdw>
-          </a:effectLst>
         </p:spPr>
       </p:sp>
       <p:sp>
@@ -5112,8 +5784,8 @@
         </p:nvSpPr>
         <p:spPr>
           <a:xfrm>
-            <a:off x="457200" y="3657600"/>
-            <a:ext cx="45720" cy="521208"/>
+            <a:off x="457200" y="3383280"/>
+            <a:ext cx="45720" cy="475488"/>
           </a:xfrm>
           <a:prstGeom prst="rect">
             <a:avLst/>
@@ -5132,8 +5804,8 @@
         </p:nvSpPr>
         <p:spPr>
           <a:xfrm>
-            <a:off x="685800" y="3657600"/>
-            <a:ext cx="7818120" cy="521208"/>
+            <a:off x="640080" y="3383280"/>
+            <a:ext cx="7863840" cy="475488"/>
           </a:xfrm>
           <a:prstGeom prst="rect">
             <a:avLst/>
@@ -5149,7 +5821,7 @@
               <a:buNone/>
             </a:pPr>
             <a:r>
-              <a:rPr lang="en-US" sz="1200" dirty="0">
+              <a:rPr lang="en-US" sz="1100" dirty="0">
                 <a:solidFill>
                   <a:srgbClr val="1A1A2E"/>
                 </a:solidFill>
@@ -5157,9 +5829,88 @@
                 <a:ea typeface="Calibri" pitchFamily="34" charset="-122"/>
                 <a:cs typeface="Calibri" pitchFamily="34" charset="-120"/>
               </a:rPr>
-              <a:t>DÉFI : créer un 'guide des erreurs MySQL' pour SwissSound (erreur → cause → solution)</a:t>
-            </a:r>
-            <a:endParaRPr lang="en-US" sz="1200" dirty="0"/>
+              <a:t>equipement : id_salle FK SET NULL (equipement sans salle)</a:t>
+            </a:r>
+            <a:endParaRPr lang="en-US" sz="1100" dirty="0"/>
+          </a:p>
+        </p:txBody>
+      </p:sp>
+      <p:sp>
+        <p:nvSpPr>
+          <p:cNvPr id="22" name="Shape 20"/>
+          <p:cNvSpPr/>
+          <p:nvPr/>
+        </p:nvSpPr>
+        <p:spPr>
+          <a:xfrm>
+            <a:off x="457200" y="3886200"/>
+            <a:ext cx="8229600" cy="475488"/>
+          </a:xfrm>
+          <a:prstGeom prst="rect">
+            <a:avLst/>
+          </a:prstGeom>
+          <a:solidFill>
+            <a:srgbClr val="FFFFFF"/>
+          </a:solidFill>
+          <a:ln/>
+        </p:spPr>
+      </p:sp>
+      <p:sp>
+        <p:nvSpPr>
+          <p:cNvPr id="23" name="Shape 21"/>
+          <p:cNvSpPr/>
+          <p:nvPr/>
+        </p:nvSpPr>
+        <p:spPr>
+          <a:xfrm>
+            <a:off x="457200" y="3886200"/>
+            <a:ext cx="45720" cy="475488"/>
+          </a:xfrm>
+          <a:prstGeom prst="rect">
+            <a:avLst/>
+          </a:prstGeom>
+          <a:solidFill>
+            <a:srgbClr val="1565C0"/>
+          </a:solidFill>
+          <a:ln/>
+        </p:spPr>
+      </p:sp>
+      <p:sp>
+        <p:nvSpPr>
+          <p:cNvPr id="24" name="Text 22"/>
+          <p:cNvSpPr/>
+          <p:nvPr/>
+        </p:nvSpPr>
+        <p:spPr>
+          <a:xfrm>
+            <a:off x="640080" y="3886200"/>
+            <a:ext cx="7863840" cy="475488"/>
+          </a:xfrm>
+          <a:prstGeom prst="rect">
+            <a:avLst/>
+          </a:prstGeom>
+          <a:noFill/>
+          <a:ln/>
+        </p:spPr>
+        <p:txBody>
+          <a:bodyPr wrap="square" lIns="0" tIns="0" rIns="0" bIns="0" rtlCol="0" anchor="ctr"/>
+          <a:lstStyle/>
+          <a:p>
+            <a:pPr indent="0" marL="0">
+              <a:buNone/>
+            </a:pPr>
+            <a:r>
+              <a:rPr lang="en-US" sz="1100" dirty="0">
+                <a:solidFill>
+                  <a:srgbClr val="1A1A2E"/>
+                </a:solidFill>
+                <a:latin typeface="Calibri" pitchFamily="34" charset="0"/>
+                <a:ea typeface="Calibri" pitchFamily="34" charset="-122"/>
+                <a:cs typeface="Calibri" pitchFamily="34" charset="-120"/>
+              </a:rPr>
+              <a:t>facture : montant NOT NULL CHECK &gt; 0, statut ENUM</a:t>
+            </a:r>
+            <a:endParaRPr lang="en-US" sz="1100" dirty="0"/>
           </a:p>
         </p:txBody>
       </p:sp>
@@ -5177,7 +5928,7 @@
     <p:bg>
       <p:bgPr>
         <a:solidFill>
-          <a:srgbClr val="0D47A1"/>
+          <a:srgbClr val="F5F7FA"/>
         </a:solidFill>
       </p:bgPr>
     </p:bg>
@@ -5197,14 +5948,34 @@
       </p:grpSpPr>
       <p:sp>
         <p:nvSpPr>
-          <p:cNvPr id="2" name="Text 0"/>
-          <p:cNvSpPr/>
-          <p:nvPr/>
-        </p:nvSpPr>
-        <p:spPr>
-          <a:xfrm>
-            <a:off x="3840480" y="457200"/>
-            <a:ext cx="1463040" cy="1097280"/>
+          <p:cNvPr id="2" name="Shape 0"/>
+          <p:cNvSpPr/>
+          <p:nvPr/>
+        </p:nvSpPr>
+        <p:spPr>
+          <a:xfrm>
+            <a:off x="0" y="0"/>
+            <a:ext cx="9144000" cy="54864"/>
+          </a:xfrm>
+          <a:prstGeom prst="rect">
+            <a:avLst/>
+          </a:prstGeom>
+          <a:solidFill>
+            <a:srgbClr val="1565C0"/>
+          </a:solidFill>
+          <a:ln/>
+        </p:spPr>
+      </p:sp>
+      <p:sp>
+        <p:nvSpPr>
+          <p:cNvPr id="3" name="Text 1"/>
+          <p:cNvSpPr/>
+          <p:nvPr/>
+        </p:nvSpPr>
+        <p:spPr>
+          <a:xfrm>
+            <a:off x="457200" y="182880"/>
+            <a:ext cx="8229600" cy="548640"/>
           </a:xfrm>
           <a:prstGeom prst="rect">
             <a:avLst/>
@@ -5216,70 +5987,74 @@
           <a:bodyPr wrap="square" lIns="0" tIns="0" rIns="0" bIns="0" rtlCol="0" anchor="ctr"/>
           <a:lstStyle/>
           <a:p>
-            <a:pPr algn="ctr" indent="0" marL="0">
+            <a:pPr indent="0" marL="0">
               <a:buNone/>
             </a:pPr>
             <a:r>
-              <a:rPr lang="en-US" sz="6000" dirty="0">
+              <a:rPr lang="en-US" sz="2200" b="1" dirty="0">
                 <a:solidFill>
-                  <a:srgbClr val="000000"/>
-                </a:solidFill>
-              </a:rPr>
-              <a:t>🎮</a:t>
-            </a:r>
-            <a:endParaRPr lang="en-US" sz="6000" dirty="0"/>
-          </a:p>
-        </p:txBody>
-      </p:sp>
-      <p:sp>
-        <p:nvSpPr>
-          <p:cNvPr id="3" name="Text 1"/>
-          <p:cNvSpPr/>
-          <p:nvPr/>
-        </p:nvSpPr>
-        <p:spPr>
-          <a:xfrm>
-            <a:off x="457200" y="1645920"/>
-            <a:ext cx="8229600" cy="548640"/>
-          </a:xfrm>
-          <a:prstGeom prst="rect">
-            <a:avLst/>
-          </a:prstGeom>
-          <a:noFill/>
-          <a:ln/>
-        </p:spPr>
-        <p:txBody>
-          <a:bodyPr wrap="square" lIns="0" tIns="0" rIns="0" bIns="0" rtlCol="0" anchor="ctr"/>
-          <a:lstStyle/>
-          <a:p>
-            <a:pPr algn="ctr" indent="0" marL="0">
-              <a:buNone/>
-            </a:pPr>
-            <a:r>
-              <a:rPr lang="en-US" sz="2600" b="1" dirty="0">
-                <a:solidFill>
-                  <a:srgbClr val="FFFFFF"/>
+                  <a:srgbClr val="0D47A1"/>
                 </a:solidFill>
                 <a:latin typeface="Trebuchet MS" pitchFamily="34" charset="0"/>
                 <a:ea typeface="Trebuchet MS" pitchFamily="34" charset="-122"/>
                 <a:cs typeface="Trebuchet MS" pitchFamily="34" charset="-120"/>
               </a:rPr>
-              <a:t>Mini-jeu : La Chaîne de Contraintes</a:t>
-            </a:r>
-            <a:endParaRPr lang="en-US" sz="2600" dirty="0"/>
-          </a:p>
-        </p:txBody>
-      </p:sp>
-      <p:sp>
-        <p:nvSpPr>
-          <p:cNvPr id="4" name="Text 2"/>
-          <p:cNvSpPr/>
-          <p:nvPr/>
-        </p:nvSpPr>
-        <p:spPr>
-          <a:xfrm>
-            <a:off x="1371600" y="2286000"/>
-            <a:ext cx="6400800" cy="731520"/>
+              <a:t>Exercices GESCOM lies — sur la BDD GESCOM</a:t>
+            </a:r>
+            <a:endParaRPr lang="en-US" sz="2200" dirty="0"/>
+          </a:p>
+        </p:txBody>
+      </p:sp>
+      <p:sp>
+        <p:nvSpPr>
+          <p:cNvPr id="4" name="Shape 2"/>
+          <p:cNvSpPr/>
+          <p:nvPr/>
+        </p:nvSpPr>
+        <p:spPr>
+          <a:xfrm>
+            <a:off x="457200" y="868680"/>
+            <a:ext cx="8229600" cy="475488"/>
+          </a:xfrm>
+          <a:prstGeom prst="rect">
+            <a:avLst/>
+          </a:prstGeom>
+          <a:solidFill>
+            <a:srgbClr val="FFFFFF"/>
+          </a:solidFill>
+          <a:ln/>
+        </p:spPr>
+      </p:sp>
+      <p:sp>
+        <p:nvSpPr>
+          <p:cNvPr id="5" name="Shape 3"/>
+          <p:cNvSpPr/>
+          <p:nvPr/>
+        </p:nvSpPr>
+        <p:spPr>
+          <a:xfrm>
+            <a:off x="457200" y="868680"/>
+            <a:ext cx="45720" cy="475488"/>
+          </a:xfrm>
+          <a:prstGeom prst="rect">
+            <a:avLst/>
+          </a:prstGeom>
+          <a:solidFill>
+            <a:srgbClr val="1565C0"/>
+          </a:solidFill>
+          <a:ln/>
+        </p:spPr>
+      </p:sp>
+      <p:sp>
+        <p:nvSpPr>
+          <p:cNvPr id="6" name="Text 4"/>
+          <p:cNvSpPr/>
+          <p:nvPr/>
+        </p:nvSpPr>
+        <p:spPr>
+          <a:xfrm>
+            <a:off x="640080" y="868680"/>
+            <a:ext cx="7863840" cy="475488"/>
           </a:xfrm>
           <a:prstGeom prst="rect">
             <a:avLst/>
@@ -5291,54 +6066,74 @@
           <a:bodyPr wrap="square" lIns="0" tIns="0" rIns="0" bIns="0" rtlCol="0" anchor="ctr"/>
           <a:lstStyle/>
           <a:p>
-            <a:pPr algn="ctr" indent="0" marL="0">
+            <a:pPr indent="0" marL="0">
               <a:buNone/>
             </a:pPr>
             <a:r>
-              <a:rPr lang="en-US" sz="1400" dirty="0">
+              <a:rPr lang="en-US" sz="1100" dirty="0">
                 <a:solidFill>
-                  <a:srgbClr val="CCCCCC"/>
+                  <a:srgbClr val="1A1A2E"/>
                 </a:solidFill>
                 <a:latin typeface="Calibri" pitchFamily="34" charset="0"/>
                 <a:ea typeface="Calibri" pitchFamily="34" charset="-122"/>
                 <a:cs typeface="Calibri" pitchFamily="34" charset="-120"/>
               </a:rPr>
-              <a:t>Assemblez les bonnes contraintes pour protéger les données !</a:t>
-            </a:r>
-            <a:endParaRPr lang="en-US" sz="1400" dirty="0"/>
-          </a:p>
-        </p:txBody>
-      </p:sp>
-      <p:sp>
-        <p:nvSpPr>
-          <p:cNvPr id="5" name="Shape 3"/>
-          <p:cNvSpPr/>
-          <p:nvPr/>
-        </p:nvSpPr>
-        <p:spPr>
-          <a:xfrm>
-            <a:off x="2286000" y="3291840"/>
-            <a:ext cx="4572000" cy="548640"/>
-          </a:xfrm>
-          <a:prstGeom prst="rect">
-            <a:avLst/>
-          </a:prstGeom>
-          <a:solidFill>
-            <a:srgbClr val="FF6F00"/>
-          </a:solidFill>
-          <a:ln/>
-        </p:spPr>
-      </p:sp>
-      <p:sp>
-        <p:nvSpPr>
-          <p:cNvPr id="6" name="Text 4"/>
-          <p:cNvSpPr/>
-          <p:nvPr/>
-        </p:nvSpPr>
-        <p:spPr>
-          <a:xfrm>
-            <a:off x="2286000" y="3291840"/>
-            <a:ext cx="4572000" cy="548640"/>
+              <a:t>Ouvrir le bac a sable SQL → Charger GESCOM (17 tables)</a:t>
+            </a:r>
+            <a:endParaRPr lang="en-US" sz="1100" dirty="0"/>
+          </a:p>
+        </p:txBody>
+      </p:sp>
+      <p:sp>
+        <p:nvSpPr>
+          <p:cNvPr id="7" name="Shape 5"/>
+          <p:cNvSpPr/>
+          <p:nvPr/>
+        </p:nvSpPr>
+        <p:spPr>
+          <a:xfrm>
+            <a:off x="457200" y="1371600"/>
+            <a:ext cx="8229600" cy="475488"/>
+          </a:xfrm>
+          <a:prstGeom prst="rect">
+            <a:avLst/>
+          </a:prstGeom>
+          <a:solidFill>
+            <a:srgbClr val="E3F2FD"/>
+          </a:solidFill>
+          <a:ln/>
+        </p:spPr>
+      </p:sp>
+      <p:sp>
+        <p:nvSpPr>
+          <p:cNvPr id="8" name="Shape 6"/>
+          <p:cNvSpPr/>
+          <p:nvPr/>
+        </p:nvSpPr>
+        <p:spPr>
+          <a:xfrm>
+            <a:off x="457200" y="1371600"/>
+            <a:ext cx="45720" cy="475488"/>
+          </a:xfrm>
+          <a:prstGeom prst="rect">
+            <a:avLst/>
+          </a:prstGeom>
+          <a:solidFill>
+            <a:srgbClr val="1565C0"/>
+          </a:solidFill>
+          <a:ln/>
+        </p:spPr>
+      </p:sp>
+      <p:sp>
+        <p:nvSpPr>
+          <p:cNvPr id="9" name="Text 7"/>
+          <p:cNvSpPr/>
+          <p:nvPr/>
+        </p:nvSpPr>
+        <p:spPr>
+          <a:xfrm>
+            <a:off x="640080" y="1371600"/>
+            <a:ext cx="7863840" cy="475488"/>
           </a:xfrm>
           <a:prstGeom prst="rect">
             <a:avLst/>
@@ -5350,21 +6145,337 @@
           <a:bodyPr wrap="square" lIns="0" tIns="0" rIns="0" bIns="0" rtlCol="0" anchor="ctr"/>
           <a:lstStyle/>
           <a:p>
-            <a:pPr algn="ctr" indent="0" marL="0">
+            <a:pPr indent="0" marL="0">
               <a:buNone/>
             </a:pPr>
             <a:r>
-              <a:rPr lang="en-US" sz="1800" b="1" dirty="0">
+              <a:rPr lang="en-US" sz="1100" dirty="0">
                 <a:solidFill>
-                  <a:srgbClr val="FFFFFF"/>
+                  <a:srgbClr val="1A1A2E"/>
                 </a:solidFill>
-                <a:latin typeface="Trebuchet MS" pitchFamily="34" charset="0"/>
-                <a:ea typeface="Trebuchet MS" pitchFamily="34" charset="-122"/>
-                <a:cs typeface="Trebuchet MS" pitchFamily="34" charset="-120"/>
+                <a:latin typeface="Calibri" pitchFamily="34" charset="0"/>
+                <a:ea typeface="Calibri" pitchFamily="34" charset="-122"/>
+                <a:cs typeface="Calibri" pitchFamily="34" charset="-120"/>
               </a:rPr>
-              <a:t>▶  Lancer le jeu</a:t>
-            </a:r>
-            <a:endParaRPr lang="en-US" sz="1800" dirty="0"/>
+              <a:t>Explorer : SELECT * FROM article LIMIT 10;</a:t>
+            </a:r>
+            <a:endParaRPr lang="en-US" sz="1100" dirty="0"/>
+          </a:p>
+        </p:txBody>
+      </p:sp>
+      <p:sp>
+        <p:nvSpPr>
+          <p:cNvPr id="10" name="Shape 8"/>
+          <p:cNvSpPr/>
+          <p:nvPr/>
+        </p:nvSpPr>
+        <p:spPr>
+          <a:xfrm>
+            <a:off x="457200" y="1874520"/>
+            <a:ext cx="8229600" cy="475488"/>
+          </a:xfrm>
+          <a:prstGeom prst="rect">
+            <a:avLst/>
+          </a:prstGeom>
+          <a:solidFill>
+            <a:srgbClr val="FFFFFF"/>
+          </a:solidFill>
+          <a:ln/>
+        </p:spPr>
+      </p:sp>
+      <p:sp>
+        <p:nvSpPr>
+          <p:cNvPr id="11" name="Shape 9"/>
+          <p:cNvSpPr/>
+          <p:nvPr/>
+        </p:nvSpPr>
+        <p:spPr>
+          <a:xfrm>
+            <a:off x="457200" y="1874520"/>
+            <a:ext cx="45720" cy="475488"/>
+          </a:xfrm>
+          <a:prstGeom prst="rect">
+            <a:avLst/>
+          </a:prstGeom>
+          <a:solidFill>
+            <a:srgbClr val="1565C0"/>
+          </a:solidFill>
+          <a:ln/>
+        </p:spPr>
+      </p:sp>
+      <p:sp>
+        <p:nvSpPr>
+          <p:cNvPr id="12" name="Text 10"/>
+          <p:cNvSpPr/>
+          <p:nvPr/>
+        </p:nvSpPr>
+        <p:spPr>
+          <a:xfrm>
+            <a:off x="640080" y="1874520"/>
+            <a:ext cx="7863840" cy="475488"/>
+          </a:xfrm>
+          <a:prstGeom prst="rect">
+            <a:avLst/>
+          </a:prstGeom>
+          <a:noFill/>
+          <a:ln/>
+        </p:spPr>
+        <p:txBody>
+          <a:bodyPr wrap="square" lIns="0" tIns="0" rIns="0" bIns="0" rtlCol="0" anchor="ctr"/>
+          <a:lstStyle/>
+          <a:p>
+            <a:pPr indent="0" marL="0">
+              <a:buNone/>
+            </a:pPr>
+            <a:r>
+              <a:rPr lang="en-US" sz="1100" dirty="0">
+                <a:solidFill>
+                  <a:srgbClr val="1A1A2E"/>
+                </a:solidFill>
+                <a:latin typeface="Calibri" pitchFamily="34" charset="0"/>
+                <a:ea typeface="Calibri" pitchFamily="34" charset="-122"/>
+                <a:cs typeface="Calibri" pitchFamily="34" charset="-120"/>
+              </a:rPr>
+              <a:t>Exercice : INSERT un article avec NOFAM inexistant → erreur FK</a:t>
+            </a:r>
+            <a:endParaRPr lang="en-US" sz="1100" dirty="0"/>
+          </a:p>
+        </p:txBody>
+      </p:sp>
+      <p:sp>
+        <p:nvSpPr>
+          <p:cNvPr id="13" name="Shape 11"/>
+          <p:cNvSpPr/>
+          <p:nvPr/>
+        </p:nvSpPr>
+        <p:spPr>
+          <a:xfrm>
+            <a:off x="457200" y="2377440"/>
+            <a:ext cx="8229600" cy="475488"/>
+          </a:xfrm>
+          <a:prstGeom prst="rect">
+            <a:avLst/>
+          </a:prstGeom>
+          <a:solidFill>
+            <a:srgbClr val="E3F2FD"/>
+          </a:solidFill>
+          <a:ln/>
+        </p:spPr>
+      </p:sp>
+      <p:sp>
+        <p:nvSpPr>
+          <p:cNvPr id="14" name="Shape 12"/>
+          <p:cNvSpPr/>
+          <p:nvPr/>
+        </p:nvSpPr>
+        <p:spPr>
+          <a:xfrm>
+            <a:off x="457200" y="2377440"/>
+            <a:ext cx="45720" cy="475488"/>
+          </a:xfrm>
+          <a:prstGeom prst="rect">
+            <a:avLst/>
+          </a:prstGeom>
+          <a:solidFill>
+            <a:srgbClr val="1565C0"/>
+          </a:solidFill>
+          <a:ln/>
+        </p:spPr>
+      </p:sp>
+      <p:sp>
+        <p:nvSpPr>
+          <p:cNvPr id="15" name="Text 13"/>
+          <p:cNvSpPr/>
+          <p:nvPr/>
+        </p:nvSpPr>
+        <p:spPr>
+          <a:xfrm>
+            <a:off x="640080" y="2377440"/>
+            <a:ext cx="7863840" cy="475488"/>
+          </a:xfrm>
+          <a:prstGeom prst="rect">
+            <a:avLst/>
+          </a:prstGeom>
+          <a:noFill/>
+          <a:ln/>
+        </p:spPr>
+        <p:txBody>
+          <a:bodyPr wrap="square" lIns="0" tIns="0" rIns="0" bIns="0" rtlCol="0" anchor="ctr"/>
+          <a:lstStyle/>
+          <a:p>
+            <a:pPr indent="0" marL="0">
+              <a:buNone/>
+            </a:pPr>
+            <a:r>
+              <a:rPr lang="en-US" sz="1100" dirty="0">
+                <a:solidFill>
+                  <a:srgbClr val="1A1A2E"/>
+                </a:solidFill>
+                <a:latin typeface="Calibri" pitchFamily="34" charset="0"/>
+                <a:ea typeface="Calibri" pitchFamily="34" charset="-122"/>
+                <a:cs typeface="Calibri" pitchFamily="34" charset="-120"/>
+              </a:rPr>
+              <a:t>Exercice : Trouver les articles en rupture (QTESTO &lt; QTEMIN)</a:t>
+            </a:r>
+            <a:endParaRPr lang="en-US" sz="1100" dirty="0"/>
+          </a:p>
+        </p:txBody>
+      </p:sp>
+      <p:sp>
+        <p:nvSpPr>
+          <p:cNvPr id="16" name="Shape 14"/>
+          <p:cNvSpPr/>
+          <p:nvPr/>
+        </p:nvSpPr>
+        <p:spPr>
+          <a:xfrm>
+            <a:off x="457200" y="2880360"/>
+            <a:ext cx="8229600" cy="475488"/>
+          </a:xfrm>
+          <a:prstGeom prst="rect">
+            <a:avLst/>
+          </a:prstGeom>
+          <a:solidFill>
+            <a:srgbClr val="FFFFFF"/>
+          </a:solidFill>
+          <a:ln/>
+        </p:spPr>
+      </p:sp>
+      <p:sp>
+        <p:nvSpPr>
+          <p:cNvPr id="17" name="Shape 15"/>
+          <p:cNvSpPr/>
+          <p:nvPr/>
+        </p:nvSpPr>
+        <p:spPr>
+          <a:xfrm>
+            <a:off x="457200" y="2880360"/>
+            <a:ext cx="45720" cy="475488"/>
+          </a:xfrm>
+          <a:prstGeom prst="rect">
+            <a:avLst/>
+          </a:prstGeom>
+          <a:solidFill>
+            <a:srgbClr val="1565C0"/>
+          </a:solidFill>
+          <a:ln/>
+        </p:spPr>
+      </p:sp>
+      <p:sp>
+        <p:nvSpPr>
+          <p:cNvPr id="18" name="Text 16"/>
+          <p:cNvSpPr/>
+          <p:nvPr/>
+        </p:nvSpPr>
+        <p:spPr>
+          <a:xfrm>
+            <a:off x="640080" y="2880360"/>
+            <a:ext cx="7863840" cy="475488"/>
+          </a:xfrm>
+          <a:prstGeom prst="rect">
+            <a:avLst/>
+          </a:prstGeom>
+          <a:noFill/>
+          <a:ln/>
+        </p:spPr>
+        <p:txBody>
+          <a:bodyPr wrap="square" lIns="0" tIns="0" rIns="0" bIns="0" rtlCol="0" anchor="ctr"/>
+          <a:lstStyle/>
+          <a:p>
+            <a:pPr indent="0" marL="0">
+              <a:buNone/>
+            </a:pPr>
+            <a:r>
+              <a:rPr lang="en-US" sz="1100" dirty="0">
+                <a:solidFill>
+                  <a:srgbClr val="1A1A2E"/>
+                </a:solidFill>
+                <a:latin typeface="Calibri" pitchFamily="34" charset="0"/>
+                <a:ea typeface="Calibri" pitchFamily="34" charset="-122"/>
+                <a:cs typeface="Calibri" pitchFamily="34" charset="-120"/>
+              </a:rPr>
+              <a:t>Exercice : Compter les clients par categorie (GROUP BY NOCAT)</a:t>
+            </a:r>
+            <a:endParaRPr lang="en-US" sz="1100" dirty="0"/>
+          </a:p>
+        </p:txBody>
+      </p:sp>
+      <p:sp>
+        <p:nvSpPr>
+          <p:cNvPr id="19" name="Shape 17"/>
+          <p:cNvSpPr/>
+          <p:nvPr/>
+        </p:nvSpPr>
+        <p:spPr>
+          <a:xfrm>
+            <a:off x="457200" y="3383280"/>
+            <a:ext cx="8229600" cy="475488"/>
+          </a:xfrm>
+          <a:prstGeom prst="rect">
+            <a:avLst/>
+          </a:prstGeom>
+          <a:solidFill>
+            <a:srgbClr val="E3F2FD"/>
+          </a:solidFill>
+          <a:ln/>
+        </p:spPr>
+      </p:sp>
+      <p:sp>
+        <p:nvSpPr>
+          <p:cNvPr id="20" name="Shape 18"/>
+          <p:cNvSpPr/>
+          <p:nvPr/>
+        </p:nvSpPr>
+        <p:spPr>
+          <a:xfrm>
+            <a:off x="457200" y="3383280"/>
+            <a:ext cx="45720" cy="475488"/>
+          </a:xfrm>
+          <a:prstGeom prst="rect">
+            <a:avLst/>
+          </a:prstGeom>
+          <a:solidFill>
+            <a:srgbClr val="1565C0"/>
+          </a:solidFill>
+          <a:ln/>
+        </p:spPr>
+      </p:sp>
+      <p:sp>
+        <p:nvSpPr>
+          <p:cNvPr id="21" name="Text 19"/>
+          <p:cNvSpPr/>
+          <p:nvPr/>
+        </p:nvSpPr>
+        <p:spPr>
+          <a:xfrm>
+            <a:off x="640080" y="3383280"/>
+            <a:ext cx="7863840" cy="475488"/>
+          </a:xfrm>
+          <a:prstGeom prst="rect">
+            <a:avLst/>
+          </a:prstGeom>
+          <a:noFill/>
+          <a:ln/>
+        </p:spPr>
+        <p:txBody>
+          <a:bodyPr wrap="square" lIns="0" tIns="0" rIns="0" bIns="0" rtlCol="0" anchor="ctr"/>
+          <a:lstStyle/>
+          <a:p>
+            <a:pPr indent="0" marL="0">
+              <a:buNone/>
+            </a:pPr>
+            <a:r>
+              <a:rPr lang="en-US" sz="1100" dirty="0">
+                <a:solidFill>
+                  <a:srgbClr val="1A1A2E"/>
+                </a:solidFill>
+                <a:latin typeface="Calibri" pitchFamily="34" charset="0"/>
+                <a:ea typeface="Calibri" pitchFamily="34" charset="-122"/>
+                <a:cs typeface="Calibri" pitchFamily="34" charset="-120"/>
+              </a:rPr>
+              <a:t>Les 29 exercices GESCOM progressifs sont disponibles en ligne</a:t>
+            </a:r>
+            <a:endParaRPr lang="en-US" sz="1100" dirty="0"/>
           </a:p>
         </p:txBody>
       </p:sp>
@@ -5402,14 +6513,34 @@
       </p:grpSpPr>
       <p:sp>
         <p:nvSpPr>
-          <p:cNvPr id="2" name="Text 0"/>
-          <p:cNvSpPr/>
-          <p:nvPr/>
-        </p:nvSpPr>
-        <p:spPr>
-          <a:xfrm>
-            <a:off x="457200" y="137160"/>
-            <a:ext cx="5486400" cy="411480"/>
+          <p:cNvPr id="2" name="Shape 0"/>
+          <p:cNvSpPr/>
+          <p:nvPr/>
+        </p:nvSpPr>
+        <p:spPr>
+          <a:xfrm>
+            <a:off x="0" y="0"/>
+            <a:ext cx="9144000" cy="54864"/>
+          </a:xfrm>
+          <a:prstGeom prst="rect">
+            <a:avLst/>
+          </a:prstGeom>
+          <a:solidFill>
+            <a:srgbClr val="1565C0"/>
+          </a:solidFill>
+          <a:ln/>
+        </p:spPr>
+      </p:sp>
+      <p:sp>
+        <p:nvSpPr>
+          <p:cNvPr id="3" name="Text 1"/>
+          <p:cNvSpPr/>
+          <p:nvPr/>
+        </p:nvSpPr>
+        <p:spPr>
+          <a:xfrm>
+            <a:off x="457200" y="182880"/>
+            <a:ext cx="8229600" cy="548640"/>
           </a:xfrm>
           <a:prstGeom prst="rect">
             <a:avLst/>
@@ -5425,7 +6556,7 @@
               <a:buNone/>
             </a:pPr>
             <a:r>
-              <a:rPr lang="en-US" sz="1800" b="1" dirty="0">
+              <a:rPr lang="en-US" sz="2200" b="1" dirty="0">
                 <a:solidFill>
                   <a:srgbClr val="0D47A1"/>
                 </a:solidFill>
@@ -5433,42 +6564,62 @@
                 <a:ea typeface="Trebuchet MS" pitchFamily="34" charset="-122"/>
                 <a:cs typeface="Trebuchet MS" pitchFamily="34" charset="-120"/>
               </a:rPr>
-              <a:t>📋 Mémo Module 10</a:t>
-            </a:r>
-            <a:endParaRPr lang="en-US" sz="1800" dirty="0"/>
-          </a:p>
-        </p:txBody>
-      </p:sp>
-      <p:sp>
-        <p:nvSpPr>
-          <p:cNvPr id="3" name="Shape 1"/>
-          <p:cNvSpPr/>
-          <p:nvPr/>
-        </p:nvSpPr>
-        <p:spPr>
-          <a:xfrm>
-            <a:off x="457200" y="548640"/>
-            <a:ext cx="8229600" cy="274320"/>
-          </a:xfrm>
-          <a:prstGeom prst="rect">
-            <a:avLst/>
-          </a:prstGeom>
-          <a:solidFill>
-            <a:srgbClr val="FFF3E0"/>
-          </a:solidFill>
-          <a:ln/>
-        </p:spPr>
-      </p:sp>
-      <p:sp>
-        <p:nvSpPr>
-          <p:cNvPr id="4" name="Text 2"/>
-          <p:cNvSpPr/>
-          <p:nvPr/>
-        </p:nvSpPr>
-        <p:spPr>
-          <a:xfrm>
-            <a:off x="640080" y="548640"/>
-            <a:ext cx="7772400" cy="274320"/>
+              <a:t>Exercice Module 10 — a faire en HeidiSQL</a:t>
+            </a:r>
+            <a:endParaRPr lang="en-US" sz="2200" dirty="0"/>
+          </a:p>
+        </p:txBody>
+      </p:sp>
+      <p:sp>
+        <p:nvSpPr>
+          <p:cNvPr id="4" name="Shape 2"/>
+          <p:cNvSpPr/>
+          <p:nvPr/>
+        </p:nvSpPr>
+        <p:spPr>
+          <a:xfrm>
+            <a:off x="457200" y="868680"/>
+            <a:ext cx="8229600" cy="475488"/>
+          </a:xfrm>
+          <a:prstGeom prst="rect">
+            <a:avLst/>
+          </a:prstGeom>
+          <a:solidFill>
+            <a:srgbClr val="FFFFFF"/>
+          </a:solidFill>
+          <a:ln/>
+        </p:spPr>
+      </p:sp>
+      <p:sp>
+        <p:nvSpPr>
+          <p:cNvPr id="5" name="Shape 3"/>
+          <p:cNvSpPr/>
+          <p:nvPr/>
+        </p:nvSpPr>
+        <p:spPr>
+          <a:xfrm>
+            <a:off x="457200" y="868680"/>
+            <a:ext cx="45720" cy="475488"/>
+          </a:xfrm>
+          <a:prstGeom prst="rect">
+            <a:avLst/>
+          </a:prstGeom>
+          <a:solidFill>
+            <a:srgbClr val="1565C0"/>
+          </a:solidFill>
+          <a:ln/>
+        </p:spPr>
+      </p:sp>
+      <p:sp>
+        <p:nvSpPr>
+          <p:cNvPr id="6" name="Text 4"/>
+          <p:cNvSpPr/>
+          <p:nvPr/>
+        </p:nvSpPr>
+        <p:spPr>
+          <a:xfrm>
+            <a:off x="640080" y="868680"/>
+            <a:ext cx="7863840" cy="475488"/>
           </a:xfrm>
           <a:prstGeom prst="rect">
             <a:avLst/>
@@ -5484,30 +6635,30 @@
               <a:buNone/>
             </a:pPr>
             <a:r>
-              <a:rPr lang="en-US" sz="900" b="1" dirty="0">
+              <a:rPr lang="en-US" sz="1100" dirty="0">
                 <a:solidFill>
-                  <a:srgbClr val="E65100"/>
+                  <a:srgbClr val="1A1A2E"/>
                 </a:solidFill>
                 <a:latin typeface="Calibri" pitchFamily="34" charset="0"/>
                 <a:ea typeface="Calibri" pitchFamily="34" charset="-122"/>
                 <a:cs typeface="Calibri" pitchFamily="34" charset="-120"/>
               </a:rPr>
-              <a:t>🔒 Déblocable après complétion</a:t>
-            </a:r>
-            <a:endParaRPr lang="en-US" sz="900" dirty="0"/>
-          </a:p>
-        </p:txBody>
-      </p:sp>
-      <p:sp>
-        <p:nvSpPr>
-          <p:cNvPr id="5" name="Shape 3"/>
-          <p:cNvSpPr/>
-          <p:nvPr/>
-        </p:nvSpPr>
-        <p:spPr>
-          <a:xfrm>
-            <a:off x="457200" y="960120"/>
-            <a:ext cx="2286000" cy="475488"/>
+              <a:t>1. Ajouter les contraintes manquantes avec ALTER TABLE</a:t>
+            </a:r>
+            <a:endParaRPr lang="en-US" sz="1100" dirty="0"/>
+          </a:p>
+        </p:txBody>
+      </p:sp>
+      <p:sp>
+        <p:nvSpPr>
+          <p:cNvPr id="7" name="Shape 5"/>
+          <p:cNvSpPr/>
+          <p:nvPr/>
+        </p:nvSpPr>
+        <p:spPr>
+          <a:xfrm>
+            <a:off x="457200" y="1371600"/>
+            <a:ext cx="8229600" cy="475488"/>
           </a:xfrm>
           <a:prstGeom prst="rect">
             <a:avLst/>
@@ -5520,14 +6671,34 @@
       </p:sp>
       <p:sp>
         <p:nvSpPr>
-          <p:cNvPr id="6" name="Text 4"/>
-          <p:cNvSpPr/>
-          <p:nvPr/>
-        </p:nvSpPr>
-        <p:spPr>
-          <a:xfrm>
-            <a:off x="548640" y="960120"/>
-            <a:ext cx="2103120" cy="475488"/>
+          <p:cNvPr id="8" name="Shape 6"/>
+          <p:cNvSpPr/>
+          <p:nvPr/>
+        </p:nvSpPr>
+        <p:spPr>
+          <a:xfrm>
+            <a:off x="457200" y="1371600"/>
+            <a:ext cx="45720" cy="475488"/>
+          </a:xfrm>
+          <a:prstGeom prst="rect">
+            <a:avLst/>
+          </a:prstGeom>
+          <a:solidFill>
+            <a:srgbClr val="1565C0"/>
+          </a:solidFill>
+          <a:ln/>
+        </p:spPr>
+      </p:sp>
+      <p:sp>
+        <p:nvSpPr>
+          <p:cNvPr id="9" name="Text 7"/>
+          <p:cNvSpPr/>
+          <p:nvPr/>
+        </p:nvSpPr>
+        <p:spPr>
+          <a:xfrm>
+            <a:off x="640080" y="1371600"/>
+            <a:ext cx="7863840" cy="475488"/>
           </a:xfrm>
           <a:prstGeom prst="rect">
             <a:avLst/>
@@ -5543,50 +6714,496 @@
               <a:buNone/>
             </a:pPr>
             <a:r>
-              <a:rPr lang="en-US" sz="900" b="1" dirty="0">
+              <a:rPr lang="en-US" sz="1100" dirty="0">
                 <a:solidFill>
-                  <a:srgbClr val="0D47A1"/>
+                  <a:srgbClr val="1A1A2E"/>
+                </a:solidFill>
+                <a:latin typeface="Calibri" pitchFamily="34" charset="0"/>
+                <a:ea typeface="Calibri" pitchFamily="34" charset="-122"/>
+                <a:cs typeface="Calibri" pitchFamily="34" charset="-120"/>
+              </a:rPr>
+              <a:t>2. Tester NOT NULL : INSERT artiste avec nom = NULL → erreur ?</a:t>
+            </a:r>
+            <a:endParaRPr lang="en-US" sz="1100" dirty="0"/>
+          </a:p>
+        </p:txBody>
+      </p:sp>
+      <p:sp>
+        <p:nvSpPr>
+          <p:cNvPr id="10" name="Shape 8"/>
+          <p:cNvSpPr/>
+          <p:nvPr/>
+        </p:nvSpPr>
+        <p:spPr>
+          <a:xfrm>
+            <a:off x="457200" y="1874520"/>
+            <a:ext cx="8229600" cy="475488"/>
+          </a:xfrm>
+          <a:prstGeom prst="rect">
+            <a:avLst/>
+          </a:prstGeom>
+          <a:solidFill>
+            <a:srgbClr val="FFFFFF"/>
+          </a:solidFill>
+          <a:ln/>
+        </p:spPr>
+      </p:sp>
+      <p:sp>
+        <p:nvSpPr>
+          <p:cNvPr id="11" name="Shape 9"/>
+          <p:cNvSpPr/>
+          <p:nvPr/>
+        </p:nvSpPr>
+        <p:spPr>
+          <a:xfrm>
+            <a:off x="457200" y="1874520"/>
+            <a:ext cx="45720" cy="475488"/>
+          </a:xfrm>
+          <a:prstGeom prst="rect">
+            <a:avLst/>
+          </a:prstGeom>
+          <a:solidFill>
+            <a:srgbClr val="1565C0"/>
+          </a:solidFill>
+          <a:ln/>
+        </p:spPr>
+      </p:sp>
+      <p:sp>
+        <p:nvSpPr>
+          <p:cNvPr id="12" name="Text 10"/>
+          <p:cNvSpPr/>
+          <p:nvPr/>
+        </p:nvSpPr>
+        <p:spPr>
+          <a:xfrm>
+            <a:off x="640080" y="1874520"/>
+            <a:ext cx="7863840" cy="475488"/>
+          </a:xfrm>
+          <a:prstGeom prst="rect">
+            <a:avLst/>
+          </a:prstGeom>
+          <a:noFill/>
+          <a:ln/>
+        </p:spPr>
+        <p:txBody>
+          <a:bodyPr wrap="square" lIns="0" tIns="0" rIns="0" bIns="0" rtlCol="0" anchor="ctr"/>
+          <a:lstStyle/>
+          <a:p>
+            <a:pPr indent="0" marL="0">
+              <a:buNone/>
+            </a:pPr>
+            <a:r>
+              <a:rPr lang="en-US" sz="1100" dirty="0">
+                <a:solidFill>
+                  <a:srgbClr val="1A1A2E"/>
+                </a:solidFill>
+                <a:latin typeface="Calibri" pitchFamily="34" charset="0"/>
+                <a:ea typeface="Calibri" pitchFamily="34" charset="-122"/>
+                <a:cs typeface="Calibri" pitchFamily="34" charset="-120"/>
+              </a:rPr>
+              <a:t>3. Tester UNIQUE : INSERT artiste avec email existant → erreur ?</a:t>
+            </a:r>
+            <a:endParaRPr lang="en-US" sz="1100" dirty="0"/>
+          </a:p>
+        </p:txBody>
+      </p:sp>
+      <p:sp>
+        <p:nvSpPr>
+          <p:cNvPr id="13" name="Shape 11"/>
+          <p:cNvSpPr/>
+          <p:nvPr/>
+        </p:nvSpPr>
+        <p:spPr>
+          <a:xfrm>
+            <a:off x="457200" y="2377440"/>
+            <a:ext cx="8229600" cy="475488"/>
+          </a:xfrm>
+          <a:prstGeom prst="rect">
+            <a:avLst/>
+          </a:prstGeom>
+          <a:solidFill>
+            <a:srgbClr val="E3F2FD"/>
+          </a:solidFill>
+          <a:ln/>
+        </p:spPr>
+      </p:sp>
+      <p:sp>
+        <p:nvSpPr>
+          <p:cNvPr id="14" name="Shape 12"/>
+          <p:cNvSpPr/>
+          <p:nvPr/>
+        </p:nvSpPr>
+        <p:spPr>
+          <a:xfrm>
+            <a:off x="457200" y="2377440"/>
+            <a:ext cx="45720" cy="475488"/>
+          </a:xfrm>
+          <a:prstGeom prst="rect">
+            <a:avLst/>
+          </a:prstGeom>
+          <a:solidFill>
+            <a:srgbClr val="1565C0"/>
+          </a:solidFill>
+          <a:ln/>
+        </p:spPr>
+      </p:sp>
+      <p:sp>
+        <p:nvSpPr>
+          <p:cNvPr id="15" name="Text 13"/>
+          <p:cNvSpPr/>
+          <p:nvPr/>
+        </p:nvSpPr>
+        <p:spPr>
+          <a:xfrm>
+            <a:off x="640080" y="2377440"/>
+            <a:ext cx="7863840" cy="475488"/>
+          </a:xfrm>
+          <a:prstGeom prst="rect">
+            <a:avLst/>
+          </a:prstGeom>
+          <a:noFill/>
+          <a:ln/>
+        </p:spPr>
+        <p:txBody>
+          <a:bodyPr wrap="square" lIns="0" tIns="0" rIns="0" bIns="0" rtlCol="0" anchor="ctr"/>
+          <a:lstStyle/>
+          <a:p>
+            <a:pPr indent="0" marL="0">
+              <a:buNone/>
+            </a:pPr>
+            <a:r>
+              <a:rPr lang="en-US" sz="1100" dirty="0">
+                <a:solidFill>
+                  <a:srgbClr val="1A1A2E"/>
+                </a:solidFill>
+                <a:latin typeface="Calibri" pitchFamily="34" charset="0"/>
+                <a:ea typeface="Calibri" pitchFamily="34" charset="-122"/>
+                <a:cs typeface="Calibri" pitchFamily="34" charset="-120"/>
+              </a:rPr>
+              <a:t>4. Tester FK : INSERT album avec id_artiste = 999 → erreur ?</a:t>
+            </a:r>
+            <a:endParaRPr lang="en-US" sz="1100" dirty="0"/>
+          </a:p>
+        </p:txBody>
+      </p:sp>
+      <p:sp>
+        <p:nvSpPr>
+          <p:cNvPr id="16" name="Shape 14"/>
+          <p:cNvSpPr/>
+          <p:nvPr/>
+        </p:nvSpPr>
+        <p:spPr>
+          <a:xfrm>
+            <a:off x="457200" y="2880360"/>
+            <a:ext cx="8229600" cy="475488"/>
+          </a:xfrm>
+          <a:prstGeom prst="rect">
+            <a:avLst/>
+          </a:prstGeom>
+          <a:solidFill>
+            <a:srgbClr val="FFFFFF"/>
+          </a:solidFill>
+          <a:ln/>
+        </p:spPr>
+      </p:sp>
+      <p:sp>
+        <p:nvSpPr>
+          <p:cNvPr id="17" name="Shape 15"/>
+          <p:cNvSpPr/>
+          <p:nvPr/>
+        </p:nvSpPr>
+        <p:spPr>
+          <a:xfrm>
+            <a:off x="457200" y="2880360"/>
+            <a:ext cx="45720" cy="475488"/>
+          </a:xfrm>
+          <a:prstGeom prst="rect">
+            <a:avLst/>
+          </a:prstGeom>
+          <a:solidFill>
+            <a:srgbClr val="1565C0"/>
+          </a:solidFill>
+          <a:ln/>
+        </p:spPr>
+      </p:sp>
+      <p:sp>
+        <p:nvSpPr>
+          <p:cNvPr id="18" name="Text 16"/>
+          <p:cNvSpPr/>
+          <p:nvPr/>
+        </p:nvSpPr>
+        <p:spPr>
+          <a:xfrm>
+            <a:off x="640080" y="2880360"/>
+            <a:ext cx="7863840" cy="475488"/>
+          </a:xfrm>
+          <a:prstGeom prst="rect">
+            <a:avLst/>
+          </a:prstGeom>
+          <a:noFill/>
+          <a:ln/>
+        </p:spPr>
+        <p:txBody>
+          <a:bodyPr wrap="square" lIns="0" tIns="0" rIns="0" bIns="0" rtlCol="0" anchor="ctr"/>
+          <a:lstStyle/>
+          <a:p>
+            <a:pPr indent="0" marL="0">
+              <a:buNone/>
+            </a:pPr>
+            <a:r>
+              <a:rPr lang="en-US" sz="1100" dirty="0">
+                <a:solidFill>
+                  <a:srgbClr val="1A1A2E"/>
+                </a:solidFill>
+                <a:latin typeface="Calibri" pitchFamily="34" charset="0"/>
+                <a:ea typeface="Calibri" pitchFamily="34" charset="-122"/>
+                <a:cs typeface="Calibri" pitchFamily="34" charset="-120"/>
+              </a:rPr>
+              <a:t>5. Tester CHECK : INSERT album avec prix = -5 → erreur ?</a:t>
+            </a:r>
+            <a:endParaRPr lang="en-US" sz="1100" dirty="0"/>
+          </a:p>
+        </p:txBody>
+      </p:sp>
+      <p:sp>
+        <p:nvSpPr>
+          <p:cNvPr id="19" name="Shape 17"/>
+          <p:cNvSpPr/>
+          <p:nvPr/>
+        </p:nvSpPr>
+        <p:spPr>
+          <a:xfrm>
+            <a:off x="457200" y="3383280"/>
+            <a:ext cx="8229600" cy="475488"/>
+          </a:xfrm>
+          <a:prstGeom prst="rect">
+            <a:avLst/>
+          </a:prstGeom>
+          <a:solidFill>
+            <a:srgbClr val="E3F2FD"/>
+          </a:solidFill>
+          <a:ln/>
+        </p:spPr>
+      </p:sp>
+      <p:sp>
+        <p:nvSpPr>
+          <p:cNvPr id="20" name="Shape 18"/>
+          <p:cNvSpPr/>
+          <p:nvPr/>
+        </p:nvSpPr>
+        <p:spPr>
+          <a:xfrm>
+            <a:off x="457200" y="3383280"/>
+            <a:ext cx="45720" cy="475488"/>
+          </a:xfrm>
+          <a:prstGeom prst="rect">
+            <a:avLst/>
+          </a:prstGeom>
+          <a:solidFill>
+            <a:srgbClr val="1565C0"/>
+          </a:solidFill>
+          <a:ln/>
+        </p:spPr>
+      </p:sp>
+      <p:sp>
+        <p:nvSpPr>
+          <p:cNvPr id="21" name="Text 19"/>
+          <p:cNvSpPr/>
+          <p:nvPr/>
+        </p:nvSpPr>
+        <p:spPr>
+          <a:xfrm>
+            <a:off x="640080" y="3383280"/>
+            <a:ext cx="7863840" cy="475488"/>
+          </a:xfrm>
+          <a:prstGeom prst="rect">
+            <a:avLst/>
+          </a:prstGeom>
+          <a:noFill/>
+          <a:ln/>
+        </p:spPr>
+        <p:txBody>
+          <a:bodyPr wrap="square" lIns="0" tIns="0" rIns="0" bIns="0" rtlCol="0" anchor="ctr"/>
+          <a:lstStyle/>
+          <a:p>
+            <a:pPr indent="0" marL="0">
+              <a:buNone/>
+            </a:pPr>
+            <a:r>
+              <a:rPr lang="en-US" sz="1100" dirty="0">
+                <a:solidFill>
+                  <a:srgbClr val="1A1A2E"/>
+                </a:solidFill>
+                <a:latin typeface="Calibri" pitchFamily="34" charset="0"/>
+                <a:ea typeface="Calibri" pitchFamily="34" charset="-122"/>
+                <a:cs typeface="Calibri" pitchFamily="34" charset="-120"/>
+              </a:rPr>
+              <a:t>6. Tester CASCADE : DELETE genre → genre_artiste supprime ?</a:t>
+            </a:r>
+            <a:endParaRPr lang="en-US" sz="1100" dirty="0"/>
+          </a:p>
+        </p:txBody>
+      </p:sp>
+      <p:sp>
+        <p:nvSpPr>
+          <p:cNvPr id="22" name="Shape 20"/>
+          <p:cNvSpPr/>
+          <p:nvPr/>
+        </p:nvSpPr>
+        <p:spPr>
+          <a:xfrm>
+            <a:off x="457200" y="3886200"/>
+            <a:ext cx="8229600" cy="475488"/>
+          </a:xfrm>
+          <a:prstGeom prst="rect">
+            <a:avLst/>
+          </a:prstGeom>
+          <a:solidFill>
+            <a:srgbClr val="FFFFFF"/>
+          </a:solidFill>
+          <a:ln/>
+        </p:spPr>
+      </p:sp>
+      <p:sp>
+        <p:nvSpPr>
+          <p:cNvPr id="23" name="Shape 21"/>
+          <p:cNvSpPr/>
+          <p:nvPr/>
+        </p:nvSpPr>
+        <p:spPr>
+          <a:xfrm>
+            <a:off x="457200" y="3886200"/>
+            <a:ext cx="45720" cy="475488"/>
+          </a:xfrm>
+          <a:prstGeom prst="rect">
+            <a:avLst/>
+          </a:prstGeom>
+          <a:solidFill>
+            <a:srgbClr val="1565C0"/>
+          </a:solidFill>
+          <a:ln/>
+        </p:spPr>
+      </p:sp>
+      <p:sp>
+        <p:nvSpPr>
+          <p:cNvPr id="24" name="Text 22"/>
+          <p:cNvSpPr/>
+          <p:nvPr/>
+        </p:nvSpPr>
+        <p:spPr>
+          <a:xfrm>
+            <a:off x="640080" y="3886200"/>
+            <a:ext cx="7863840" cy="475488"/>
+          </a:xfrm>
+          <a:prstGeom prst="rect">
+            <a:avLst/>
+          </a:prstGeom>
+          <a:noFill/>
+          <a:ln/>
+        </p:spPr>
+        <p:txBody>
+          <a:bodyPr wrap="square" lIns="0" tIns="0" rIns="0" bIns="0" rtlCol="0" anchor="ctr"/>
+          <a:lstStyle/>
+          <a:p>
+            <a:pPr indent="0" marL="0">
+              <a:buNone/>
+            </a:pPr>
+            <a:r>
+              <a:rPr lang="en-US" sz="1100" dirty="0">
+                <a:solidFill>
+                  <a:srgbClr val="1A1A2E"/>
+                </a:solidFill>
+                <a:latin typeface="Calibri" pitchFamily="34" charset="0"/>
+                <a:ea typeface="Calibri" pitchFamily="34" charset="-122"/>
+                <a:cs typeface="Calibri" pitchFamily="34" charset="-120"/>
+              </a:rPr>
+              <a:t>DEFI : creer un guide des erreurs MySQL (erreur → cause → solution)</a:t>
+            </a:r>
+            <a:endParaRPr lang="en-US" sz="1100" dirty="0"/>
+          </a:p>
+        </p:txBody>
+      </p:sp>
+    </p:spTree>
+  </p:cSld>
+  <p:clrMapOvr>
+    <a:masterClrMapping/>
+  </p:clrMapOvr>
+</p:sld>
+</file>
+
+<file path=ppt/slides/slide9.xml><?xml version="1.0" encoding="utf-8"?>
+<p:sld xmlns:a="http://schemas.openxmlformats.org/drawingml/2006/main" xmlns:r="http://schemas.openxmlformats.org/officeDocument/2006/relationships" xmlns:p="http://schemas.openxmlformats.org/presentationml/2006/main">
+  <p:cSld name="Slide 9">
+    <p:bg>
+      <p:bgPr>
+        <a:solidFill>
+          <a:srgbClr val="0D47A1"/>
+        </a:solidFill>
+      </p:bgPr>
+    </p:bg>
+    <p:spTree>
+      <p:nvGrpSpPr>
+        <p:cNvPr id="1" name=""/>
+        <p:cNvGrpSpPr/>
+        <p:nvPr/>
+      </p:nvGrpSpPr>
+      <p:grpSpPr>
+        <a:xfrm>
+          <a:off x="0" y="0"/>
+          <a:ext cx="0" cy="0"/>
+          <a:chOff x="0" y="0"/>
+          <a:chExt cx="0" cy="0"/>
+        </a:xfrm>
+      </p:grpSpPr>
+      <p:sp>
+        <p:nvSpPr>
+          <p:cNvPr id="2" name="Text 0"/>
+          <p:cNvSpPr/>
+          <p:nvPr/>
+        </p:nvSpPr>
+        <p:spPr>
+          <a:xfrm>
+            <a:off x="457200" y="1828800"/>
+            <a:ext cx="8229600" cy="548640"/>
+          </a:xfrm>
+          <a:prstGeom prst="rect">
+            <a:avLst/>
+          </a:prstGeom>
+          <a:noFill/>
+          <a:ln/>
+        </p:spPr>
+        <p:txBody>
+          <a:bodyPr wrap="square" lIns="0" tIns="0" rIns="0" bIns="0" rtlCol="0" anchor="ctr"/>
+          <a:lstStyle/>
+          <a:p>
+            <a:pPr algn="ctr" indent="0" marL="0">
+              <a:buNone/>
+            </a:pPr>
+            <a:r>
+              <a:rPr lang="en-US" sz="2400" b="1" dirty="0">
+                <a:solidFill>
+                  <a:srgbClr val="FFFFFF"/>
                 </a:solidFill>
                 <a:latin typeface="Trebuchet MS" pitchFamily="34" charset="0"/>
                 <a:ea typeface="Trebuchet MS" pitchFamily="34" charset="-122"/>
                 <a:cs typeface="Trebuchet MS" pitchFamily="34" charset="-120"/>
               </a:rPr>
-              <a:t>NOT NULL</a:t>
-            </a:r>
-            <a:endParaRPr lang="en-US" sz="900" dirty="0"/>
-          </a:p>
-        </p:txBody>
-      </p:sp>
-      <p:sp>
-        <p:nvSpPr>
-          <p:cNvPr id="7" name="Shape 5"/>
-          <p:cNvSpPr/>
-          <p:nvPr/>
-        </p:nvSpPr>
-        <p:spPr>
-          <a:xfrm>
-            <a:off x="2743200" y="960120"/>
-            <a:ext cx="5943600" cy="475488"/>
-          </a:xfrm>
-          <a:prstGeom prst="rect">
-            <a:avLst/>
-          </a:prstGeom>
-          <a:solidFill>
-            <a:srgbClr val="E3F2FD"/>
-          </a:solidFill>
-          <a:ln/>
-        </p:spPr>
-      </p:sp>
-      <p:sp>
-        <p:nvSpPr>
-          <p:cNvPr id="8" name="Text 6"/>
-          <p:cNvSpPr/>
-          <p:nvPr/>
-        </p:nvSpPr>
-        <p:spPr>
-          <a:xfrm>
-            <a:off x="2834640" y="960120"/>
-            <a:ext cx="5760720" cy="475488"/>
+              <a:t>Mini-jeu : La Chaine de Contraintes</a:t>
+            </a:r>
+            <a:endParaRPr lang="en-US" sz="2400" dirty="0"/>
+          </a:p>
+        </p:txBody>
+      </p:sp>
+      <p:sp>
+        <p:nvSpPr>
+          <p:cNvPr id="3" name="Text 1"/>
+          <p:cNvSpPr/>
+          <p:nvPr/>
+        </p:nvSpPr>
+        <p:spPr>
+          <a:xfrm>
+            <a:off x="1371600" y="2468880"/>
+            <a:ext cx="6400800" cy="640080"/>
           </a:xfrm>
           <a:prstGeom prst="rect">
             <a:avLst/>
@@ -5598,729 +7215,21 @@
           <a:bodyPr wrap="square" lIns="0" tIns="0" rIns="0" bIns="0" rtlCol="0" anchor="ctr"/>
           <a:lstStyle/>
           <a:p>
-            <a:pPr indent="0" marL="0">
+            <a:pPr algn="ctr" indent="0" marL="0">
               <a:buNone/>
             </a:pPr>
             <a:r>
-              <a:rPr lang="en-US" sz="900" dirty="0">
+              <a:rPr lang="en-US" sz="1300" dirty="0">
                 <a:solidFill>
-                  <a:srgbClr val="333333"/>
+                  <a:srgbClr val="CCCCCC"/>
                 </a:solidFill>
                 <a:latin typeface="Calibri" pitchFamily="34" charset="0"/>
                 <a:ea typeface="Calibri" pitchFamily="34" charset="-122"/>
                 <a:cs typeface="Calibri" pitchFamily="34" charset="-120"/>
               </a:rPr>
-              <a:t>Valeur obligatoire — erreur 1048</a:t>
-            </a:r>
-            <a:endParaRPr lang="en-US" sz="900" dirty="0"/>
-          </a:p>
-        </p:txBody>
-      </p:sp>
-      <p:sp>
-        <p:nvSpPr>
-          <p:cNvPr id="9" name="Shape 7"/>
-          <p:cNvSpPr/>
-          <p:nvPr/>
-        </p:nvSpPr>
-        <p:spPr>
-          <a:xfrm>
-            <a:off x="457200" y="1463040"/>
-            <a:ext cx="2286000" cy="475488"/>
-          </a:xfrm>
-          <a:prstGeom prst="rect">
-            <a:avLst/>
-          </a:prstGeom>
-          <a:solidFill>
-            <a:srgbClr val="F0F0F0"/>
-          </a:solidFill>
-          <a:ln/>
-        </p:spPr>
-      </p:sp>
-      <p:sp>
-        <p:nvSpPr>
-          <p:cNvPr id="10" name="Text 8"/>
-          <p:cNvSpPr/>
-          <p:nvPr/>
-        </p:nvSpPr>
-        <p:spPr>
-          <a:xfrm>
-            <a:off x="548640" y="1463040"/>
-            <a:ext cx="2103120" cy="475488"/>
-          </a:xfrm>
-          <a:prstGeom prst="rect">
-            <a:avLst/>
-          </a:prstGeom>
-          <a:noFill/>
-          <a:ln/>
-        </p:spPr>
-        <p:txBody>
-          <a:bodyPr wrap="square" lIns="0" tIns="0" rIns="0" bIns="0" rtlCol="0" anchor="ctr"/>
-          <a:lstStyle/>
-          <a:p>
-            <a:pPr indent="0" marL="0">
-              <a:buNone/>
-            </a:pPr>
-            <a:r>
-              <a:rPr lang="en-US" sz="900" b="1" dirty="0">
-                <a:solidFill>
-                  <a:srgbClr val="0D47A1"/>
-                </a:solidFill>
-                <a:latin typeface="Trebuchet MS" pitchFamily="34" charset="0"/>
-                <a:ea typeface="Trebuchet MS" pitchFamily="34" charset="-122"/>
-                <a:cs typeface="Trebuchet MS" pitchFamily="34" charset="-120"/>
-              </a:rPr>
-              <a:t>UNIQUE</a:t>
-            </a:r>
-            <a:endParaRPr lang="en-US" sz="900" dirty="0"/>
-          </a:p>
-        </p:txBody>
-      </p:sp>
-      <p:sp>
-        <p:nvSpPr>
-          <p:cNvPr id="11" name="Shape 9"/>
-          <p:cNvSpPr/>
-          <p:nvPr/>
-        </p:nvSpPr>
-        <p:spPr>
-          <a:xfrm>
-            <a:off x="2743200" y="1463040"/>
-            <a:ext cx="5943600" cy="475488"/>
-          </a:xfrm>
-          <a:prstGeom prst="rect">
-            <a:avLst/>
-          </a:prstGeom>
-          <a:solidFill>
-            <a:srgbClr val="F0F0F0"/>
-          </a:solidFill>
-          <a:ln/>
-        </p:spPr>
-      </p:sp>
-      <p:sp>
-        <p:nvSpPr>
-          <p:cNvPr id="12" name="Text 10"/>
-          <p:cNvSpPr/>
-          <p:nvPr/>
-        </p:nvSpPr>
-        <p:spPr>
-          <a:xfrm>
-            <a:off x="2834640" y="1463040"/>
-            <a:ext cx="5760720" cy="475488"/>
-          </a:xfrm>
-          <a:prstGeom prst="rect">
-            <a:avLst/>
-          </a:prstGeom>
-          <a:noFill/>
-          <a:ln/>
-        </p:spPr>
-        <p:txBody>
-          <a:bodyPr wrap="square" lIns="0" tIns="0" rIns="0" bIns="0" rtlCol="0" anchor="ctr"/>
-          <a:lstStyle/>
-          <a:p>
-            <a:pPr indent="0" marL="0">
-              <a:buNone/>
-            </a:pPr>
-            <a:r>
-              <a:rPr lang="en-US" sz="900" dirty="0">
-                <a:solidFill>
-                  <a:srgbClr val="333333"/>
-                </a:solidFill>
-                <a:latin typeface="Calibri" pitchFamily="34" charset="0"/>
-                <a:ea typeface="Calibri" pitchFamily="34" charset="-122"/>
-                <a:cs typeface="Calibri" pitchFamily="34" charset="-120"/>
-              </a:rPr>
-              <a:t>Pas de doublon — erreur 1062</a:t>
-            </a:r>
-            <a:endParaRPr lang="en-US" sz="900" dirty="0"/>
-          </a:p>
-        </p:txBody>
-      </p:sp>
-      <p:sp>
-        <p:nvSpPr>
-          <p:cNvPr id="13" name="Shape 11"/>
-          <p:cNvSpPr/>
-          <p:nvPr/>
-        </p:nvSpPr>
-        <p:spPr>
-          <a:xfrm>
-            <a:off x="457200" y="1965960"/>
-            <a:ext cx="2286000" cy="475488"/>
-          </a:xfrm>
-          <a:prstGeom prst="rect">
-            <a:avLst/>
-          </a:prstGeom>
-          <a:solidFill>
-            <a:srgbClr val="E3F2FD"/>
-          </a:solidFill>
-          <a:ln/>
-        </p:spPr>
-      </p:sp>
-      <p:sp>
-        <p:nvSpPr>
-          <p:cNvPr id="14" name="Text 12"/>
-          <p:cNvSpPr/>
-          <p:nvPr/>
-        </p:nvSpPr>
-        <p:spPr>
-          <a:xfrm>
-            <a:off x="548640" y="1965960"/>
-            <a:ext cx="2103120" cy="475488"/>
-          </a:xfrm>
-          <a:prstGeom prst="rect">
-            <a:avLst/>
-          </a:prstGeom>
-          <a:noFill/>
-          <a:ln/>
-        </p:spPr>
-        <p:txBody>
-          <a:bodyPr wrap="square" lIns="0" tIns="0" rIns="0" bIns="0" rtlCol="0" anchor="ctr"/>
-          <a:lstStyle/>
-          <a:p>
-            <a:pPr indent="0" marL="0">
-              <a:buNone/>
-            </a:pPr>
-            <a:r>
-              <a:rPr lang="en-US" sz="900" b="1" dirty="0">
-                <a:solidFill>
-                  <a:srgbClr val="0D47A1"/>
-                </a:solidFill>
-                <a:latin typeface="Trebuchet MS" pitchFamily="34" charset="0"/>
-                <a:ea typeface="Trebuchet MS" pitchFamily="34" charset="-122"/>
-                <a:cs typeface="Trebuchet MS" pitchFamily="34" charset="-120"/>
-              </a:rPr>
-              <a:t>CHECK</a:t>
-            </a:r>
-            <a:endParaRPr lang="en-US" sz="900" dirty="0"/>
-          </a:p>
-        </p:txBody>
-      </p:sp>
-      <p:sp>
-        <p:nvSpPr>
-          <p:cNvPr id="15" name="Shape 13"/>
-          <p:cNvSpPr/>
-          <p:nvPr/>
-        </p:nvSpPr>
-        <p:spPr>
-          <a:xfrm>
-            <a:off x="2743200" y="1965960"/>
-            <a:ext cx="5943600" cy="475488"/>
-          </a:xfrm>
-          <a:prstGeom prst="rect">
-            <a:avLst/>
-          </a:prstGeom>
-          <a:solidFill>
-            <a:srgbClr val="E3F2FD"/>
-          </a:solidFill>
-          <a:ln/>
-        </p:spPr>
-      </p:sp>
-      <p:sp>
-        <p:nvSpPr>
-          <p:cNvPr id="16" name="Text 14"/>
-          <p:cNvSpPr/>
-          <p:nvPr/>
-        </p:nvSpPr>
-        <p:spPr>
-          <a:xfrm>
-            <a:off x="2834640" y="1965960"/>
-            <a:ext cx="5760720" cy="475488"/>
-          </a:xfrm>
-          <a:prstGeom prst="rect">
-            <a:avLst/>
-          </a:prstGeom>
-          <a:noFill/>
-          <a:ln/>
-        </p:spPr>
-        <p:txBody>
-          <a:bodyPr wrap="square" lIns="0" tIns="0" rIns="0" bIns="0" rtlCol="0" anchor="ctr"/>
-          <a:lstStyle/>
-          <a:p>
-            <a:pPr indent="0" marL="0">
-              <a:buNone/>
-            </a:pPr>
-            <a:r>
-              <a:rPr lang="en-US" sz="900" dirty="0">
-                <a:solidFill>
-                  <a:srgbClr val="333333"/>
-                </a:solidFill>
-                <a:latin typeface="Calibri" pitchFamily="34" charset="0"/>
-                <a:ea typeface="Calibri" pitchFamily="34" charset="-122"/>
-                <a:cs typeface="Calibri" pitchFamily="34" charset="-120"/>
-              </a:rPr>
-              <a:t>Condition (prix&gt;=0) — erreur 3819 (MySQL 8.0.16+)</a:t>
-            </a:r>
-            <a:endParaRPr lang="en-US" sz="900" dirty="0"/>
-          </a:p>
-        </p:txBody>
-      </p:sp>
-      <p:sp>
-        <p:nvSpPr>
-          <p:cNvPr id="17" name="Shape 15"/>
-          <p:cNvSpPr/>
-          <p:nvPr/>
-        </p:nvSpPr>
-        <p:spPr>
-          <a:xfrm>
-            <a:off x="457200" y="2468880"/>
-            <a:ext cx="2286000" cy="475488"/>
-          </a:xfrm>
-          <a:prstGeom prst="rect">
-            <a:avLst/>
-          </a:prstGeom>
-          <a:solidFill>
-            <a:srgbClr val="F0F0F0"/>
-          </a:solidFill>
-          <a:ln/>
-        </p:spPr>
-      </p:sp>
-      <p:sp>
-        <p:nvSpPr>
-          <p:cNvPr id="18" name="Text 16"/>
-          <p:cNvSpPr/>
-          <p:nvPr/>
-        </p:nvSpPr>
-        <p:spPr>
-          <a:xfrm>
-            <a:off x="548640" y="2468880"/>
-            <a:ext cx="2103120" cy="475488"/>
-          </a:xfrm>
-          <a:prstGeom prst="rect">
-            <a:avLst/>
-          </a:prstGeom>
-          <a:noFill/>
-          <a:ln/>
-        </p:spPr>
-        <p:txBody>
-          <a:bodyPr wrap="square" lIns="0" tIns="0" rIns="0" bIns="0" rtlCol="0" anchor="ctr"/>
-          <a:lstStyle/>
-          <a:p>
-            <a:pPr indent="0" marL="0">
-              <a:buNone/>
-            </a:pPr>
-            <a:r>
-              <a:rPr lang="en-US" sz="900" b="1" dirty="0">
-                <a:solidFill>
-                  <a:srgbClr val="0D47A1"/>
-                </a:solidFill>
-                <a:latin typeface="Trebuchet MS" pitchFamily="34" charset="0"/>
-                <a:ea typeface="Trebuchet MS" pitchFamily="34" charset="-122"/>
-                <a:cs typeface="Trebuchet MS" pitchFamily="34" charset="-120"/>
-              </a:rPr>
-              <a:t>FK CASCADE</a:t>
-            </a:r>
-            <a:endParaRPr lang="en-US" sz="900" dirty="0"/>
-          </a:p>
-        </p:txBody>
-      </p:sp>
-      <p:sp>
-        <p:nvSpPr>
-          <p:cNvPr id="19" name="Shape 17"/>
-          <p:cNvSpPr/>
-          <p:nvPr/>
-        </p:nvSpPr>
-        <p:spPr>
-          <a:xfrm>
-            <a:off x="2743200" y="2468880"/>
-            <a:ext cx="5943600" cy="475488"/>
-          </a:xfrm>
-          <a:prstGeom prst="rect">
-            <a:avLst/>
-          </a:prstGeom>
-          <a:solidFill>
-            <a:srgbClr val="F0F0F0"/>
-          </a:solidFill>
-          <a:ln/>
-        </p:spPr>
-      </p:sp>
-      <p:sp>
-        <p:nvSpPr>
-          <p:cNvPr id="20" name="Text 18"/>
-          <p:cNvSpPr/>
-          <p:nvPr/>
-        </p:nvSpPr>
-        <p:spPr>
-          <a:xfrm>
-            <a:off x="2834640" y="2468880"/>
-            <a:ext cx="5760720" cy="475488"/>
-          </a:xfrm>
-          <a:prstGeom prst="rect">
-            <a:avLst/>
-          </a:prstGeom>
-          <a:noFill/>
-          <a:ln/>
-        </p:spPr>
-        <p:txBody>
-          <a:bodyPr wrap="square" lIns="0" tIns="0" rIns="0" bIns="0" rtlCol="0" anchor="ctr"/>
-          <a:lstStyle/>
-          <a:p>
-            <a:pPr indent="0" marL="0">
-              <a:buNone/>
-            </a:pPr>
-            <a:r>
-              <a:rPr lang="en-US" sz="900" dirty="0">
-                <a:solidFill>
-                  <a:srgbClr val="333333"/>
-                </a:solidFill>
-                <a:latin typeface="Calibri" pitchFamily="34" charset="0"/>
-                <a:ea typeface="Calibri" pitchFamily="34" charset="-122"/>
-                <a:cs typeface="Calibri" pitchFamily="34" charset="-120"/>
-              </a:rPr>
-              <a:t>Suppression parent → supprime enfants</a:t>
-            </a:r>
-            <a:endParaRPr lang="en-US" sz="900" dirty="0"/>
-          </a:p>
-        </p:txBody>
-      </p:sp>
-      <p:sp>
-        <p:nvSpPr>
-          <p:cNvPr id="21" name="Shape 19"/>
-          <p:cNvSpPr/>
-          <p:nvPr/>
-        </p:nvSpPr>
-        <p:spPr>
-          <a:xfrm>
-            <a:off x="457200" y="2971800"/>
-            <a:ext cx="2286000" cy="475488"/>
-          </a:xfrm>
-          <a:prstGeom prst="rect">
-            <a:avLst/>
-          </a:prstGeom>
-          <a:solidFill>
-            <a:srgbClr val="E3F2FD"/>
-          </a:solidFill>
-          <a:ln/>
-        </p:spPr>
-      </p:sp>
-      <p:sp>
-        <p:nvSpPr>
-          <p:cNvPr id="22" name="Text 20"/>
-          <p:cNvSpPr/>
-          <p:nvPr/>
-        </p:nvSpPr>
-        <p:spPr>
-          <a:xfrm>
-            <a:off x="548640" y="2971800"/>
-            <a:ext cx="2103120" cy="475488"/>
-          </a:xfrm>
-          <a:prstGeom prst="rect">
-            <a:avLst/>
-          </a:prstGeom>
-          <a:noFill/>
-          <a:ln/>
-        </p:spPr>
-        <p:txBody>
-          <a:bodyPr wrap="square" lIns="0" tIns="0" rIns="0" bIns="0" rtlCol="0" anchor="ctr"/>
-          <a:lstStyle/>
-          <a:p>
-            <a:pPr indent="0" marL="0">
-              <a:buNone/>
-            </a:pPr>
-            <a:r>
-              <a:rPr lang="en-US" sz="900" b="1" dirty="0">
-                <a:solidFill>
-                  <a:srgbClr val="0D47A1"/>
-                </a:solidFill>
-                <a:latin typeface="Trebuchet MS" pitchFamily="34" charset="0"/>
-                <a:ea typeface="Trebuchet MS" pitchFamily="34" charset="-122"/>
-                <a:cs typeface="Trebuchet MS" pitchFamily="34" charset="-120"/>
-              </a:rPr>
-              <a:t>FK RESTRICT</a:t>
-            </a:r>
-            <a:endParaRPr lang="en-US" sz="900" dirty="0"/>
-          </a:p>
-        </p:txBody>
-      </p:sp>
-      <p:sp>
-        <p:nvSpPr>
-          <p:cNvPr id="23" name="Shape 21"/>
-          <p:cNvSpPr/>
-          <p:nvPr/>
-        </p:nvSpPr>
-        <p:spPr>
-          <a:xfrm>
-            <a:off x="2743200" y="2971800"/>
-            <a:ext cx="5943600" cy="475488"/>
-          </a:xfrm>
-          <a:prstGeom prst="rect">
-            <a:avLst/>
-          </a:prstGeom>
-          <a:solidFill>
-            <a:srgbClr val="E3F2FD"/>
-          </a:solidFill>
-          <a:ln/>
-        </p:spPr>
-      </p:sp>
-      <p:sp>
-        <p:nvSpPr>
-          <p:cNvPr id="24" name="Text 22"/>
-          <p:cNvSpPr/>
-          <p:nvPr/>
-        </p:nvSpPr>
-        <p:spPr>
-          <a:xfrm>
-            <a:off x="2834640" y="2971800"/>
-            <a:ext cx="5760720" cy="475488"/>
-          </a:xfrm>
-          <a:prstGeom prst="rect">
-            <a:avLst/>
-          </a:prstGeom>
-          <a:noFill/>
-          <a:ln/>
-        </p:spPr>
-        <p:txBody>
-          <a:bodyPr wrap="square" lIns="0" tIns="0" rIns="0" bIns="0" rtlCol="0" anchor="ctr"/>
-          <a:lstStyle/>
-          <a:p>
-            <a:pPr indent="0" marL="0">
-              <a:buNone/>
-            </a:pPr>
-            <a:r>
-              <a:rPr lang="en-US" sz="900" dirty="0">
-                <a:solidFill>
-                  <a:srgbClr val="333333"/>
-                </a:solidFill>
-                <a:latin typeface="Calibri" pitchFamily="34" charset="0"/>
-                <a:ea typeface="Calibri" pitchFamily="34" charset="-122"/>
-                <a:cs typeface="Calibri" pitchFamily="34" charset="-120"/>
-              </a:rPr>
-              <a:t>Bloque suppression si enfants existent — erreur 1451</a:t>
-            </a:r>
-            <a:endParaRPr lang="en-US" sz="900" dirty="0"/>
-          </a:p>
-        </p:txBody>
-      </p:sp>
-      <p:sp>
-        <p:nvSpPr>
-          <p:cNvPr id="25" name="Shape 23"/>
-          <p:cNvSpPr/>
-          <p:nvPr/>
-        </p:nvSpPr>
-        <p:spPr>
-          <a:xfrm>
-            <a:off x="457200" y="3474720"/>
-            <a:ext cx="2286000" cy="475488"/>
-          </a:xfrm>
-          <a:prstGeom prst="rect">
-            <a:avLst/>
-          </a:prstGeom>
-          <a:solidFill>
-            <a:srgbClr val="F0F0F0"/>
-          </a:solidFill>
-          <a:ln/>
-        </p:spPr>
-      </p:sp>
-      <p:sp>
-        <p:nvSpPr>
-          <p:cNvPr id="26" name="Text 24"/>
-          <p:cNvSpPr/>
-          <p:nvPr/>
-        </p:nvSpPr>
-        <p:spPr>
-          <a:xfrm>
-            <a:off x="548640" y="3474720"/>
-            <a:ext cx="2103120" cy="475488"/>
-          </a:xfrm>
-          <a:prstGeom prst="rect">
-            <a:avLst/>
-          </a:prstGeom>
-          <a:noFill/>
-          <a:ln/>
-        </p:spPr>
-        <p:txBody>
-          <a:bodyPr wrap="square" lIns="0" tIns="0" rIns="0" bIns="0" rtlCol="0" anchor="ctr"/>
-          <a:lstStyle/>
-          <a:p>
-            <a:pPr indent="0" marL="0">
-              <a:buNone/>
-            </a:pPr>
-            <a:r>
-              <a:rPr lang="en-US" sz="900" b="1" dirty="0">
-                <a:solidFill>
-                  <a:srgbClr val="0D47A1"/>
-                </a:solidFill>
-                <a:latin typeface="Trebuchet MS" pitchFamily="34" charset="0"/>
-                <a:ea typeface="Trebuchet MS" pitchFamily="34" charset="-122"/>
-                <a:cs typeface="Trebuchet MS" pitchFamily="34" charset="-120"/>
-              </a:rPr>
-              <a:t>FK SET NULL</a:t>
-            </a:r>
-            <a:endParaRPr lang="en-US" sz="900" dirty="0"/>
-          </a:p>
-        </p:txBody>
-      </p:sp>
-      <p:sp>
-        <p:nvSpPr>
-          <p:cNvPr id="27" name="Shape 25"/>
-          <p:cNvSpPr/>
-          <p:nvPr/>
-        </p:nvSpPr>
-        <p:spPr>
-          <a:xfrm>
-            <a:off x="2743200" y="3474720"/>
-            <a:ext cx="5943600" cy="475488"/>
-          </a:xfrm>
-          <a:prstGeom prst="rect">
-            <a:avLst/>
-          </a:prstGeom>
-          <a:solidFill>
-            <a:srgbClr val="F0F0F0"/>
-          </a:solidFill>
-          <a:ln/>
-        </p:spPr>
-      </p:sp>
-      <p:sp>
-        <p:nvSpPr>
-          <p:cNvPr id="28" name="Text 26"/>
-          <p:cNvSpPr/>
-          <p:nvPr/>
-        </p:nvSpPr>
-        <p:spPr>
-          <a:xfrm>
-            <a:off x="2834640" y="3474720"/>
-            <a:ext cx="5760720" cy="475488"/>
-          </a:xfrm>
-          <a:prstGeom prst="rect">
-            <a:avLst/>
-          </a:prstGeom>
-          <a:noFill/>
-          <a:ln/>
-        </p:spPr>
-        <p:txBody>
-          <a:bodyPr wrap="square" lIns="0" tIns="0" rIns="0" bIns="0" rtlCol="0" anchor="ctr"/>
-          <a:lstStyle/>
-          <a:p>
-            <a:pPr indent="0" marL="0">
-              <a:buNone/>
-            </a:pPr>
-            <a:r>
-              <a:rPr lang="en-US" sz="900" dirty="0">
-                <a:solidFill>
-                  <a:srgbClr val="333333"/>
-                </a:solidFill>
-                <a:latin typeface="Calibri" pitchFamily="34" charset="0"/>
-                <a:ea typeface="Calibri" pitchFamily="34" charset="-122"/>
-                <a:cs typeface="Calibri" pitchFamily="34" charset="-120"/>
-              </a:rPr>
-              <a:t>Suppression parent → FK enfants = NULL</a:t>
-            </a:r>
-            <a:endParaRPr lang="en-US" sz="900" dirty="0"/>
-          </a:p>
-        </p:txBody>
-      </p:sp>
-      <p:sp>
-        <p:nvSpPr>
-          <p:cNvPr id="29" name="Shape 27"/>
-          <p:cNvSpPr/>
-          <p:nvPr/>
-        </p:nvSpPr>
-        <p:spPr>
-          <a:xfrm>
-            <a:off x="457200" y="3977640"/>
-            <a:ext cx="2286000" cy="475488"/>
-          </a:xfrm>
-          <a:prstGeom prst="rect">
-            <a:avLst/>
-          </a:prstGeom>
-          <a:solidFill>
-            <a:srgbClr val="E3F2FD"/>
-          </a:solidFill>
-          <a:ln/>
-        </p:spPr>
-      </p:sp>
-      <p:sp>
-        <p:nvSpPr>
-          <p:cNvPr id="30" name="Text 28"/>
-          <p:cNvSpPr/>
-          <p:nvPr/>
-        </p:nvSpPr>
-        <p:spPr>
-          <a:xfrm>
-            <a:off x="548640" y="3977640"/>
-            <a:ext cx="2103120" cy="475488"/>
-          </a:xfrm>
-          <a:prstGeom prst="rect">
-            <a:avLst/>
-          </a:prstGeom>
-          <a:noFill/>
-          <a:ln/>
-        </p:spPr>
-        <p:txBody>
-          <a:bodyPr wrap="square" lIns="0" tIns="0" rIns="0" bIns="0" rtlCol="0" anchor="ctr"/>
-          <a:lstStyle/>
-          <a:p>
-            <a:pPr indent="0" marL="0">
-              <a:buNone/>
-            </a:pPr>
-            <a:r>
-              <a:rPr lang="en-US" sz="900" b="1" dirty="0">
-                <a:solidFill>
-                  <a:srgbClr val="0D47A1"/>
-                </a:solidFill>
-                <a:latin typeface="Trebuchet MS" pitchFamily="34" charset="0"/>
-                <a:ea typeface="Trebuchet MS" pitchFamily="34" charset="-122"/>
-                <a:cs typeface="Trebuchet MS" pitchFamily="34" charset="-120"/>
-              </a:rPr>
-              <a:t>ALTER TABLE</a:t>
-            </a:r>
-            <a:endParaRPr lang="en-US" sz="900" dirty="0"/>
-          </a:p>
-        </p:txBody>
-      </p:sp>
-      <p:sp>
-        <p:nvSpPr>
-          <p:cNvPr id="31" name="Shape 29"/>
-          <p:cNvSpPr/>
-          <p:nvPr/>
-        </p:nvSpPr>
-        <p:spPr>
-          <a:xfrm>
-            <a:off x="2743200" y="3977640"/>
-            <a:ext cx="5943600" cy="475488"/>
-          </a:xfrm>
-          <a:prstGeom prst="rect">
-            <a:avLst/>
-          </a:prstGeom>
-          <a:solidFill>
-            <a:srgbClr val="E3F2FD"/>
-          </a:solidFill>
-          <a:ln/>
-        </p:spPr>
-      </p:sp>
-      <p:sp>
-        <p:nvSpPr>
-          <p:cNvPr id="32" name="Text 30"/>
-          <p:cNvSpPr/>
-          <p:nvPr/>
-        </p:nvSpPr>
-        <p:spPr>
-          <a:xfrm>
-            <a:off x="2834640" y="3977640"/>
-            <a:ext cx="5760720" cy="475488"/>
-          </a:xfrm>
-          <a:prstGeom prst="rect">
-            <a:avLst/>
-          </a:prstGeom>
-          <a:noFill/>
-          <a:ln/>
-        </p:spPr>
-        <p:txBody>
-          <a:bodyPr wrap="square" lIns="0" tIns="0" rIns="0" bIns="0" rtlCol="0" anchor="ctr"/>
-          <a:lstStyle/>
-          <a:p>
-            <a:pPr indent="0" marL="0">
-              <a:buNone/>
-            </a:pPr>
-            <a:r>
-              <a:rPr lang="en-US" sz="900" dirty="0">
-                <a:solidFill>
-                  <a:srgbClr val="333333"/>
-                </a:solidFill>
-                <a:latin typeface="Calibri" pitchFamily="34" charset="0"/>
-                <a:ea typeface="Calibri" pitchFamily="34" charset="-122"/>
-                <a:cs typeface="Calibri" pitchFamily="34" charset="-120"/>
-              </a:rPr>
-              <a:t>Modifier contraintes après création</a:t>
-            </a:r>
-            <a:endParaRPr lang="en-US" sz="900" dirty="0"/>
+              <a:t>Assemblez les bonnes contraintes pour proteger les donnees</a:t>
+            </a:r>
+            <a:endParaRPr lang="en-US" sz="1300" dirty="0"/>
           </a:p>
         </p:txBody>
       </p:sp>
